--- a/presentation/Scania APS Gruppresentation.pptx
+++ b/presentation/Scania APS Gruppresentation.pptx
@@ -4,19 +4,21 @@
   <p:sldMasterIdLst>
     <p:sldMasterId id="2147483648" r:id="rId1"/>
   </p:sldMasterIdLst>
+  <p:notesMasterIdLst>
+    <p:notesMasterId r:id="rId12"/>
+  </p:notesMasterIdLst>
   <p:sldIdLst>
     <p:sldId id="256" r:id="rId2"/>
     <p:sldId id="257" r:id="rId3"/>
     <p:sldId id="258" r:id="rId4"/>
     <p:sldId id="259" r:id="rId5"/>
     <p:sldId id="260" r:id="rId6"/>
-    <p:sldId id="261" r:id="rId7"/>
-    <p:sldId id="262" r:id="rId8"/>
-    <p:sldId id="263" r:id="rId9"/>
+    <p:sldId id="264" r:id="rId7"/>
+    <p:sldId id="261" r:id="rId8"/>
+    <p:sldId id="265" r:id="rId9"/>
+    <p:sldId id="262" r:id="rId10"/>
+    <p:sldId id="263" r:id="rId11"/>
   </p:sldIdLst>
-  <p:notesMasterIdLst>
-    <p:notesMasterId r:id="rId10"/>
-  </p:notesMasterIdLst>
   <p:sldSz cx="12192000" cy="6858000"/>
   <p:notesSz cx="6858000" cy="12192000"/>
   <p:defaultTextStyle>
@@ -111,6 +113,11 @@
       </a:defRPr>
     </a:lvl9pPr>
   </p:defaultTextStyle>
+  <p:extLst>
+    <p:ext uri="{EFAFB233-063F-42B5-8137-9DF3F51BA10A}">
+      <p15:sldGuideLst xmlns:p15="http://schemas.microsoft.com/office/powerpoint/2012/main"/>
+    </p:ext>
+  </p:extLst>
 </p:presentation>
 </file>
 
@@ -136,234 +143,10 @@
           <a:chExt cx="0" cy="0"/>
         </a:xfrm>
       </p:grpSpPr>
-      <p:sp>
-        <p:nvSpPr>
-          <p:cNvPr id="2" name="Header Placeholder 1"/>
-          <p:cNvSpPr>
-            <a:spLocks noGrp="1"/>
-          </p:cNvSpPr>
-          <p:nvPr>
-            <p:ph type="hdr" sz="quarter"/>
-          </p:nvPr>
-        </p:nvSpPr>
-        <p:spPr>
-          <a:xfrm>
-            <a:off x="0" y="0"/>
-            <a:ext cx="2971800" cy="458788"/>
-          </a:xfrm>
-          <a:prstGeom prst="rect">
-            <a:avLst/>
-          </a:prstGeom>
-        </p:spPr>
-        <p:txBody>
-          <a:bodyPr vert="horz" lIns="91440" tIns="45720" rIns="91440" bIns="45720" rtlCol="0"/>
-          <a:lstStyle>
-            <a:lvl1pPr algn="l">
-              <a:defRPr sz="1200"/>
-            </a:lvl1pPr>
-          </a:lstStyle>
-          <a:p>
-            <a:endParaRPr lang="en-US"/>
-          </a:p>
-        </p:txBody>
-      </p:sp>
-      <p:sp>
-        <p:nvSpPr>
-          <p:cNvPr id="3" name="Date Placeholder 2"/>
-          <p:cNvSpPr>
-            <a:spLocks noGrp="1"/>
-          </p:cNvSpPr>
-          <p:nvPr>
-            <p:ph type="dt" idx="1"/>
-          </p:nvPr>
-        </p:nvSpPr>
-        <p:spPr>
-          <a:xfrm>
-            <a:off x="3884613" y="0"/>
-            <a:ext cx="2971800" cy="458788"/>
-          </a:xfrm>
-          <a:prstGeom prst="rect">
-            <a:avLst/>
-          </a:prstGeom>
-        </p:spPr>
-        <p:txBody>
-          <a:bodyPr vert="horz" lIns="91440" tIns="45720" rIns="91440" bIns="45720" rtlCol="0"/>
-          <a:lstStyle>
-            <a:lvl1pPr algn="r">
-              <a:defRPr sz="1200"/>
-            </a:lvl1pPr>
-          </a:lstStyle>
-          <a:p>
-            <a:fld id="{5282F153-3F37-0F45-9E97-73ACFA13230C}" type="datetimeFigureOut">
-              <a:rPr lang="en-US"/>
-              <a:t>7/23/19</a:t>
-            </a:fld>
-            <a:endParaRPr lang="en-US"/>
-          </a:p>
-        </p:txBody>
-      </p:sp>
-      <p:sp>
-        <p:nvSpPr>
-          <p:cNvPr id="4" name="Slide Image Placeholder 3"/>
-          <p:cNvSpPr>
-            <a:spLocks noGrp="1" noRot="1" noChangeAspect="1"/>
-          </p:cNvSpPr>
-          <p:nvPr>
-            <p:ph type="sldImg" idx="2"/>
-          </p:nvPr>
-        </p:nvSpPr>
-        <p:spPr>
-          <a:xfrm>
-            <a:off x="685800" y="1143000"/>
-            <a:ext cx="5486400" cy="3086100"/>
-          </a:xfrm>
-          <a:prstGeom prst="rect">
-            <a:avLst/>
-          </a:prstGeom>
-          <a:noFill/>
-          <a:ln w="12700">
-            <a:solidFill>
-              <a:prstClr val="black"/>
-            </a:solidFill>
-          </a:ln>
-        </p:spPr>
-        <p:txBody>
-          <a:bodyPr vert="horz" lIns="91440" tIns="45720" rIns="91440" bIns="45720" rtlCol="0" anchor="ctr"/>
-          <a:lstStyle/>
-          <a:p>
-            <a:endParaRPr lang="en-US"/>
-          </a:p>
-        </p:txBody>
-      </p:sp>
-      <p:sp>
-        <p:nvSpPr>
-          <p:cNvPr id="5" name="Notes Placeholder 4"/>
-          <p:cNvSpPr>
-            <a:spLocks noGrp="1"/>
-          </p:cNvSpPr>
-          <p:nvPr>
-            <p:ph type="body" sz="quarter" idx="3"/>
-          </p:nvPr>
-        </p:nvSpPr>
-        <p:spPr>
-          <a:xfrm>
-            <a:off x="685800" y="4400550"/>
-            <a:ext cx="5486400" cy="3600450"/>
-          </a:xfrm>
-          <a:prstGeom prst="rect">
-            <a:avLst/>
-          </a:prstGeom>
-        </p:spPr>
-        <p:txBody>
-          <a:bodyPr vert="horz" lIns="91440" tIns="45720" rIns="91440" bIns="45720" rtlCol="0"/>
-          <a:lstStyle/>
-          <a:p>
-            <a:pPr lvl="0"/>
-            <a:r>
-              <a:rPr lang="en-US"/>
-              <a:t>Click to edit Master text styles</a:t>
-            </a:r>
-          </a:p>
-          <a:p>
-            <a:pPr lvl="1"/>
-            <a:r>
-              <a:rPr lang="en-US"/>
-              <a:t>Second level</a:t>
-            </a:r>
-          </a:p>
-          <a:p>
-            <a:pPr lvl="2"/>
-            <a:r>
-              <a:rPr lang="en-US"/>
-              <a:t>Third level</a:t>
-            </a:r>
-          </a:p>
-          <a:p>
-            <a:pPr lvl="3"/>
-            <a:r>
-              <a:rPr lang="en-US"/>
-              <a:t>Fourth level</a:t>
-            </a:r>
-          </a:p>
-          <a:p>
-            <a:pPr lvl="4"/>
-            <a:r>
-              <a:rPr lang="en-US"/>
-              <a:t>Fifth level</a:t>
-            </a:r>
-          </a:p>
-        </p:txBody>
-      </p:sp>
-      <p:sp>
-        <p:nvSpPr>
-          <p:cNvPr id="6" name="Footer Placeholder 5"/>
-          <p:cNvSpPr>
-            <a:spLocks noGrp="1"/>
-          </p:cNvSpPr>
-          <p:nvPr>
-            <p:ph type="ftr" sz="quarter" idx="4"/>
-          </p:nvPr>
-        </p:nvSpPr>
-        <p:spPr>
-          <a:xfrm>
-            <a:off x="0" y="8685213"/>
-            <a:ext cx="2971800" cy="458787"/>
-          </a:xfrm>
-          <a:prstGeom prst="rect">
-            <a:avLst/>
-          </a:prstGeom>
-        </p:spPr>
-        <p:txBody>
-          <a:bodyPr vert="horz" lIns="91440" tIns="45720" rIns="91440" bIns="45720" rtlCol="0" anchor="b"/>
-          <a:lstStyle>
-            <a:lvl1pPr algn="l">
-              <a:defRPr sz="1200"/>
-            </a:lvl1pPr>
-          </a:lstStyle>
-          <a:p>
-            <a:endParaRPr lang="en-US"/>
-          </a:p>
-        </p:txBody>
-      </p:sp>
-      <p:sp>
-        <p:nvSpPr>
-          <p:cNvPr id="7" name="Slide Number Placeholder 6"/>
-          <p:cNvSpPr>
-            <a:spLocks noGrp="1"/>
-          </p:cNvSpPr>
-          <p:nvPr>
-            <p:ph type="sldNum" sz="quarter" idx="5"/>
-          </p:nvPr>
-        </p:nvSpPr>
-        <p:spPr>
-          <a:xfrm>
-            <a:off x="3884613" y="8685213"/>
-            <a:ext cx="2971800" cy="458787"/>
-          </a:xfrm>
-          <a:prstGeom prst="rect">
-            <a:avLst/>
-          </a:prstGeom>
-        </p:spPr>
-        <p:txBody>
-          <a:bodyPr vert="horz" lIns="91440" tIns="45720" rIns="91440" bIns="45720" rtlCol="0" anchor="b"/>
-          <a:lstStyle>
-            <a:lvl1pPr algn="r">
-              <a:defRPr sz="1200"/>
-            </a:lvl1pPr>
-          </a:lstStyle>
-          <a:p>
-            <a:fld id="{CE5E9CC1-C706-0F49-92D6-E571CC5EEA8F}" type="slidenum">
-              <a:rPr lang="en-US"/>
-              <a:t>‹#›</a:t>
-            </a:fld>
-            <a:endParaRPr lang="en-US"/>
-          </a:p>
-        </p:txBody>
-      </p:sp>
     </p:spTree>
     <p:extLst>
       <p:ext uri="{BB962C8B-B14F-4D97-AF65-F5344CB8AC3E}">
-        <p14:creationId xmlns:p14="http://schemas.microsoft.com/office/powerpoint/2010/main" val="1024086991"/>
+        <p14:creationId xmlns:p14="http://schemas.microsoft.com/office/powerpoint/2010/main" val="3751944865"/>
       </p:ext>
     </p:extLst>
   </p:cSld>
@@ -507,10 +290,6 @@
           <a:bodyPr/>
           <a:lstStyle/>
           <a:p>
-            <a:r>
-              <a:rPr lang="en-US" dirty="0"/>
-              <a:t/>
-            </a:r>
             <a:endParaRPr lang="en-US" dirty="0"/>
           </a:p>
         </p:txBody>
@@ -533,6 +312,90 @@
             <a:fld id="{F7021451-1387-4CA6-816F-3879F97B5CBC}" type="slidenum">
               <a:rPr lang="en-US"/>
               <a:t>1</a:t>
+            </a:fld>
+            <a:endParaRPr lang="en-US"/>
+          </a:p>
+        </p:txBody>
+      </p:sp>
+    </p:spTree>
+    <p:extLst>
+      <p:ext uri="{BB962C8B-B14F-4D97-AF65-F5344CB8AC3E}">
+        <p14:creationId xmlns:p14="http://schemas.microsoft.com/office/powerpoint/2010/main" val="1024086991"/>
+      </p:ext>
+    </p:extLst>
+  </p:cSld>
+  <p:clrMapOvr>
+    <a:masterClrMapping/>
+  </p:clrMapOvr>
+</p:notes>
+</file>
+
+<file path=ppt/notesSlides/notesSlide10.xml><?xml version="1.0" encoding="utf-8"?>
+<p:notes xmlns:a="http://schemas.openxmlformats.org/drawingml/2006/main" xmlns:r="http://schemas.openxmlformats.org/officeDocument/2006/relationships" xmlns:p="http://schemas.openxmlformats.org/presentationml/2006/main">
+  <p:cSld>
+    <p:spTree>
+      <p:nvGrpSpPr>
+        <p:cNvPr id="1" name=""/>
+        <p:cNvGrpSpPr/>
+        <p:nvPr/>
+      </p:nvGrpSpPr>
+      <p:grpSpPr>
+        <a:xfrm>
+          <a:off x="0" y="0"/>
+          <a:ext cx="0" cy="0"/>
+          <a:chOff x="0" y="0"/>
+          <a:chExt cx="0" cy="0"/>
+        </a:xfrm>
+      </p:grpSpPr>
+      <p:sp>
+        <p:nvSpPr>
+          <p:cNvPr id="2" name="Slide Image Placeholder 1"/>
+          <p:cNvSpPr>
+            <a:spLocks noGrp="1" noRot="1" noChangeAspect="1"/>
+          </p:cNvSpPr>
+          <p:nvPr>
+            <p:ph type="sldImg"/>
+          </p:nvPr>
+        </p:nvSpPr>
+        <p:spPr/>
+      </p:sp>
+      <p:sp>
+        <p:nvSpPr>
+          <p:cNvPr id="3" name="Notes Placeholder 2"/>
+          <p:cNvSpPr>
+            <a:spLocks noGrp="1"/>
+          </p:cNvSpPr>
+          <p:nvPr>
+            <p:ph type="body" idx="1"/>
+          </p:nvPr>
+        </p:nvSpPr>
+        <p:spPr/>
+        <p:txBody>
+          <a:bodyPr/>
+          <a:lstStyle/>
+          <a:p>
+            <a:endParaRPr lang="en-US" dirty="0"/>
+          </a:p>
+        </p:txBody>
+      </p:sp>
+      <p:sp>
+        <p:nvSpPr>
+          <p:cNvPr id="4" name="Slide Number Placeholder 3"/>
+          <p:cNvSpPr>
+            <a:spLocks noGrp="1"/>
+          </p:cNvSpPr>
+          <p:nvPr>
+            <p:ph type="sldNum" sz="quarter" idx="10"/>
+          </p:nvPr>
+        </p:nvSpPr>
+        <p:spPr/>
+        <p:txBody>
+          <a:bodyPr/>
+          <a:lstStyle/>
+          <a:p>
+            <a:fld id="{F7021451-1387-4CA6-816F-3879F97B5CBC}" type="slidenum">
+              <a:rPr lang="en-US"/>
+              <a:t>10</a:t>
             </a:fld>
             <a:endParaRPr lang="en-US"/>
           </a:p>
@@ -595,10 +458,6 @@
           <a:bodyPr/>
           <a:lstStyle/>
           <a:p>
-            <a:r>
-              <a:rPr lang="en-US" dirty="0"/>
-              <a:t/>
-            </a:r>
             <a:endParaRPr lang="en-US" dirty="0"/>
           </a:p>
         </p:txBody>
@@ -683,10 +542,6 @@
           <a:bodyPr/>
           <a:lstStyle/>
           <a:p>
-            <a:r>
-              <a:rPr lang="en-US" dirty="0"/>
-              <a:t/>
-            </a:r>
             <a:endParaRPr lang="en-US" dirty="0"/>
           </a:p>
         </p:txBody>
@@ -771,10 +626,6 @@
           <a:bodyPr/>
           <a:lstStyle/>
           <a:p>
-            <a:r>
-              <a:rPr lang="en-US" dirty="0"/>
-              <a:t/>
-            </a:r>
             <a:endParaRPr lang="en-US" dirty="0"/>
           </a:p>
         </p:txBody>
@@ -859,10 +710,6 @@
           <a:bodyPr/>
           <a:lstStyle/>
           <a:p>
-            <a:r>
-              <a:rPr lang="en-US" dirty="0"/>
-              <a:t/>
-            </a:r>
             <a:endParaRPr lang="en-US" dirty="0"/>
           </a:p>
         </p:txBody>
@@ -908,7 +755,13 @@
   <p:cSld>
     <p:spTree>
       <p:nvGrpSpPr>
-        <p:cNvPr id="1" name=""/>
+        <p:cNvPr id="1" name="">
+          <a:extLst>
+            <a:ext uri="{FF2B5EF4-FFF2-40B4-BE49-F238E27FC236}">
+              <a16:creationId xmlns:a16="http://schemas.microsoft.com/office/drawing/2014/main" id="{88DAEFD7-7680-896C-5D8F-CACBEAB73910}"/>
+            </a:ext>
+          </a:extLst>
+        </p:cNvPr>
         <p:cNvGrpSpPr/>
         <p:nvPr/>
       </p:nvGrpSpPr>
@@ -922,7 +775,13 @@
       </p:grpSpPr>
       <p:sp>
         <p:nvSpPr>
-          <p:cNvPr id="2" name="Slide Image Placeholder 1"/>
+          <p:cNvPr id="2" name="Slide Image Placeholder 1">
+            <a:extLst>
+              <a:ext uri="{FF2B5EF4-FFF2-40B4-BE49-F238E27FC236}">
+                <a16:creationId xmlns:a16="http://schemas.microsoft.com/office/drawing/2014/main" id="{E4FE237A-8AC0-6EF3-5DC7-401729C2786D}"/>
+              </a:ext>
+            </a:extLst>
+          </p:cNvPr>
           <p:cNvSpPr>
             <a:spLocks noGrp="1" noRot="1" noChangeAspect="1"/>
           </p:cNvSpPr>
@@ -934,7 +793,13 @@
       </p:sp>
       <p:sp>
         <p:nvSpPr>
-          <p:cNvPr id="3" name="Notes Placeholder 2"/>
+          <p:cNvPr id="3" name="Notes Placeholder 2">
+            <a:extLst>
+              <a:ext uri="{FF2B5EF4-FFF2-40B4-BE49-F238E27FC236}">
+                <a16:creationId xmlns:a16="http://schemas.microsoft.com/office/drawing/2014/main" id="{57BEC366-16E8-C2A5-DAD1-790743649178}"/>
+              </a:ext>
+            </a:extLst>
+          </p:cNvPr>
           <p:cNvSpPr>
             <a:spLocks noGrp="1"/>
           </p:cNvSpPr>
@@ -947,17 +812,19 @@
           <a:bodyPr/>
           <a:lstStyle/>
           <a:p>
-            <a:r>
-              <a:rPr lang="en-US" dirty="0"/>
-              <a:t/>
-            </a:r>
             <a:endParaRPr lang="en-US" dirty="0"/>
           </a:p>
         </p:txBody>
       </p:sp>
       <p:sp>
         <p:nvSpPr>
-          <p:cNvPr id="4" name="Slide Number Placeholder 3"/>
+          <p:cNvPr id="4" name="Slide Number Placeholder 3">
+            <a:extLst>
+              <a:ext uri="{FF2B5EF4-FFF2-40B4-BE49-F238E27FC236}">
+                <a16:creationId xmlns:a16="http://schemas.microsoft.com/office/drawing/2014/main" id="{154A88D6-684A-C738-A4DB-DD68606A9474}"/>
+              </a:ext>
+            </a:extLst>
+          </p:cNvPr>
           <p:cNvSpPr>
             <a:spLocks noGrp="1"/>
           </p:cNvSpPr>
@@ -981,7 +848,7 @@
     </p:spTree>
     <p:extLst>
       <p:ext uri="{BB962C8B-B14F-4D97-AF65-F5344CB8AC3E}">
-        <p14:creationId xmlns:p14="http://schemas.microsoft.com/office/powerpoint/2010/main" val="1024086991"/>
+        <p14:creationId xmlns:p14="http://schemas.microsoft.com/office/powerpoint/2010/main" val="1984091426"/>
       </p:ext>
     </p:extLst>
   </p:cSld>
@@ -1035,10 +902,6 @@
           <a:bodyPr/>
           <a:lstStyle/>
           <a:p>
-            <a:r>
-              <a:rPr lang="en-US" dirty="0"/>
-              <a:t/>
-            </a:r>
             <a:endParaRPr lang="en-US" dirty="0"/>
           </a:p>
         </p:txBody>
@@ -1084,6 +947,114 @@
   <p:cSld>
     <p:spTree>
       <p:nvGrpSpPr>
+        <p:cNvPr id="1" name="">
+          <a:extLst>
+            <a:ext uri="{FF2B5EF4-FFF2-40B4-BE49-F238E27FC236}">
+              <a16:creationId xmlns:a16="http://schemas.microsoft.com/office/drawing/2014/main" id="{E66AC3FD-89FF-0F13-102A-24430DEFB1EB}"/>
+            </a:ext>
+          </a:extLst>
+        </p:cNvPr>
+        <p:cNvGrpSpPr/>
+        <p:nvPr/>
+      </p:nvGrpSpPr>
+      <p:grpSpPr>
+        <a:xfrm>
+          <a:off x="0" y="0"/>
+          <a:ext cx="0" cy="0"/>
+          <a:chOff x="0" y="0"/>
+          <a:chExt cx="0" cy="0"/>
+        </a:xfrm>
+      </p:grpSpPr>
+      <p:sp>
+        <p:nvSpPr>
+          <p:cNvPr id="2" name="Slide Image Placeholder 1">
+            <a:extLst>
+              <a:ext uri="{FF2B5EF4-FFF2-40B4-BE49-F238E27FC236}">
+                <a16:creationId xmlns:a16="http://schemas.microsoft.com/office/drawing/2014/main" id="{EF5A364A-E730-B06D-E298-207B2F537F17}"/>
+              </a:ext>
+            </a:extLst>
+          </p:cNvPr>
+          <p:cNvSpPr>
+            <a:spLocks noGrp="1" noRot="1" noChangeAspect="1"/>
+          </p:cNvSpPr>
+          <p:nvPr>
+            <p:ph type="sldImg"/>
+          </p:nvPr>
+        </p:nvSpPr>
+        <p:spPr/>
+      </p:sp>
+      <p:sp>
+        <p:nvSpPr>
+          <p:cNvPr id="3" name="Notes Placeholder 2">
+            <a:extLst>
+              <a:ext uri="{FF2B5EF4-FFF2-40B4-BE49-F238E27FC236}">
+                <a16:creationId xmlns:a16="http://schemas.microsoft.com/office/drawing/2014/main" id="{21E4F1B7-7BB2-0E52-3CC1-3441BA702D19}"/>
+              </a:ext>
+            </a:extLst>
+          </p:cNvPr>
+          <p:cNvSpPr>
+            <a:spLocks noGrp="1"/>
+          </p:cNvSpPr>
+          <p:nvPr>
+            <p:ph type="body" idx="1"/>
+          </p:nvPr>
+        </p:nvSpPr>
+        <p:spPr/>
+        <p:txBody>
+          <a:bodyPr/>
+          <a:lstStyle/>
+          <a:p>
+            <a:endParaRPr lang="en-US" dirty="0"/>
+          </a:p>
+        </p:txBody>
+      </p:sp>
+      <p:sp>
+        <p:nvSpPr>
+          <p:cNvPr id="4" name="Slide Number Placeholder 3">
+            <a:extLst>
+              <a:ext uri="{FF2B5EF4-FFF2-40B4-BE49-F238E27FC236}">
+                <a16:creationId xmlns:a16="http://schemas.microsoft.com/office/drawing/2014/main" id="{DE48EFBD-E02D-B551-5973-2CADD85B0A79}"/>
+              </a:ext>
+            </a:extLst>
+          </p:cNvPr>
+          <p:cNvSpPr>
+            <a:spLocks noGrp="1"/>
+          </p:cNvSpPr>
+          <p:nvPr>
+            <p:ph type="sldNum" sz="quarter" idx="10"/>
+          </p:nvPr>
+        </p:nvSpPr>
+        <p:spPr/>
+        <p:txBody>
+          <a:bodyPr/>
+          <a:lstStyle/>
+          <a:p>
+            <a:fld id="{F7021451-1387-4CA6-816F-3879F97B5CBC}" type="slidenum">
+              <a:rPr lang="en-US"/>
+              <a:t>8</a:t>
+            </a:fld>
+            <a:endParaRPr lang="en-US"/>
+          </a:p>
+        </p:txBody>
+      </p:sp>
+    </p:spTree>
+    <p:extLst>
+      <p:ext uri="{BB962C8B-B14F-4D97-AF65-F5344CB8AC3E}">
+        <p14:creationId xmlns:p14="http://schemas.microsoft.com/office/powerpoint/2010/main" val="1488601534"/>
+      </p:ext>
+    </p:extLst>
+  </p:cSld>
+  <p:clrMapOvr>
+    <a:masterClrMapping/>
+  </p:clrMapOvr>
+</p:notes>
+</file>
+
+<file path=ppt/notesSlides/notesSlide9.xml><?xml version="1.0" encoding="utf-8"?>
+<p:notes xmlns:a="http://schemas.openxmlformats.org/drawingml/2006/main" xmlns:r="http://schemas.openxmlformats.org/officeDocument/2006/relationships" xmlns:p="http://schemas.openxmlformats.org/presentationml/2006/main">
+  <p:cSld>
+    <p:spTree>
+      <p:nvGrpSpPr>
         <p:cNvPr id="1" name=""/>
         <p:cNvGrpSpPr/>
         <p:nvPr/>
@@ -1123,10 +1094,6 @@
           <a:bodyPr/>
           <a:lstStyle/>
           <a:p>
-            <a:r>
-              <a:rPr lang="en-US" dirty="0"/>
-              <a:t/>
-            </a:r>
             <a:endParaRPr lang="en-US" dirty="0"/>
           </a:p>
         </p:txBody>
@@ -1148,7 +1115,7 @@
           <a:p>
             <a:fld id="{F7021451-1387-4CA6-816F-3879F97B5CBC}" type="slidenum">
               <a:rPr lang="en-US"/>
-              <a:t>8</a:t>
+              <a:t>9</a:t>
             </a:fld>
             <a:endParaRPr lang="en-US"/>
           </a:p>
@@ -1200,6 +1167,11 @@
 <file path=ppt/slideMasters/slideMaster1.xml><?xml version="1.0" encoding="utf-8"?>
 <p:sldMaster xmlns:a="http://schemas.openxmlformats.org/drawingml/2006/main" xmlns:r="http://schemas.openxmlformats.org/officeDocument/2006/relationships" xmlns:p="http://schemas.openxmlformats.org/presentationml/2006/main">
   <p:cSld>
+    <p:bg>
+      <p:bgRef idx="1001">
+        <a:schemeClr val="bg1"/>
+      </p:bgRef>
+    </p:bg>
     <p:spTree>
       <p:nvGrpSpPr>
         <p:cNvPr id="1" name=""/>
@@ -1482,6 +1454,7 @@
         <a:solidFill>
           <a:srgbClr val="173647"/>
         </a:solidFill>
+        <a:effectLst/>
       </p:bgPr>
     </p:bg>
     <p:spTree>
@@ -1522,6 +1495,13 @@
             <a:prstDash val="solid"/>
           </a:ln>
         </p:spPr>
+        <p:txBody>
+          <a:bodyPr/>
+          <a:lstStyle/>
+          <a:p>
+            <a:endParaRPr lang="sv-SE"/>
+          </a:p>
+        </p:txBody>
       </p:sp>
       <p:sp>
         <p:nvSpPr>
@@ -1551,6 +1531,13 @@
             <a:prstDash val="solid"/>
           </a:ln>
         </p:spPr>
+        <p:txBody>
+          <a:bodyPr/>
+          <a:lstStyle/>
+          <a:p>
+            <a:endParaRPr lang="sv-SE"/>
+          </a:p>
+        </p:txBody>
       </p:sp>
       <p:sp>
         <p:nvSpPr>
@@ -1580,6 +1567,13 @@
             <a:prstDash val="solid"/>
           </a:ln>
         </p:spPr>
+        <p:txBody>
+          <a:bodyPr/>
+          <a:lstStyle/>
+          <a:p>
+            <a:endParaRPr lang="sv-SE"/>
+          </a:p>
+        </p:txBody>
       </p:sp>
       <p:sp>
         <p:nvSpPr>
@@ -1604,11 +1598,11 @@
           </a:bodyPr>
           <a:lstStyle/>
           <a:p>
-            <a:pPr indent="0" marL="0">
-              <a:buNone/>
-            </a:pPr>
-            <a:r>
-              <a:rPr lang="en-US" sz="1400" b="1" spc="230" kern="0" dirty="0">
+            <a:pPr marL="0" indent="0">
+              <a:buNone/>
+            </a:pPr>
+            <a:r>
+              <a:rPr lang="en-US" sz="1400" b="1" kern="0" spc="230" dirty="0">
                 <a:solidFill>
                   <a:srgbClr val="8FD3C5"/>
                 </a:solidFill>
@@ -1645,7 +1639,7 @@
           </a:bodyPr>
           <a:lstStyle/>
           <a:p>
-            <a:pPr indent="0" marL="0">
+            <a:pPr marL="0" indent="0">
               <a:buNone/>
             </a:pPr>
             <a:r>
@@ -1662,7 +1656,7 @@
             <a:endParaRPr lang="en-US" sz="4200" dirty="0"/>
           </a:p>
           <a:p>
-            <a:pPr indent="0" marL="0">
+            <a:pPr marL="0" indent="0">
               <a:buNone/>
             </a:pPr>
             <a:r>
@@ -1679,7 +1673,7 @@
             <a:endParaRPr lang="en-US" sz="4200" dirty="0"/>
           </a:p>
           <a:p>
-            <a:pPr indent="0" marL="0">
+            <a:pPr marL="0" indent="0">
               <a:buNone/>
             </a:pPr>
             <a:r>
@@ -1720,7 +1714,7 @@
           </a:bodyPr>
           <a:lstStyle/>
           <a:p>
-            <a:pPr indent="0" marL="0">
+            <a:pPr marL="0" indent="0">
               <a:buNone/>
             </a:pPr>
             <a:r>
@@ -1760,6 +1754,13 @@
             <a:prstDash val="solid"/>
           </a:ln>
         </p:spPr>
+        <p:txBody>
+          <a:bodyPr/>
+          <a:lstStyle/>
+          <a:p>
+            <a:endParaRPr lang="sv-SE"/>
+          </a:p>
+        </p:txBody>
       </p:sp>
       <p:sp>
         <p:nvSpPr>
@@ -1784,7 +1785,7 @@
           </a:bodyPr>
           <a:lstStyle/>
           <a:p>
-            <a:pPr indent="0" marL="0">
+            <a:pPr marL="0" indent="0">
               <a:buNone/>
             </a:pPr>
             <a:r>
@@ -1799,6 +1800,1115 @@
               <a:t>Yunus Capar  ·  Elza Capar  ·  Tim Rydén  ·  Eliesa Dudus</a:t>
             </a:r>
             <a:endParaRPr lang="en-US" sz="1500" dirty="0"/>
+          </a:p>
+        </p:txBody>
+      </p:sp>
+    </p:spTree>
+  </p:cSld>
+  <p:clrMapOvr>
+    <a:masterClrMapping/>
+  </p:clrMapOvr>
+</p:sld>
+</file>
+
+<file path=ppt/slides/slide10.xml><?xml version="1.0" encoding="utf-8"?>
+<p:sld xmlns:a="http://schemas.openxmlformats.org/drawingml/2006/main" xmlns:r="http://schemas.openxmlformats.org/officeDocument/2006/relationships" xmlns:p="http://schemas.openxmlformats.org/presentationml/2006/main">
+  <p:cSld name="Slide 8">
+    <p:bg>
+      <p:bgPr>
+        <a:solidFill>
+          <a:srgbClr val="F6F9F9"/>
+        </a:solidFill>
+        <a:effectLst/>
+      </p:bgPr>
+    </p:bg>
+    <p:spTree>
+      <p:nvGrpSpPr>
+        <p:cNvPr id="1" name=""/>
+        <p:cNvGrpSpPr/>
+        <p:nvPr/>
+      </p:nvGrpSpPr>
+      <p:grpSpPr>
+        <a:xfrm>
+          <a:off x="0" y="0"/>
+          <a:ext cx="0" cy="0"/>
+          <a:chOff x="0" y="0"/>
+          <a:chExt cx="0" cy="0"/>
+        </a:xfrm>
+      </p:grpSpPr>
+      <p:sp>
+        <p:nvSpPr>
+          <p:cNvPr id="2" name="Shape 0"/>
+          <p:cNvSpPr/>
+          <p:nvPr/>
+        </p:nvSpPr>
+        <p:spPr>
+          <a:xfrm>
+            <a:off x="0" y="0"/>
+            <a:ext cx="137160" cy="6858000"/>
+          </a:xfrm>
+          <a:prstGeom prst="rect">
+            <a:avLst/>
+          </a:prstGeom>
+          <a:solidFill>
+            <a:srgbClr val="177C78"/>
+          </a:solidFill>
+          <a:ln w="12700">
+            <a:solidFill>
+              <a:srgbClr val="177C78"/>
+            </a:solidFill>
+            <a:prstDash val="solid"/>
+          </a:ln>
+        </p:spPr>
+        <p:txBody>
+          <a:bodyPr/>
+          <a:lstStyle/>
+          <a:p>
+            <a:endParaRPr lang="sv-SE"/>
+          </a:p>
+        </p:txBody>
+      </p:sp>
+      <p:sp>
+        <p:nvSpPr>
+          <p:cNvPr id="3" name="Text 1"/>
+          <p:cNvSpPr/>
+          <p:nvPr/>
+        </p:nvSpPr>
+        <p:spPr>
+          <a:xfrm>
+            <a:off x="530352" y="310896"/>
+            <a:ext cx="8229600" cy="219456"/>
+          </a:xfrm>
+          <a:prstGeom prst="rect">
+            <a:avLst/>
+          </a:prstGeom>
+          <a:noFill/>
+          <a:ln/>
+        </p:spPr>
+        <p:txBody>
+          <a:bodyPr wrap="square" lIns="0" tIns="0" rIns="0" bIns="0" rtlCol="0" anchor="ctr">
+            <a:normAutofit/>
+          </a:bodyPr>
+          <a:lstStyle/>
+          <a:p>
+            <a:pPr marL="0" indent="0">
+              <a:buNone/>
+            </a:pPr>
+            <a:r>
+              <a:rPr lang="en-US" sz="1000" b="1" kern="0" spc="210" dirty="0">
+                <a:solidFill>
+                  <a:srgbClr val="177C78"/>
+                </a:solidFill>
+                <a:latin typeface="Aptos" pitchFamily="34" charset="0"/>
+                <a:ea typeface="Aptos" pitchFamily="34" charset="-122"/>
+                <a:cs typeface="Aptos" pitchFamily="34" charset="-120"/>
+              </a:rPr>
+              <a:t>BEGRÄNSNINGAR · SLUTSATS</a:t>
+            </a:r>
+            <a:endParaRPr lang="en-US" sz="1000" dirty="0"/>
+          </a:p>
+        </p:txBody>
+      </p:sp>
+      <p:sp>
+        <p:nvSpPr>
+          <p:cNvPr id="4" name="Text 2"/>
+          <p:cNvSpPr/>
+          <p:nvPr/>
+        </p:nvSpPr>
+        <p:spPr>
+          <a:xfrm>
+            <a:off x="530352" y="685800"/>
+            <a:ext cx="11064240" cy="548640"/>
+          </a:xfrm>
+          <a:prstGeom prst="rect">
+            <a:avLst/>
+          </a:prstGeom>
+          <a:noFill/>
+          <a:ln/>
+        </p:spPr>
+        <p:txBody>
+          <a:bodyPr wrap="square" lIns="0" tIns="0" rIns="0" bIns="0" rtlCol="0" anchor="ctr">
+            <a:normAutofit/>
+          </a:bodyPr>
+          <a:lstStyle/>
+          <a:p>
+            <a:pPr marL="0" indent="0">
+              <a:buNone/>
+            </a:pPr>
+            <a:r>
+              <a:rPr lang="en-US" sz="3000" b="1" dirty="0">
+                <a:solidFill>
+                  <a:srgbClr val="173647"/>
+                </a:solidFill>
+                <a:latin typeface="Aptos" pitchFamily="34" charset="0"/>
+                <a:ea typeface="Aptos" pitchFamily="34" charset="-122"/>
+                <a:cs typeface="Aptos" pitchFamily="34" charset="-120"/>
+              </a:rPr>
+              <a:t>Lovande som beslutsstöd – inte redo för drift</a:t>
+            </a:r>
+            <a:endParaRPr lang="en-US" sz="3000" dirty="0"/>
+          </a:p>
+        </p:txBody>
+      </p:sp>
+      <p:sp>
+        <p:nvSpPr>
+          <p:cNvPr id="5" name="Text 3"/>
+          <p:cNvSpPr/>
+          <p:nvPr/>
+        </p:nvSpPr>
+        <p:spPr>
+          <a:xfrm>
+            <a:off x="557784" y="1307592"/>
+            <a:ext cx="10972800" cy="393192"/>
+          </a:xfrm>
+          <a:prstGeom prst="rect">
+            <a:avLst/>
+          </a:prstGeom>
+          <a:noFill/>
+          <a:ln/>
+        </p:spPr>
+        <p:txBody>
+          <a:bodyPr wrap="square" lIns="0" tIns="0" rIns="0" bIns="0" rtlCol="0" anchor="ctr">
+            <a:normAutofit/>
+          </a:bodyPr>
+          <a:lstStyle/>
+          <a:p>
+            <a:pPr marL="0" indent="0">
+              <a:buNone/>
+            </a:pPr>
+            <a:r>
+              <a:rPr lang="en-US" sz="1400" dirty="0">
+                <a:solidFill>
+                  <a:srgbClr val="657985"/>
+                </a:solidFill>
+                <a:latin typeface="Aptos" pitchFamily="34" charset="0"/>
+                <a:ea typeface="Aptos" pitchFamily="34" charset="-122"/>
+                <a:cs typeface="Aptos" pitchFamily="34" charset="-120"/>
+              </a:rPr>
+              <a:t>Random Forest är bäst av de undersökta modellerna enligt projektets kostnadsantaganden</a:t>
+            </a:r>
+            <a:endParaRPr lang="en-US" sz="1400" dirty="0"/>
+          </a:p>
+        </p:txBody>
+      </p:sp>
+      <p:sp>
+        <p:nvSpPr>
+          <p:cNvPr id="6" name="Shape 4"/>
+          <p:cNvSpPr/>
+          <p:nvPr/>
+        </p:nvSpPr>
+        <p:spPr>
+          <a:xfrm>
+            <a:off x="548640" y="6382512"/>
+            <a:ext cx="11594592" cy="0"/>
+          </a:xfrm>
+          <a:prstGeom prst="line">
+            <a:avLst/>
+          </a:prstGeom>
+          <a:noFill/>
+          <a:ln w="12700">
+            <a:solidFill>
+              <a:srgbClr val="DDE8E7"/>
+            </a:solidFill>
+            <a:prstDash val="solid"/>
+          </a:ln>
+        </p:spPr>
+        <p:txBody>
+          <a:bodyPr/>
+          <a:lstStyle/>
+          <a:p>
+            <a:endParaRPr lang="sv-SE"/>
+          </a:p>
+        </p:txBody>
+      </p:sp>
+      <p:sp>
+        <p:nvSpPr>
+          <p:cNvPr id="7" name="Text 5"/>
+          <p:cNvSpPr/>
+          <p:nvPr/>
+        </p:nvSpPr>
+        <p:spPr>
+          <a:xfrm>
+            <a:off x="566928" y="6501384"/>
+            <a:ext cx="7315200" cy="146304"/>
+          </a:xfrm>
+          <a:prstGeom prst="rect">
+            <a:avLst/>
+          </a:prstGeom>
+          <a:noFill/>
+          <a:ln/>
+        </p:spPr>
+        <p:txBody>
+          <a:bodyPr wrap="square" lIns="0" tIns="0" rIns="0" bIns="0" rtlCol="0" anchor="ctr">
+            <a:normAutofit/>
+          </a:bodyPr>
+          <a:lstStyle/>
+          <a:p>
+            <a:pPr marL="0" indent="0">
+              <a:buNone/>
+            </a:pPr>
+            <a:r>
+              <a:rPr lang="en-US" sz="850" kern="0" spc="100" dirty="0">
+                <a:solidFill>
+                  <a:srgbClr val="657985"/>
+                </a:solidFill>
+                <a:latin typeface="Aptos" pitchFamily="34" charset="0"/>
+                <a:ea typeface="Aptos" pitchFamily="34" charset="-122"/>
+                <a:cs typeface="Aptos" pitchFamily="34" charset="-120"/>
+              </a:rPr>
+              <a:t>SCANIA APS  ·  PROJEKT I DATA SCIENCE</a:t>
+            </a:r>
+            <a:endParaRPr lang="en-US" sz="850" dirty="0"/>
+          </a:p>
+        </p:txBody>
+      </p:sp>
+      <p:sp>
+        <p:nvSpPr>
+          <p:cNvPr id="8" name="Text 6"/>
+          <p:cNvSpPr/>
+          <p:nvPr/>
+        </p:nvSpPr>
+        <p:spPr>
+          <a:xfrm>
+            <a:off x="10789920" y="6473952"/>
+            <a:ext cx="777240" cy="182880"/>
+          </a:xfrm>
+          <a:prstGeom prst="rect">
+            <a:avLst/>
+          </a:prstGeom>
+          <a:noFill/>
+          <a:ln/>
+        </p:spPr>
+        <p:txBody>
+          <a:bodyPr wrap="square" lIns="0" tIns="0" rIns="0" bIns="0" rtlCol="0" anchor="ctr">
+            <a:normAutofit/>
+          </a:bodyPr>
+          <a:lstStyle/>
+          <a:p>
+            <a:pPr marL="0" indent="0" algn="r">
+              <a:buNone/>
+            </a:pPr>
+            <a:r>
+              <a:rPr lang="en-US" sz="1000" b="1" dirty="0">
+                <a:solidFill>
+                  <a:srgbClr val="177C78"/>
+                </a:solidFill>
+                <a:latin typeface="Aptos" pitchFamily="34" charset="0"/>
+                <a:ea typeface="Aptos" pitchFamily="34" charset="-122"/>
+                <a:cs typeface="Aptos" pitchFamily="34" charset="-120"/>
+              </a:rPr>
+              <a:t>08 / 08</a:t>
+            </a:r>
+            <a:endParaRPr lang="en-US" sz="1000" dirty="0"/>
+          </a:p>
+        </p:txBody>
+      </p:sp>
+      <p:sp>
+        <p:nvSpPr>
+          <p:cNvPr id="9" name="Shape 7"/>
+          <p:cNvSpPr/>
+          <p:nvPr/>
+        </p:nvSpPr>
+        <p:spPr>
+          <a:xfrm>
+            <a:off x="566928" y="1920240"/>
+            <a:ext cx="5285232" cy="3648456"/>
+          </a:xfrm>
+          <a:prstGeom prst="roundRect">
+            <a:avLst>
+              <a:gd name="adj" fmla="val 3008"/>
+            </a:avLst>
+          </a:prstGeom>
+          <a:solidFill>
+            <a:srgbClr val="FFFFFF"/>
+          </a:solidFill>
+          <a:ln w="8890">
+            <a:solidFill>
+              <a:srgbClr val="DDE8E7"/>
+            </a:solidFill>
+            <a:prstDash val="solid"/>
+          </a:ln>
+        </p:spPr>
+        <p:txBody>
+          <a:bodyPr/>
+          <a:lstStyle/>
+          <a:p>
+            <a:endParaRPr lang="sv-SE"/>
+          </a:p>
+        </p:txBody>
+      </p:sp>
+      <p:sp>
+        <p:nvSpPr>
+          <p:cNvPr id="10" name="Text 8"/>
+          <p:cNvSpPr/>
+          <p:nvPr/>
+        </p:nvSpPr>
+        <p:spPr>
+          <a:xfrm>
+            <a:off x="868680" y="2258568"/>
+            <a:ext cx="4480560" cy="246888"/>
+          </a:xfrm>
+          <a:prstGeom prst="rect">
+            <a:avLst/>
+          </a:prstGeom>
+          <a:noFill/>
+          <a:ln/>
+        </p:spPr>
+        <p:txBody>
+          <a:bodyPr wrap="square" lIns="0" tIns="0" rIns="0" bIns="0" rtlCol="0" anchor="ctr">
+            <a:normAutofit/>
+          </a:bodyPr>
+          <a:lstStyle/>
+          <a:p>
+            <a:pPr marL="0" indent="0">
+              <a:buNone/>
+            </a:pPr>
+            <a:r>
+              <a:rPr lang="en-US" sz="1300" b="1" dirty="0">
+                <a:solidFill>
+                  <a:srgbClr val="177C78"/>
+                </a:solidFill>
+                <a:latin typeface="Aptos" pitchFamily="34" charset="0"/>
+                <a:ea typeface="Aptos" pitchFamily="34" charset="-122"/>
+                <a:cs typeface="Aptos" pitchFamily="34" charset="-120"/>
+              </a:rPr>
+              <a:t>VAD RESULTATEN STÖDJER</a:t>
+            </a:r>
+            <a:endParaRPr lang="en-US" sz="1300" dirty="0"/>
+          </a:p>
+        </p:txBody>
+      </p:sp>
+      <p:sp>
+        <p:nvSpPr>
+          <p:cNvPr id="11" name="Shape 9"/>
+          <p:cNvSpPr/>
+          <p:nvPr/>
+        </p:nvSpPr>
+        <p:spPr>
+          <a:xfrm>
+            <a:off x="905256" y="2912364"/>
+            <a:ext cx="82296" cy="82296"/>
+          </a:xfrm>
+          <a:prstGeom prst="ellipse">
+            <a:avLst/>
+          </a:prstGeom>
+          <a:solidFill>
+            <a:srgbClr val="177C78"/>
+          </a:solidFill>
+          <a:ln w="12700">
+            <a:solidFill>
+              <a:srgbClr val="177C78"/>
+            </a:solidFill>
+            <a:prstDash val="solid"/>
+          </a:ln>
+        </p:spPr>
+        <p:txBody>
+          <a:bodyPr/>
+          <a:lstStyle/>
+          <a:p>
+            <a:endParaRPr lang="sv-SE"/>
+          </a:p>
+        </p:txBody>
+      </p:sp>
+      <p:sp>
+        <p:nvSpPr>
+          <p:cNvPr id="12" name="Text 10"/>
+          <p:cNvSpPr/>
+          <p:nvPr/>
+        </p:nvSpPr>
+        <p:spPr>
+          <a:xfrm>
+            <a:off x="1115568" y="2816352"/>
+            <a:ext cx="4416552" cy="493776"/>
+          </a:xfrm>
+          <a:prstGeom prst="rect">
+            <a:avLst/>
+          </a:prstGeom>
+          <a:noFill/>
+          <a:ln/>
+        </p:spPr>
+        <p:txBody>
+          <a:bodyPr wrap="square" lIns="0" tIns="0" rIns="0" bIns="0" rtlCol="0" anchor="ctr">
+            <a:normAutofit/>
+          </a:bodyPr>
+          <a:lstStyle/>
+          <a:p>
+            <a:pPr marL="0" indent="0">
+              <a:buNone/>
+            </a:pPr>
+            <a:r>
+              <a:rPr lang="en-US" sz="1600" dirty="0">
+                <a:solidFill>
+                  <a:srgbClr val="213746"/>
+                </a:solidFill>
+                <a:latin typeface="Aptos" pitchFamily="34" charset="0"/>
+                <a:ea typeface="Aptos" pitchFamily="34" charset="-122"/>
+                <a:cs typeface="Aptos" pitchFamily="34" charset="-120"/>
+              </a:rPr>
+              <a:t>Fler APS-fel hittas (360 av 375)</a:t>
+            </a:r>
+            <a:endParaRPr lang="en-US" sz="1600" dirty="0"/>
+          </a:p>
+        </p:txBody>
+      </p:sp>
+      <p:sp>
+        <p:nvSpPr>
+          <p:cNvPr id="13" name="Shape 11"/>
+          <p:cNvSpPr/>
+          <p:nvPr/>
+        </p:nvSpPr>
+        <p:spPr>
+          <a:xfrm>
+            <a:off x="905256" y="3479292"/>
+            <a:ext cx="82296" cy="82296"/>
+          </a:xfrm>
+          <a:prstGeom prst="ellipse">
+            <a:avLst/>
+          </a:prstGeom>
+          <a:solidFill>
+            <a:srgbClr val="177C78"/>
+          </a:solidFill>
+          <a:ln w="12700">
+            <a:solidFill>
+              <a:srgbClr val="177C78"/>
+            </a:solidFill>
+            <a:prstDash val="solid"/>
+          </a:ln>
+        </p:spPr>
+        <p:txBody>
+          <a:bodyPr/>
+          <a:lstStyle/>
+          <a:p>
+            <a:endParaRPr lang="sv-SE"/>
+          </a:p>
+        </p:txBody>
+      </p:sp>
+      <p:sp>
+        <p:nvSpPr>
+          <p:cNvPr id="14" name="Text 12"/>
+          <p:cNvSpPr/>
+          <p:nvPr/>
+        </p:nvSpPr>
+        <p:spPr>
+          <a:xfrm>
+            <a:off x="1115568" y="3383280"/>
+            <a:ext cx="4416552" cy="493776"/>
+          </a:xfrm>
+          <a:prstGeom prst="rect">
+            <a:avLst/>
+          </a:prstGeom>
+          <a:noFill/>
+          <a:ln/>
+        </p:spPr>
+        <p:txBody>
+          <a:bodyPr wrap="square" lIns="0" tIns="0" rIns="0" bIns="0" rtlCol="0" anchor="ctr">
+            <a:normAutofit/>
+          </a:bodyPr>
+          <a:lstStyle/>
+          <a:p>
+            <a:pPr marL="0" indent="0">
+              <a:buNone/>
+            </a:pPr>
+            <a:r>
+              <a:rPr lang="en-US" sz="1600" dirty="0">
+                <a:solidFill>
+                  <a:srgbClr val="213746"/>
+                </a:solidFill>
+                <a:latin typeface="Aptos" pitchFamily="34" charset="0"/>
+                <a:ea typeface="Aptos" pitchFamily="34" charset="-122"/>
+                <a:cs typeface="Aptos" pitchFamily="34" charset="-120"/>
+              </a:rPr>
+              <a:t>Färre falsklarm än Logistic Regression</a:t>
+            </a:r>
+            <a:endParaRPr lang="en-US" sz="1600" dirty="0"/>
+          </a:p>
+        </p:txBody>
+      </p:sp>
+      <p:sp>
+        <p:nvSpPr>
+          <p:cNvPr id="15" name="Shape 13"/>
+          <p:cNvSpPr/>
+          <p:nvPr/>
+        </p:nvSpPr>
+        <p:spPr>
+          <a:xfrm>
+            <a:off x="905256" y="4046220"/>
+            <a:ext cx="82296" cy="82296"/>
+          </a:xfrm>
+          <a:prstGeom prst="ellipse">
+            <a:avLst/>
+          </a:prstGeom>
+          <a:solidFill>
+            <a:srgbClr val="177C78"/>
+          </a:solidFill>
+          <a:ln w="12700">
+            <a:solidFill>
+              <a:srgbClr val="177C78"/>
+            </a:solidFill>
+            <a:prstDash val="solid"/>
+          </a:ln>
+        </p:spPr>
+        <p:txBody>
+          <a:bodyPr/>
+          <a:lstStyle/>
+          <a:p>
+            <a:endParaRPr lang="sv-SE"/>
+          </a:p>
+        </p:txBody>
+      </p:sp>
+      <p:sp>
+        <p:nvSpPr>
+          <p:cNvPr id="16" name="Text 14"/>
+          <p:cNvSpPr/>
+          <p:nvPr/>
+        </p:nvSpPr>
+        <p:spPr>
+          <a:xfrm>
+            <a:off x="1115568" y="3950208"/>
+            <a:ext cx="4416552" cy="493776"/>
+          </a:xfrm>
+          <a:prstGeom prst="rect">
+            <a:avLst/>
+          </a:prstGeom>
+          <a:noFill/>
+          <a:ln/>
+        </p:spPr>
+        <p:txBody>
+          <a:bodyPr wrap="square" lIns="0" tIns="0" rIns="0" bIns="0" rtlCol="0" anchor="ctr">
+            <a:normAutofit/>
+          </a:bodyPr>
+          <a:lstStyle/>
+          <a:p>
+            <a:pPr marL="0" indent="0">
+              <a:buNone/>
+            </a:pPr>
+            <a:r>
+              <a:rPr lang="en-US" sz="1600" dirty="0">
+                <a:solidFill>
+                  <a:srgbClr val="213746"/>
+                </a:solidFill>
+                <a:latin typeface="Aptos" pitchFamily="34" charset="0"/>
+                <a:ea typeface="Aptos" pitchFamily="34" charset="-122"/>
+                <a:cs typeface="Aptos" pitchFamily="34" charset="-120"/>
+              </a:rPr>
+              <a:t>27,6 % lägre beräknad felkostnad</a:t>
+            </a:r>
+            <a:endParaRPr lang="en-US" sz="1600" dirty="0"/>
+          </a:p>
+        </p:txBody>
+      </p:sp>
+      <p:sp>
+        <p:nvSpPr>
+          <p:cNvPr id="17" name="Shape 15"/>
+          <p:cNvSpPr/>
+          <p:nvPr/>
+        </p:nvSpPr>
+        <p:spPr>
+          <a:xfrm>
+            <a:off x="905256" y="4613148"/>
+            <a:ext cx="82296" cy="82296"/>
+          </a:xfrm>
+          <a:prstGeom prst="ellipse">
+            <a:avLst/>
+          </a:prstGeom>
+          <a:solidFill>
+            <a:srgbClr val="177C78"/>
+          </a:solidFill>
+          <a:ln w="12700">
+            <a:solidFill>
+              <a:srgbClr val="177C78"/>
+            </a:solidFill>
+            <a:prstDash val="solid"/>
+          </a:ln>
+        </p:spPr>
+        <p:txBody>
+          <a:bodyPr/>
+          <a:lstStyle/>
+          <a:p>
+            <a:endParaRPr lang="sv-SE"/>
+          </a:p>
+        </p:txBody>
+      </p:sp>
+      <p:sp>
+        <p:nvSpPr>
+          <p:cNvPr id="18" name="Text 16"/>
+          <p:cNvSpPr/>
+          <p:nvPr/>
+        </p:nvSpPr>
+        <p:spPr>
+          <a:xfrm>
+            <a:off x="1115568" y="4517136"/>
+            <a:ext cx="4416552" cy="493776"/>
+          </a:xfrm>
+          <a:prstGeom prst="rect">
+            <a:avLst/>
+          </a:prstGeom>
+          <a:noFill/>
+          <a:ln/>
+        </p:spPr>
+        <p:txBody>
+          <a:bodyPr wrap="square" lIns="0" tIns="0" rIns="0" bIns="0" rtlCol="0" anchor="ctr">
+            <a:normAutofit/>
+          </a:bodyPr>
+          <a:lstStyle/>
+          <a:p>
+            <a:pPr marL="0" indent="0">
+              <a:buNone/>
+            </a:pPr>
+            <a:r>
+              <a:rPr lang="en-US" sz="1600" dirty="0">
+                <a:solidFill>
+                  <a:srgbClr val="213746"/>
+                </a:solidFill>
+                <a:latin typeface="Aptos" pitchFamily="34" charset="0"/>
+                <a:ea typeface="Aptos" pitchFamily="34" charset="-122"/>
+                <a:cs typeface="Aptos" pitchFamily="34" charset="-120"/>
+              </a:rPr>
+              <a:t>Prioritering av fordon för kontroll</a:t>
+            </a:r>
+            <a:endParaRPr lang="en-US" sz="1600" dirty="0"/>
+          </a:p>
+        </p:txBody>
+      </p:sp>
+      <p:sp>
+        <p:nvSpPr>
+          <p:cNvPr id="19" name="Shape 17"/>
+          <p:cNvSpPr/>
+          <p:nvPr/>
+        </p:nvSpPr>
+        <p:spPr>
+          <a:xfrm>
+            <a:off x="6108192" y="1920240"/>
+            <a:ext cx="5477256" cy="3648456"/>
+          </a:xfrm>
+          <a:prstGeom prst="roundRect">
+            <a:avLst>
+              <a:gd name="adj" fmla="val 3008"/>
+            </a:avLst>
+          </a:prstGeom>
+          <a:solidFill>
+            <a:srgbClr val="FFFFFF"/>
+          </a:solidFill>
+          <a:ln w="8890">
+            <a:solidFill>
+              <a:srgbClr val="DDE8E7"/>
+            </a:solidFill>
+            <a:prstDash val="solid"/>
+          </a:ln>
+        </p:spPr>
+        <p:txBody>
+          <a:bodyPr/>
+          <a:lstStyle/>
+          <a:p>
+            <a:endParaRPr lang="sv-SE"/>
+          </a:p>
+        </p:txBody>
+      </p:sp>
+      <p:sp>
+        <p:nvSpPr>
+          <p:cNvPr id="20" name="Text 18"/>
+          <p:cNvSpPr/>
+          <p:nvPr/>
+        </p:nvSpPr>
+        <p:spPr>
+          <a:xfrm>
+            <a:off x="6409944" y="2258568"/>
+            <a:ext cx="4663440" cy="246888"/>
+          </a:xfrm>
+          <a:prstGeom prst="rect">
+            <a:avLst/>
+          </a:prstGeom>
+          <a:noFill/>
+          <a:ln/>
+        </p:spPr>
+        <p:txBody>
+          <a:bodyPr wrap="square" lIns="0" tIns="0" rIns="0" bIns="0" rtlCol="0" anchor="ctr">
+            <a:normAutofit/>
+          </a:bodyPr>
+          <a:lstStyle/>
+          <a:p>
+            <a:pPr marL="0" indent="0">
+              <a:buNone/>
+            </a:pPr>
+            <a:r>
+              <a:rPr lang="en-US" sz="1300" b="1" dirty="0">
+                <a:solidFill>
+                  <a:srgbClr val="BB685E"/>
+                </a:solidFill>
+                <a:latin typeface="Aptos" pitchFamily="34" charset="0"/>
+                <a:ea typeface="Aptos" pitchFamily="34" charset="-122"/>
+                <a:cs typeface="Aptos" pitchFamily="34" charset="-120"/>
+              </a:rPr>
+              <a:t>DET VI INTE VET ÄN</a:t>
+            </a:r>
+            <a:endParaRPr lang="en-US" sz="1300" dirty="0"/>
+          </a:p>
+        </p:txBody>
+      </p:sp>
+      <p:sp>
+        <p:nvSpPr>
+          <p:cNvPr id="21" name="Shape 19"/>
+          <p:cNvSpPr/>
+          <p:nvPr/>
+        </p:nvSpPr>
+        <p:spPr>
+          <a:xfrm>
+            <a:off x="6428232" y="2912364"/>
+            <a:ext cx="82296" cy="82296"/>
+          </a:xfrm>
+          <a:prstGeom prst="ellipse">
+            <a:avLst/>
+          </a:prstGeom>
+          <a:solidFill>
+            <a:srgbClr val="177C78"/>
+          </a:solidFill>
+          <a:ln w="12700">
+            <a:solidFill>
+              <a:srgbClr val="177C78"/>
+            </a:solidFill>
+            <a:prstDash val="solid"/>
+          </a:ln>
+        </p:spPr>
+        <p:txBody>
+          <a:bodyPr/>
+          <a:lstStyle/>
+          <a:p>
+            <a:endParaRPr lang="sv-SE"/>
+          </a:p>
+        </p:txBody>
+      </p:sp>
+      <p:sp>
+        <p:nvSpPr>
+          <p:cNvPr id="22" name="Text 20"/>
+          <p:cNvSpPr/>
+          <p:nvPr/>
+        </p:nvSpPr>
+        <p:spPr>
+          <a:xfrm>
+            <a:off x="6638544" y="2816352"/>
+            <a:ext cx="4498848" cy="493776"/>
+          </a:xfrm>
+          <a:prstGeom prst="rect">
+            <a:avLst/>
+          </a:prstGeom>
+          <a:noFill/>
+          <a:ln/>
+        </p:spPr>
+        <p:txBody>
+          <a:bodyPr wrap="square" lIns="0" tIns="0" rIns="0" bIns="0" rtlCol="0" anchor="ctr">
+            <a:normAutofit/>
+          </a:bodyPr>
+          <a:lstStyle/>
+          <a:p>
+            <a:pPr marL="0" indent="0">
+              <a:buNone/>
+            </a:pPr>
+            <a:r>
+              <a:rPr lang="en-US" sz="1550" dirty="0">
+                <a:solidFill>
+                  <a:srgbClr val="213746"/>
+                </a:solidFill>
+                <a:latin typeface="Aptos" pitchFamily="34" charset="0"/>
+                <a:ea typeface="Aptos" pitchFamily="34" charset="-122"/>
+                <a:cs typeface="Aptos" pitchFamily="34" charset="-120"/>
+              </a:rPr>
+              <a:t>15 APS-fel missas fortfarande</a:t>
+            </a:r>
+            <a:endParaRPr lang="en-US" sz="1550" dirty="0"/>
+          </a:p>
+        </p:txBody>
+      </p:sp>
+      <p:sp>
+        <p:nvSpPr>
+          <p:cNvPr id="23" name="Shape 21"/>
+          <p:cNvSpPr/>
+          <p:nvPr/>
+        </p:nvSpPr>
+        <p:spPr>
+          <a:xfrm>
+            <a:off x="6428232" y="3479292"/>
+            <a:ext cx="82296" cy="82296"/>
+          </a:xfrm>
+          <a:prstGeom prst="ellipse">
+            <a:avLst/>
+          </a:prstGeom>
+          <a:solidFill>
+            <a:srgbClr val="177C78"/>
+          </a:solidFill>
+          <a:ln w="12700">
+            <a:solidFill>
+              <a:srgbClr val="177C78"/>
+            </a:solidFill>
+            <a:prstDash val="solid"/>
+          </a:ln>
+        </p:spPr>
+        <p:txBody>
+          <a:bodyPr/>
+          <a:lstStyle/>
+          <a:p>
+            <a:endParaRPr lang="sv-SE"/>
+          </a:p>
+        </p:txBody>
+      </p:sp>
+      <p:sp>
+        <p:nvSpPr>
+          <p:cNvPr id="24" name="Text 22"/>
+          <p:cNvSpPr/>
+          <p:nvPr/>
+        </p:nvSpPr>
+        <p:spPr>
+          <a:xfrm>
+            <a:off x="6638544" y="3383280"/>
+            <a:ext cx="4498848" cy="493776"/>
+          </a:xfrm>
+          <a:prstGeom prst="rect">
+            <a:avLst/>
+          </a:prstGeom>
+          <a:noFill/>
+          <a:ln/>
+        </p:spPr>
+        <p:txBody>
+          <a:bodyPr wrap="square" lIns="0" tIns="0" rIns="0" bIns="0" rtlCol="0" anchor="ctr">
+            <a:normAutofit/>
+          </a:bodyPr>
+          <a:lstStyle/>
+          <a:p>
+            <a:pPr marL="0" indent="0">
+              <a:buNone/>
+            </a:pPr>
+            <a:r>
+              <a:rPr lang="en-US" sz="1550" dirty="0">
+                <a:solidFill>
+                  <a:srgbClr val="213746"/>
+                </a:solidFill>
+                <a:latin typeface="Aptos" pitchFamily="34" charset="0"/>
+                <a:ea typeface="Aptos" pitchFamily="34" charset="-122"/>
+                <a:cs typeface="Aptos" pitchFamily="34" charset="-120"/>
+              </a:rPr>
+              <a:t>335 falsklarm kräver hantering</a:t>
+            </a:r>
+            <a:endParaRPr lang="en-US" sz="1550" dirty="0"/>
+          </a:p>
+        </p:txBody>
+      </p:sp>
+      <p:sp>
+        <p:nvSpPr>
+          <p:cNvPr id="25" name="Shape 23"/>
+          <p:cNvSpPr/>
+          <p:nvPr/>
+        </p:nvSpPr>
+        <p:spPr>
+          <a:xfrm>
+            <a:off x="6428232" y="4046220"/>
+            <a:ext cx="82296" cy="82296"/>
+          </a:xfrm>
+          <a:prstGeom prst="ellipse">
+            <a:avLst/>
+          </a:prstGeom>
+          <a:solidFill>
+            <a:srgbClr val="177C78"/>
+          </a:solidFill>
+          <a:ln w="12700">
+            <a:solidFill>
+              <a:srgbClr val="177C78"/>
+            </a:solidFill>
+            <a:prstDash val="solid"/>
+          </a:ln>
+        </p:spPr>
+        <p:txBody>
+          <a:bodyPr/>
+          <a:lstStyle/>
+          <a:p>
+            <a:endParaRPr lang="sv-SE"/>
+          </a:p>
+        </p:txBody>
+      </p:sp>
+      <p:sp>
+        <p:nvSpPr>
+          <p:cNvPr id="26" name="Text 24"/>
+          <p:cNvSpPr/>
+          <p:nvPr/>
+        </p:nvSpPr>
+        <p:spPr>
+          <a:xfrm>
+            <a:off x="6638544" y="3950208"/>
+            <a:ext cx="4498848" cy="493776"/>
+          </a:xfrm>
+          <a:prstGeom prst="rect">
+            <a:avLst/>
+          </a:prstGeom>
+          <a:noFill/>
+          <a:ln/>
+        </p:spPr>
+        <p:txBody>
+          <a:bodyPr wrap="square" lIns="0" tIns="0" rIns="0" bIns="0" rtlCol="0" anchor="ctr">
+            <a:normAutofit/>
+          </a:bodyPr>
+          <a:lstStyle/>
+          <a:p>
+            <a:pPr marL="0" indent="0">
+              <a:buNone/>
+            </a:pPr>
+            <a:r>
+              <a:rPr lang="en-US" sz="1550" dirty="0">
+                <a:solidFill>
+                  <a:srgbClr val="213746"/>
+                </a:solidFill>
+                <a:latin typeface="Aptos" pitchFamily="34" charset="0"/>
+                <a:ea typeface="Aptos" pitchFamily="34" charset="-122"/>
+                <a:cs typeface="Aptos" pitchFamily="34" charset="-120"/>
+              </a:rPr>
+              <a:t>Anonymiserade variabler försvårar tolkning</a:t>
+            </a:r>
+            <a:endParaRPr lang="en-US" sz="1550" dirty="0"/>
+          </a:p>
+        </p:txBody>
+      </p:sp>
+      <p:sp>
+        <p:nvSpPr>
+          <p:cNvPr id="27" name="Shape 25"/>
+          <p:cNvSpPr/>
+          <p:nvPr/>
+        </p:nvSpPr>
+        <p:spPr>
+          <a:xfrm>
+            <a:off x="6428232" y="4613148"/>
+            <a:ext cx="82296" cy="82296"/>
+          </a:xfrm>
+          <a:prstGeom prst="ellipse">
+            <a:avLst/>
+          </a:prstGeom>
+          <a:solidFill>
+            <a:srgbClr val="177C78"/>
+          </a:solidFill>
+          <a:ln w="12700">
+            <a:solidFill>
+              <a:srgbClr val="177C78"/>
+            </a:solidFill>
+            <a:prstDash val="solid"/>
+          </a:ln>
+        </p:spPr>
+        <p:txBody>
+          <a:bodyPr/>
+          <a:lstStyle/>
+          <a:p>
+            <a:endParaRPr lang="sv-SE"/>
+          </a:p>
+        </p:txBody>
+      </p:sp>
+      <p:sp>
+        <p:nvSpPr>
+          <p:cNvPr id="28" name="Text 26"/>
+          <p:cNvSpPr/>
+          <p:nvPr/>
+        </p:nvSpPr>
+        <p:spPr>
+          <a:xfrm>
+            <a:off x="6638544" y="4517136"/>
+            <a:ext cx="4498848" cy="493776"/>
+          </a:xfrm>
+          <a:prstGeom prst="rect">
+            <a:avLst/>
+          </a:prstGeom>
+          <a:noFill/>
+          <a:ln/>
+        </p:spPr>
+        <p:txBody>
+          <a:bodyPr wrap="square" lIns="0" tIns="0" rIns="0" bIns="0" rtlCol="0" anchor="ctr">
+            <a:normAutofit/>
+          </a:bodyPr>
+          <a:lstStyle/>
+          <a:p>
+            <a:pPr marL="0" indent="0">
+              <a:buNone/>
+            </a:pPr>
+            <a:r>
+              <a:rPr lang="en-US" sz="1550" dirty="0">
+                <a:solidFill>
+                  <a:srgbClr val="213746"/>
+                </a:solidFill>
+                <a:latin typeface="Aptos" pitchFamily="34" charset="0"/>
+                <a:ea typeface="Aptos" pitchFamily="34" charset="-122"/>
+                <a:cs typeface="Aptos" pitchFamily="34" charset="-120"/>
+              </a:rPr>
+              <a:t>Historisk testdata ≠ verklig drift</a:t>
+            </a:r>
+            <a:endParaRPr lang="en-US" sz="1550" dirty="0"/>
+          </a:p>
+        </p:txBody>
+      </p:sp>
+      <p:sp>
+        <p:nvSpPr>
+          <p:cNvPr id="29" name="Shape 27"/>
+          <p:cNvSpPr/>
+          <p:nvPr/>
+        </p:nvSpPr>
+        <p:spPr>
+          <a:xfrm>
+            <a:off x="594360" y="5760720"/>
+            <a:ext cx="10981944" cy="429768"/>
+          </a:xfrm>
+          <a:prstGeom prst="roundRect">
+            <a:avLst>
+              <a:gd name="adj" fmla="val 19149"/>
+            </a:avLst>
+          </a:prstGeom>
+          <a:solidFill>
+            <a:srgbClr val="E7F3F0"/>
+          </a:solidFill>
+          <a:ln w="12700">
+            <a:solidFill>
+              <a:srgbClr val="E7F3F0"/>
+            </a:solidFill>
+            <a:prstDash val="solid"/>
+          </a:ln>
+        </p:spPr>
+        <p:txBody>
+          <a:bodyPr/>
+          <a:lstStyle/>
+          <a:p>
+            <a:endParaRPr lang="sv-SE"/>
+          </a:p>
+        </p:txBody>
+      </p:sp>
+      <p:sp>
+        <p:nvSpPr>
+          <p:cNvPr id="30" name="Text 28"/>
+          <p:cNvSpPr/>
+          <p:nvPr/>
+        </p:nvSpPr>
+        <p:spPr>
+          <a:xfrm>
+            <a:off x="850392" y="5852160"/>
+            <a:ext cx="10469880" cy="201168"/>
+          </a:xfrm>
+          <a:prstGeom prst="rect">
+            <a:avLst/>
+          </a:prstGeom>
+          <a:noFill/>
+          <a:ln/>
+        </p:spPr>
+        <p:txBody>
+          <a:bodyPr wrap="square" lIns="0" tIns="0" rIns="0" bIns="0" rtlCol="0" anchor="ctr">
+            <a:normAutofit lnSpcReduction="10000"/>
+          </a:bodyPr>
+          <a:lstStyle/>
+          <a:p>
+            <a:pPr marL="0" indent="0">
+              <a:buNone/>
+            </a:pPr>
+            <a:r>
+              <a:rPr lang="en-US" sz="1340" b="1" dirty="0">
+                <a:solidFill>
+                  <a:srgbClr val="177C78"/>
+                </a:solidFill>
+                <a:latin typeface="Aptos" pitchFamily="34" charset="0"/>
+                <a:ea typeface="Aptos" pitchFamily="34" charset="-122"/>
+                <a:cs typeface="Aptos" pitchFamily="34" charset="-120"/>
+              </a:rPr>
+              <a:t>NÄSTA STEG   ·   Testa på nya fordonsdata och pröva kostnadsantaganden i underhållsverksamheten</a:t>
+            </a:r>
+            <a:endParaRPr lang="en-US" sz="1340" dirty="0"/>
           </a:p>
         </p:txBody>
       </p:sp>
@@ -1818,6 +2928,7 @@
         <a:solidFill>
           <a:srgbClr val="F6F9F9"/>
         </a:solidFill>
+        <a:effectLst/>
       </p:bgPr>
     </p:bg>
     <p:spTree>
@@ -1858,6 +2969,13 @@
             <a:prstDash val="solid"/>
           </a:ln>
         </p:spPr>
+        <p:txBody>
+          <a:bodyPr/>
+          <a:lstStyle/>
+          <a:p>
+            <a:endParaRPr lang="sv-SE"/>
+          </a:p>
+        </p:txBody>
       </p:sp>
       <p:sp>
         <p:nvSpPr>
@@ -1882,11 +3000,11 @@
           </a:bodyPr>
           <a:lstStyle/>
           <a:p>
-            <a:pPr indent="0" marL="0">
-              <a:buNone/>
-            </a:pPr>
-            <a:r>
-              <a:rPr lang="en-US" sz="1000" b="1" spc="210" kern="0" dirty="0">
+            <a:pPr marL="0" indent="0">
+              <a:buNone/>
+            </a:pPr>
+            <a:r>
+              <a:rPr lang="en-US" sz="1000" b="1" kern="0" spc="210" dirty="0">
                 <a:solidFill>
                   <a:srgbClr val="177C78"/>
                 </a:solidFill>
@@ -1923,7 +3041,7 @@
           </a:bodyPr>
           <a:lstStyle/>
           <a:p>
-            <a:pPr indent="0" marL="0">
+            <a:pPr marL="0" indent="0">
               <a:buNone/>
             </a:pPr>
             <a:r>
@@ -1964,7 +3082,7 @@
           </a:bodyPr>
           <a:lstStyle/>
           <a:p>
-            <a:pPr indent="0" marL="0">
+            <a:pPr marL="0" indent="0">
               <a:buNone/>
             </a:pPr>
             <a:r>
@@ -2004,6 +3122,13 @@
             <a:prstDash val="solid"/>
           </a:ln>
         </p:spPr>
+        <p:txBody>
+          <a:bodyPr/>
+          <a:lstStyle/>
+          <a:p>
+            <a:endParaRPr lang="sv-SE"/>
+          </a:p>
+        </p:txBody>
       </p:sp>
       <p:sp>
         <p:nvSpPr>
@@ -2028,11 +3153,11 @@
           </a:bodyPr>
           <a:lstStyle/>
           <a:p>
-            <a:pPr indent="0" marL="0">
-              <a:buNone/>
-            </a:pPr>
-            <a:r>
-              <a:rPr lang="en-US" sz="850" spc="100" kern="0" dirty="0">
+            <a:pPr marL="0" indent="0">
+              <a:buNone/>
+            </a:pPr>
+            <a:r>
+              <a:rPr lang="en-US" sz="850" kern="0" spc="100" dirty="0">
                 <a:solidFill>
                   <a:srgbClr val="657985"/>
                 </a:solidFill>
@@ -2069,7 +3194,7 @@
           </a:bodyPr>
           <a:lstStyle/>
           <a:p>
-            <a:pPr algn="r" indent="0" marL="0">
+            <a:pPr marL="0" indent="0" algn="r">
               <a:buNone/>
             </a:pPr>
             <a:r>
@@ -2113,6 +3238,13 @@
             <a:prstDash val="solid"/>
           </a:ln>
         </p:spPr>
+        <p:txBody>
+          <a:bodyPr/>
+          <a:lstStyle/>
+          <a:p>
+            <a:endParaRPr lang="sv-SE"/>
+          </a:p>
+        </p:txBody>
       </p:sp>
       <p:sp>
         <p:nvSpPr>
@@ -2137,11 +3269,11 @@
           </a:bodyPr>
           <a:lstStyle/>
           <a:p>
-            <a:pPr indent="0" marL="0">
-              <a:buNone/>
-            </a:pPr>
-            <a:r>
-              <a:rPr lang="en-US" sz="1300" b="1" spc="100" kern="0" dirty="0">
+            <a:pPr marL="0" indent="0">
+              <a:buNone/>
+            </a:pPr>
+            <a:r>
+              <a:rPr lang="en-US" sz="1300" b="1" kern="0" spc="100" dirty="0">
                 <a:solidFill>
                   <a:srgbClr val="177C78"/>
                 </a:solidFill>
@@ -2178,7 +3310,7 @@
           </a:bodyPr>
           <a:lstStyle/>
           <a:p>
-            <a:pPr indent="0" marL="0">
+            <a:pPr marL="0" indent="0">
               <a:buNone/>
             </a:pPr>
             <a:r>
@@ -2195,7 +3327,7 @@
             <a:endParaRPr lang="en-US" sz="3100" dirty="0"/>
           </a:p>
           <a:p>
-            <a:pPr indent="0" marL="0">
+            <a:pPr marL="0" indent="0">
               <a:buNone/>
             </a:pPr>
             <a:r>
@@ -2212,7 +3344,7 @@
             <a:endParaRPr lang="en-US" sz="3100" dirty="0"/>
           </a:p>
           <a:p>
-            <a:pPr indent="0" marL="0">
+            <a:pPr marL="0" indent="0">
               <a:buNone/>
             </a:pPr>
             <a:r>
@@ -2253,7 +3385,7 @@
           </a:bodyPr>
           <a:lstStyle/>
           <a:p>
-            <a:pPr indent="0" marL="0">
+            <a:pPr marL="0" indent="0">
               <a:buNone/>
             </a:pPr>
             <a:r>
@@ -2297,6 +3429,13 @@
             <a:prstDash val="solid"/>
           </a:ln>
         </p:spPr>
+        <p:txBody>
+          <a:bodyPr/>
+          <a:lstStyle/>
+          <a:p>
+            <a:endParaRPr lang="sv-SE"/>
+          </a:p>
+        </p:txBody>
       </p:sp>
       <p:sp>
         <p:nvSpPr>
@@ -2321,11 +3460,11 @@
           </a:bodyPr>
           <a:lstStyle/>
           <a:p>
-            <a:pPr indent="0" marL="0">
-              <a:buNone/>
-            </a:pPr>
-            <a:r>
-              <a:rPr lang="en-US" sz="1300" b="1" spc="100" kern="0" dirty="0">
+            <a:pPr marL="0" indent="0">
+              <a:buNone/>
+            </a:pPr>
+            <a:r>
+              <a:rPr lang="en-US" sz="1300" b="1" kern="0" spc="100" dirty="0">
                 <a:solidFill>
                   <a:srgbClr val="177C78"/>
                 </a:solidFill>
@@ -2363,6 +3502,13 @@
             <a:prstDash val="solid"/>
           </a:ln>
         </p:spPr>
+        <p:txBody>
+          <a:bodyPr/>
+          <a:lstStyle/>
+          <a:p>
+            <a:endParaRPr lang="sv-SE"/>
+          </a:p>
+        </p:txBody>
       </p:sp>
       <p:sp>
         <p:nvSpPr>
@@ -2387,7 +3533,7 @@
           </a:bodyPr>
           <a:lstStyle/>
           <a:p>
-            <a:pPr indent="0" marL="0">
+            <a:pPr marL="0" indent="0">
               <a:buNone/>
             </a:pPr>
             <a:r>
@@ -2429,6 +3575,13 @@
             <a:prstDash val="solid"/>
           </a:ln>
         </p:spPr>
+        <p:txBody>
+          <a:bodyPr/>
+          <a:lstStyle/>
+          <a:p>
+            <a:endParaRPr lang="sv-SE"/>
+          </a:p>
+        </p:txBody>
       </p:sp>
       <p:sp>
         <p:nvSpPr>
@@ -2453,7 +3606,7 @@
           </a:bodyPr>
           <a:lstStyle/>
           <a:p>
-            <a:pPr indent="0" marL="0">
+            <a:pPr marL="0" indent="0">
               <a:buNone/>
             </a:pPr>
             <a:r>
@@ -2495,6 +3648,13 @@
             <a:prstDash val="solid"/>
           </a:ln>
         </p:spPr>
+        <p:txBody>
+          <a:bodyPr/>
+          <a:lstStyle/>
+          <a:p>
+            <a:endParaRPr lang="sv-SE"/>
+          </a:p>
+        </p:txBody>
       </p:sp>
       <p:sp>
         <p:nvSpPr>
@@ -2519,7 +3679,7 @@
           </a:bodyPr>
           <a:lstStyle/>
           <a:p>
-            <a:pPr indent="0" marL="0">
+            <a:pPr marL="0" indent="0">
               <a:buNone/>
             </a:pPr>
             <a:r>
@@ -2563,6 +3723,13 @@
             <a:prstDash val="solid"/>
           </a:ln>
         </p:spPr>
+        <p:txBody>
+          <a:bodyPr/>
+          <a:lstStyle/>
+          <a:p>
+            <a:endParaRPr lang="sv-SE"/>
+          </a:p>
+        </p:txBody>
       </p:sp>
       <p:sp>
         <p:nvSpPr>
@@ -2583,11 +3750,11 @@
         </p:spPr>
         <p:txBody>
           <a:bodyPr wrap="square" lIns="0" tIns="0" rIns="0" bIns="0" rtlCol="0" anchor="ctr">
-            <a:normAutofit/>
-          </a:bodyPr>
-          <a:lstStyle/>
-          <a:p>
-            <a:pPr indent="0" marL="0">
+            <a:normAutofit fontScale="92500" lnSpcReduction="10000"/>
+          </a:bodyPr>
+          <a:lstStyle/>
+          <a:p>
+            <a:pPr marL="0" indent="0">
               <a:buNone/>
             </a:pPr>
             <a:r>
@@ -2621,6 +3788,7 @@
         <a:solidFill>
           <a:srgbClr val="F6F9F9"/>
         </a:solidFill>
+        <a:effectLst/>
       </p:bgPr>
     </p:bg>
     <p:spTree>
@@ -2661,6 +3829,13 @@
             <a:prstDash val="solid"/>
           </a:ln>
         </p:spPr>
+        <p:txBody>
+          <a:bodyPr/>
+          <a:lstStyle/>
+          <a:p>
+            <a:endParaRPr lang="sv-SE"/>
+          </a:p>
+        </p:txBody>
       </p:sp>
       <p:sp>
         <p:nvSpPr>
@@ -2685,11 +3860,11 @@
           </a:bodyPr>
           <a:lstStyle/>
           <a:p>
-            <a:pPr indent="0" marL="0">
-              <a:buNone/>
-            </a:pPr>
-            <a:r>
-              <a:rPr lang="en-US" sz="1000" b="1" spc="210" kern="0" dirty="0">
+            <a:pPr marL="0" indent="0">
+              <a:buNone/>
+            </a:pPr>
+            <a:r>
+              <a:rPr lang="en-US" sz="1000" b="1" kern="0" spc="210" dirty="0">
                 <a:solidFill>
                   <a:srgbClr val="177C78"/>
                 </a:solidFill>
@@ -2726,7 +3901,7 @@
           </a:bodyPr>
           <a:lstStyle/>
           <a:p>
-            <a:pPr indent="0" marL="0">
+            <a:pPr marL="0" indent="0">
               <a:buNone/>
             </a:pPr>
             <a:r>
@@ -2767,7 +3942,7 @@
           </a:bodyPr>
           <a:lstStyle/>
           <a:p>
-            <a:pPr indent="0" marL="0">
+            <a:pPr marL="0" indent="0">
               <a:buNone/>
             </a:pPr>
             <a:r>
@@ -2807,6 +3982,13 @@
             <a:prstDash val="solid"/>
           </a:ln>
         </p:spPr>
+        <p:txBody>
+          <a:bodyPr/>
+          <a:lstStyle/>
+          <a:p>
+            <a:endParaRPr lang="sv-SE"/>
+          </a:p>
+        </p:txBody>
       </p:sp>
       <p:sp>
         <p:nvSpPr>
@@ -2831,11 +4013,11 @@
           </a:bodyPr>
           <a:lstStyle/>
           <a:p>
-            <a:pPr indent="0" marL="0">
-              <a:buNone/>
-            </a:pPr>
-            <a:r>
-              <a:rPr lang="en-US" sz="850" spc="100" kern="0" dirty="0">
+            <a:pPr marL="0" indent="0">
+              <a:buNone/>
+            </a:pPr>
+            <a:r>
+              <a:rPr lang="en-US" sz="850" kern="0" spc="100" dirty="0">
                 <a:solidFill>
                   <a:srgbClr val="657985"/>
                 </a:solidFill>
@@ -2872,7 +4054,7 @@
           </a:bodyPr>
           <a:lstStyle/>
           <a:p>
-            <a:pPr algn="r" indent="0" marL="0">
+            <a:pPr marL="0" indent="0" algn="r">
               <a:buNone/>
             </a:pPr>
             <a:r>
@@ -2916,6 +4098,13 @@
             <a:prstDash val="solid"/>
           </a:ln>
         </p:spPr>
+        <p:txBody>
+          <a:bodyPr/>
+          <a:lstStyle/>
+          <a:p>
+            <a:endParaRPr lang="sv-SE"/>
+          </a:p>
+        </p:txBody>
       </p:sp>
       <p:sp>
         <p:nvSpPr>
@@ -2940,7 +4129,7 @@
           </a:bodyPr>
           <a:lstStyle/>
           <a:p>
-            <a:pPr indent="0" marL="0">
+            <a:pPr marL="0" indent="0">
               <a:buNone/>
             </a:pPr>
             <a:r>
@@ -2981,7 +4170,7 @@
           </a:bodyPr>
           <a:lstStyle/>
           <a:p>
-            <a:pPr indent="0" marL="0">
+            <a:pPr marL="0" indent="0">
               <a:buNone/>
             </a:pPr>
             <a:r>
@@ -3025,6 +4214,13 @@
             <a:prstDash val="solid"/>
           </a:ln>
         </p:spPr>
+        <p:txBody>
+          <a:bodyPr/>
+          <a:lstStyle/>
+          <a:p>
+            <a:endParaRPr lang="sv-SE"/>
+          </a:p>
+        </p:txBody>
       </p:sp>
       <p:sp>
         <p:nvSpPr>
@@ -3049,7 +4245,7 @@
           </a:bodyPr>
           <a:lstStyle/>
           <a:p>
-            <a:pPr indent="0" marL="0">
+            <a:pPr marL="0" indent="0">
               <a:buNone/>
             </a:pPr>
             <a:r>
@@ -3090,7 +4286,7 @@
           </a:bodyPr>
           <a:lstStyle/>
           <a:p>
-            <a:pPr indent="0" marL="0">
+            <a:pPr marL="0" indent="0">
               <a:buNone/>
             </a:pPr>
             <a:r>
@@ -3134,6 +4330,13 @@
             <a:prstDash val="solid"/>
           </a:ln>
         </p:spPr>
+        <p:txBody>
+          <a:bodyPr/>
+          <a:lstStyle/>
+          <a:p>
+            <a:endParaRPr lang="sv-SE"/>
+          </a:p>
+        </p:txBody>
       </p:sp>
       <p:sp>
         <p:nvSpPr>
@@ -3158,7 +4361,7 @@
           </a:bodyPr>
           <a:lstStyle/>
           <a:p>
-            <a:pPr indent="0" marL="0">
+            <a:pPr marL="0" indent="0">
               <a:buNone/>
             </a:pPr>
             <a:r>
@@ -3199,7 +4402,7 @@
           </a:bodyPr>
           <a:lstStyle/>
           <a:p>
-            <a:pPr indent="0" marL="0">
+            <a:pPr marL="0" indent="0">
               <a:buNone/>
             </a:pPr>
             <a:r>
@@ -3243,6 +4446,13 @@
             <a:prstDash val="solid"/>
           </a:ln>
         </p:spPr>
+        <p:txBody>
+          <a:bodyPr/>
+          <a:lstStyle/>
+          <a:p>
+            <a:endParaRPr lang="sv-SE"/>
+          </a:p>
+        </p:txBody>
       </p:sp>
       <p:sp>
         <p:nvSpPr>
@@ -3267,7 +4477,7 @@
           </a:bodyPr>
           <a:lstStyle/>
           <a:p>
-            <a:pPr indent="0" marL="0">
+            <a:pPr marL="0" indent="0">
               <a:buNone/>
             </a:pPr>
             <a:r>
@@ -3308,7 +4518,7 @@
           </a:bodyPr>
           <a:lstStyle/>
           <a:p>
-            <a:pPr indent="0" marL="0">
+            <a:pPr marL="0" indent="0">
               <a:buNone/>
             </a:pPr>
             <a:r>
@@ -3352,6 +4562,13 @@
             <a:prstDash val="solid"/>
           </a:ln>
         </p:spPr>
+        <p:txBody>
+          <a:bodyPr/>
+          <a:lstStyle/>
+          <a:p>
+            <a:endParaRPr lang="sv-SE"/>
+          </a:p>
+        </p:txBody>
       </p:sp>
       <p:sp>
         <p:nvSpPr>
@@ -3376,7 +4593,7 @@
           </a:bodyPr>
           <a:lstStyle/>
           <a:p>
-            <a:pPr indent="0" marL="0">
+            <a:pPr marL="0" indent="0">
               <a:buNone/>
             </a:pPr>
             <a:r>
@@ -3417,7 +4634,7 @@
           </a:bodyPr>
           <a:lstStyle/>
           <a:p>
-            <a:pPr indent="0" marL="0">
+            <a:pPr marL="0" indent="0">
               <a:buNone/>
             </a:pPr>
             <a:r>
@@ -3461,6 +4678,13 @@
             <a:prstDash val="solid"/>
           </a:ln>
         </p:spPr>
+        <p:txBody>
+          <a:bodyPr/>
+          <a:lstStyle/>
+          <a:p>
+            <a:endParaRPr lang="sv-SE"/>
+          </a:p>
+        </p:txBody>
       </p:sp>
       <p:sp>
         <p:nvSpPr>
@@ -3488,6 +4712,13 @@
             <a:prstDash val="solid"/>
           </a:ln>
         </p:spPr>
+        <p:txBody>
+          <a:bodyPr/>
+          <a:lstStyle/>
+          <a:p>
+            <a:endParaRPr lang="sv-SE"/>
+          </a:p>
+        </p:txBody>
       </p:sp>
       <p:sp>
         <p:nvSpPr>
@@ -3512,7 +4743,7 @@
           </a:bodyPr>
           <a:lstStyle/>
           <a:p>
-            <a:pPr indent="0" marL="0">
+            <a:pPr marL="0" indent="0">
               <a:buNone/>
             </a:pPr>
             <a:r>
@@ -3553,7 +4784,7 @@
           </a:bodyPr>
           <a:lstStyle/>
           <a:p>
-            <a:pPr indent="0" marL="0">
+            <a:pPr marL="0" indent="0">
               <a:buNone/>
             </a:pPr>
             <a:r>
@@ -3597,6 +4828,13 @@
             <a:prstDash val="solid"/>
           </a:ln>
         </p:spPr>
+        <p:txBody>
+          <a:bodyPr/>
+          <a:lstStyle/>
+          <a:p>
+            <a:endParaRPr lang="sv-SE"/>
+          </a:p>
+        </p:txBody>
       </p:sp>
       <p:sp>
         <p:nvSpPr>
@@ -3624,6 +4862,13 @@
             <a:prstDash val="solid"/>
           </a:ln>
         </p:spPr>
+        <p:txBody>
+          <a:bodyPr/>
+          <a:lstStyle/>
+          <a:p>
+            <a:endParaRPr lang="sv-SE"/>
+          </a:p>
+        </p:txBody>
       </p:sp>
       <p:sp>
         <p:nvSpPr>
@@ -3648,7 +4893,7 @@
           </a:bodyPr>
           <a:lstStyle/>
           <a:p>
-            <a:pPr indent="0" marL="0">
+            <a:pPr marL="0" indent="0">
               <a:buNone/>
             </a:pPr>
             <a:r>
@@ -3692,6 +4937,13 @@
             <a:prstDash val="solid"/>
           </a:ln>
         </p:spPr>
+        <p:txBody>
+          <a:bodyPr/>
+          <a:lstStyle/>
+          <a:p>
+            <a:endParaRPr lang="sv-SE"/>
+          </a:p>
+        </p:txBody>
       </p:sp>
       <p:sp>
         <p:nvSpPr>
@@ -3716,7 +4968,7 @@
           </a:bodyPr>
           <a:lstStyle/>
           <a:p>
-            <a:pPr indent="0" marL="0">
+            <a:pPr marL="0" indent="0">
               <a:buNone/>
             </a:pPr>
             <a:r>
@@ -3758,6 +5010,13 @@
             <a:prstDash val="solid"/>
           </a:ln>
         </p:spPr>
+        <p:txBody>
+          <a:bodyPr/>
+          <a:lstStyle/>
+          <a:p>
+            <a:endParaRPr lang="sv-SE"/>
+          </a:p>
+        </p:txBody>
       </p:sp>
       <p:sp>
         <p:nvSpPr>
@@ -3782,7 +5041,7 @@
           </a:bodyPr>
           <a:lstStyle/>
           <a:p>
-            <a:pPr indent="0" marL="0">
+            <a:pPr marL="0" indent="0">
               <a:buNone/>
             </a:pPr>
             <a:r>
@@ -3824,6 +5083,13 @@
             <a:prstDash val="solid"/>
           </a:ln>
         </p:spPr>
+        <p:txBody>
+          <a:bodyPr/>
+          <a:lstStyle/>
+          <a:p>
+            <a:endParaRPr lang="sv-SE"/>
+          </a:p>
+        </p:txBody>
       </p:sp>
       <p:sp>
         <p:nvSpPr>
@@ -3848,7 +5114,7 @@
           </a:bodyPr>
           <a:lstStyle/>
           <a:p>
-            <a:pPr indent="0" marL="0">
+            <a:pPr marL="0" indent="0">
               <a:buNone/>
             </a:pPr>
             <a:r>
@@ -3890,6 +5156,13 @@
             <a:prstDash val="solid"/>
           </a:ln>
         </p:spPr>
+        <p:txBody>
+          <a:bodyPr/>
+          <a:lstStyle/>
+          <a:p>
+            <a:endParaRPr lang="sv-SE"/>
+          </a:p>
+        </p:txBody>
       </p:sp>
       <p:sp>
         <p:nvSpPr>
@@ -3914,7 +5187,7 @@
           </a:bodyPr>
           <a:lstStyle/>
           <a:p>
-            <a:pPr indent="0" marL="0">
+            <a:pPr marL="0" indent="0">
               <a:buNone/>
             </a:pPr>
             <a:r>
@@ -3948,6 +5221,7 @@
         <a:solidFill>
           <a:srgbClr val="F6F9F9"/>
         </a:solidFill>
+        <a:effectLst/>
       </p:bgPr>
     </p:bg>
     <p:spTree>
@@ -3988,6 +5262,13 @@
             <a:prstDash val="solid"/>
           </a:ln>
         </p:spPr>
+        <p:txBody>
+          <a:bodyPr/>
+          <a:lstStyle/>
+          <a:p>
+            <a:endParaRPr lang="sv-SE"/>
+          </a:p>
+        </p:txBody>
       </p:sp>
       <p:sp>
         <p:nvSpPr>
@@ -4012,11 +5293,11 @@
           </a:bodyPr>
           <a:lstStyle/>
           <a:p>
-            <a:pPr indent="0" marL="0">
-              <a:buNone/>
-            </a:pPr>
-            <a:r>
-              <a:rPr lang="en-US" sz="1000" b="1" spc="210" kern="0" dirty="0">
+            <a:pPr marL="0" indent="0">
+              <a:buNone/>
+            </a:pPr>
+            <a:r>
+              <a:rPr lang="en-US" sz="1000" b="1" kern="0" spc="210" dirty="0">
                 <a:solidFill>
                   <a:srgbClr val="177C78"/>
                 </a:solidFill>
@@ -4053,7 +5334,7 @@
           </a:bodyPr>
           <a:lstStyle/>
           <a:p>
-            <a:pPr indent="0" marL="0">
+            <a:pPr marL="0" indent="0">
               <a:buNone/>
             </a:pPr>
             <a:r>
@@ -4094,7 +5375,7 @@
           </a:bodyPr>
           <a:lstStyle/>
           <a:p>
-            <a:pPr indent="0" marL="0">
+            <a:pPr marL="0" indent="0">
               <a:buNone/>
             </a:pPr>
             <a:r>
@@ -4134,6 +5415,13 @@
             <a:prstDash val="solid"/>
           </a:ln>
         </p:spPr>
+        <p:txBody>
+          <a:bodyPr/>
+          <a:lstStyle/>
+          <a:p>
+            <a:endParaRPr lang="sv-SE"/>
+          </a:p>
+        </p:txBody>
       </p:sp>
       <p:sp>
         <p:nvSpPr>
@@ -4158,11 +5446,11 @@
           </a:bodyPr>
           <a:lstStyle/>
           <a:p>
-            <a:pPr indent="0" marL="0">
-              <a:buNone/>
-            </a:pPr>
-            <a:r>
-              <a:rPr lang="en-US" sz="850" spc="100" kern="0" dirty="0">
+            <a:pPr marL="0" indent="0">
+              <a:buNone/>
+            </a:pPr>
+            <a:r>
+              <a:rPr lang="en-US" sz="850" kern="0" spc="100" dirty="0">
                 <a:solidFill>
                   <a:srgbClr val="657985"/>
                 </a:solidFill>
@@ -4199,7 +5487,7 @@
           </a:bodyPr>
           <a:lstStyle/>
           <a:p>
-            <a:pPr algn="r" indent="0" marL="0">
+            <a:pPr marL="0" indent="0" algn="r">
               <a:buNone/>
             </a:pPr>
             <a:r>
@@ -4243,6 +5531,13 @@
             <a:prstDash val="solid"/>
           </a:ln>
         </p:spPr>
+        <p:txBody>
+          <a:bodyPr/>
+          <a:lstStyle/>
+          <a:p>
+            <a:endParaRPr lang="sv-SE"/>
+          </a:p>
+        </p:txBody>
       </p:sp>
       <p:sp>
         <p:nvSpPr>
@@ -4267,7 +5562,7 @@
           </a:bodyPr>
           <a:lstStyle/>
           <a:p>
-            <a:pPr indent="0" marL="0">
+            <a:pPr marL="0" indent="0">
               <a:buNone/>
             </a:pPr>
             <a:r>
@@ -4311,6 +5606,13 @@
             <a:prstDash val="solid"/>
           </a:ln>
         </p:spPr>
+        <p:txBody>
+          <a:bodyPr/>
+          <a:lstStyle/>
+          <a:p>
+            <a:endParaRPr lang="sv-SE"/>
+          </a:p>
+        </p:txBody>
       </p:sp>
       <p:sp>
         <p:nvSpPr>
@@ -4331,11 +5633,11 @@
         </p:spPr>
         <p:txBody>
           <a:bodyPr wrap="square" lIns="0" tIns="0" rIns="0" bIns="0" rtlCol="0" anchor="ctr">
-            <a:normAutofit/>
-          </a:bodyPr>
-          <a:lstStyle/>
-          <a:p>
-            <a:pPr indent="0" marL="0">
+            <a:normAutofit lnSpcReduction="10000"/>
+          </a:bodyPr>
+          <a:lstStyle/>
+          <a:p>
+            <a:pPr marL="0" indent="0">
               <a:buNone/>
             </a:pPr>
             <a:r>
@@ -4379,6 +5681,13 @@
             <a:prstDash val="solid"/>
           </a:ln>
         </p:spPr>
+        <p:txBody>
+          <a:bodyPr/>
+          <a:lstStyle/>
+          <a:p>
+            <a:endParaRPr lang="sv-SE"/>
+          </a:p>
+        </p:txBody>
       </p:sp>
       <p:sp>
         <p:nvSpPr>
@@ -4399,11 +5708,11 @@
         </p:spPr>
         <p:txBody>
           <a:bodyPr wrap="square" lIns="0" tIns="0" rIns="0" bIns="0" rtlCol="0" anchor="ctr">
-            <a:normAutofit/>
-          </a:bodyPr>
-          <a:lstStyle/>
-          <a:p>
-            <a:pPr indent="0" marL="0">
+            <a:normAutofit lnSpcReduction="10000"/>
+          </a:bodyPr>
+          <a:lstStyle/>
+          <a:p>
+            <a:pPr marL="0" indent="0">
               <a:buNone/>
             </a:pPr>
             <a:r>
@@ -4447,6 +5756,13 @@
             <a:prstDash val="solid"/>
           </a:ln>
         </p:spPr>
+        <p:txBody>
+          <a:bodyPr/>
+          <a:lstStyle/>
+          <a:p>
+            <a:endParaRPr lang="sv-SE"/>
+          </a:p>
+        </p:txBody>
       </p:sp>
       <p:sp>
         <p:nvSpPr>
@@ -4467,11 +5783,11 @@
         </p:spPr>
         <p:txBody>
           <a:bodyPr wrap="square" lIns="0" tIns="0" rIns="0" bIns="0" rtlCol="0" anchor="ctr">
-            <a:normAutofit/>
-          </a:bodyPr>
-          <a:lstStyle/>
-          <a:p>
-            <a:pPr indent="0" marL="0">
+            <a:normAutofit lnSpcReduction="10000"/>
+          </a:bodyPr>
+          <a:lstStyle/>
+          <a:p>
+            <a:pPr marL="0" indent="0">
               <a:buNone/>
             </a:pPr>
             <a:r>
@@ -4515,6 +5831,13 @@
             <a:prstDash val="solid"/>
           </a:ln>
         </p:spPr>
+        <p:txBody>
+          <a:bodyPr/>
+          <a:lstStyle/>
+          <a:p>
+            <a:endParaRPr lang="sv-SE"/>
+          </a:p>
+        </p:txBody>
       </p:sp>
       <p:sp>
         <p:nvSpPr>
@@ -4535,11 +5858,11 @@
         </p:spPr>
         <p:txBody>
           <a:bodyPr wrap="square" lIns="0" tIns="0" rIns="0" bIns="0" rtlCol="0" anchor="ctr">
-            <a:normAutofit/>
-          </a:bodyPr>
-          <a:lstStyle/>
-          <a:p>
-            <a:pPr indent="0" marL="0">
+            <a:normAutofit lnSpcReduction="10000"/>
+          </a:bodyPr>
+          <a:lstStyle/>
+          <a:p>
+            <a:pPr marL="0" indent="0">
               <a:buNone/>
             </a:pPr>
             <a:r>
@@ -4583,6 +5906,13 @@
             <a:prstDash val="solid"/>
           </a:ln>
         </p:spPr>
+        <p:txBody>
+          <a:bodyPr/>
+          <a:lstStyle/>
+          <a:p>
+            <a:endParaRPr lang="sv-SE"/>
+          </a:p>
+        </p:txBody>
       </p:sp>
       <p:sp>
         <p:nvSpPr>
@@ -4610,6 +5940,13 @@
             <a:prstDash val="solid"/>
           </a:ln>
         </p:spPr>
+        <p:txBody>
+          <a:bodyPr/>
+          <a:lstStyle/>
+          <a:p>
+            <a:endParaRPr lang="sv-SE"/>
+          </a:p>
+        </p:txBody>
       </p:sp>
       <p:sp>
         <p:nvSpPr>
@@ -4634,7 +5971,7 @@
           </a:bodyPr>
           <a:lstStyle/>
           <a:p>
-            <a:pPr indent="0" marL="0">
+            <a:pPr marL="0" indent="0">
               <a:buNone/>
             </a:pPr>
             <a:r>
@@ -4675,7 +6012,7 @@
           </a:bodyPr>
           <a:lstStyle/>
           <a:p>
-            <a:pPr indent="0" marL="0">
+            <a:pPr marL="0" indent="0">
               <a:buNone/>
             </a:pPr>
             <a:r>
@@ -4719,6 +6056,13 @@
             <a:prstDash val="solid"/>
           </a:ln>
         </p:spPr>
+        <p:txBody>
+          <a:bodyPr/>
+          <a:lstStyle/>
+          <a:p>
+            <a:endParaRPr lang="sv-SE"/>
+          </a:p>
+        </p:txBody>
       </p:sp>
       <p:sp>
         <p:nvSpPr>
@@ -4743,7 +6087,7 @@
           </a:bodyPr>
           <a:lstStyle/>
           <a:p>
-            <a:pPr indent="0" marL="0">
+            <a:pPr marL="0" indent="0">
               <a:buNone/>
             </a:pPr>
             <a:r>
@@ -4784,7 +6128,7 @@
           </a:bodyPr>
           <a:lstStyle/>
           <a:p>
-            <a:pPr indent="0" marL="0">
+            <a:pPr marL="0" indent="0">
               <a:buNone/>
             </a:pPr>
             <a:r>
@@ -4825,7 +6169,7 @@
           </a:bodyPr>
           <a:lstStyle/>
           <a:p>
-            <a:pPr indent="0" marL="0">
+            <a:pPr marL="0" indent="0">
               <a:buNone/>
             </a:pPr>
             <a:r>
@@ -4866,7 +6210,7 @@
           </a:bodyPr>
           <a:lstStyle/>
           <a:p>
-            <a:pPr indent="0" marL="0">
+            <a:pPr marL="0" indent="0">
               <a:buNone/>
             </a:pPr>
             <a:r>
@@ -4907,7 +6251,7 @@
           </a:bodyPr>
           <a:lstStyle/>
           <a:p>
-            <a:pPr indent="0" marL="0">
+            <a:pPr marL="0" indent="0">
               <a:buNone/>
             </a:pPr>
             <a:r>
@@ -4941,6 +6285,7 @@
         <a:solidFill>
           <a:srgbClr val="F6F9F9"/>
         </a:solidFill>
+        <a:effectLst/>
       </p:bgPr>
     </p:bg>
     <p:spTree>
@@ -4981,6 +6326,13 @@
             <a:prstDash val="solid"/>
           </a:ln>
         </p:spPr>
+        <p:txBody>
+          <a:bodyPr/>
+          <a:lstStyle/>
+          <a:p>
+            <a:endParaRPr lang="sv-SE"/>
+          </a:p>
+        </p:txBody>
       </p:sp>
       <p:sp>
         <p:nvSpPr>
@@ -5005,11 +6357,11 @@
           </a:bodyPr>
           <a:lstStyle/>
           <a:p>
-            <a:pPr indent="0" marL="0">
-              <a:buNone/>
-            </a:pPr>
-            <a:r>
-              <a:rPr lang="en-US" sz="1000" b="1" spc="210" kern="0" dirty="0">
+            <a:pPr marL="0" indent="0">
+              <a:buNone/>
+            </a:pPr>
+            <a:r>
+              <a:rPr lang="en-US" sz="1000" b="1" kern="0" spc="210" dirty="0">
                 <a:solidFill>
                   <a:srgbClr val="177C78"/>
                 </a:solidFill>
@@ -5046,7 +6398,7 @@
           </a:bodyPr>
           <a:lstStyle/>
           <a:p>
-            <a:pPr indent="0" marL="0">
+            <a:pPr marL="0" indent="0">
               <a:buNone/>
             </a:pPr>
             <a:r>
@@ -5087,7 +6439,7 @@
           </a:bodyPr>
           <a:lstStyle/>
           <a:p>
-            <a:pPr indent="0" marL="0">
+            <a:pPr marL="0" indent="0">
               <a:buNone/>
             </a:pPr>
             <a:r>
@@ -5127,6 +6479,13 @@
             <a:prstDash val="solid"/>
           </a:ln>
         </p:spPr>
+        <p:txBody>
+          <a:bodyPr/>
+          <a:lstStyle/>
+          <a:p>
+            <a:endParaRPr lang="sv-SE"/>
+          </a:p>
+        </p:txBody>
       </p:sp>
       <p:sp>
         <p:nvSpPr>
@@ -5151,11 +6510,11 @@
           </a:bodyPr>
           <a:lstStyle/>
           <a:p>
-            <a:pPr indent="0" marL="0">
-              <a:buNone/>
-            </a:pPr>
-            <a:r>
-              <a:rPr lang="en-US" sz="850" spc="100" kern="0" dirty="0">
+            <a:pPr marL="0" indent="0">
+              <a:buNone/>
+            </a:pPr>
+            <a:r>
+              <a:rPr lang="en-US" sz="850" kern="0" spc="100" dirty="0">
                 <a:solidFill>
                   <a:srgbClr val="657985"/>
                 </a:solidFill>
@@ -5192,7 +6551,7 @@
           </a:bodyPr>
           <a:lstStyle/>
           <a:p>
-            <a:pPr algn="r" indent="0" marL="0">
+            <a:pPr marL="0" indent="0" algn="r">
               <a:buNone/>
             </a:pPr>
             <a:r>
@@ -5236,6 +6595,13 @@
             <a:prstDash val="solid"/>
           </a:ln>
         </p:spPr>
+        <p:txBody>
+          <a:bodyPr/>
+          <a:lstStyle/>
+          <a:p>
+            <a:endParaRPr lang="sv-SE"/>
+          </a:p>
+        </p:txBody>
       </p:sp>
       <p:sp>
         <p:nvSpPr>
@@ -5260,7 +6626,7 @@
           </a:bodyPr>
           <a:lstStyle/>
           <a:p>
-            <a:pPr indent="0" marL="0">
+            <a:pPr marL="0" indent="0">
               <a:buNone/>
             </a:pPr>
             <a:r>
@@ -5301,7 +6667,7 @@
           </a:bodyPr>
           <a:lstStyle/>
           <a:p>
-            <a:pPr indent="0" marL="0">
+            <a:pPr marL="0" indent="0">
               <a:buNone/>
             </a:pPr>
             <a:r>
@@ -5342,7 +6708,7 @@
           </a:bodyPr>
           <a:lstStyle/>
           <a:p>
-            <a:pPr algn="r" indent="0" marL="0">
+            <a:pPr marL="0" indent="0" algn="r">
               <a:buNone/>
             </a:pPr>
             <a:r>
@@ -5383,7 +6749,7 @@
           </a:bodyPr>
           <a:lstStyle/>
           <a:p>
-            <a:pPr indent="0" marL="0">
+            <a:pPr marL="0" indent="0">
               <a:buNone/>
             </a:pPr>
             <a:r>
@@ -5424,7 +6790,7 @@
           </a:bodyPr>
           <a:lstStyle/>
           <a:p>
-            <a:pPr algn="r" indent="0" marL="0">
+            <a:pPr marL="0" indent="0" algn="r">
               <a:buNone/>
             </a:pPr>
             <a:r>
@@ -5465,7 +6831,7 @@
           </a:bodyPr>
           <a:lstStyle/>
           <a:p>
-            <a:pPr indent="0" marL="0">
+            <a:pPr marL="0" indent="0">
               <a:buNone/>
             </a:pPr>
             <a:r>
@@ -5506,7 +6872,7 @@
           </a:bodyPr>
           <a:lstStyle/>
           <a:p>
-            <a:pPr algn="r" indent="0" marL="0">
+            <a:pPr marL="0" indent="0" algn="r">
               <a:buNone/>
             </a:pPr>
             <a:r>
@@ -5547,7 +6913,7 @@
           </a:bodyPr>
           <a:lstStyle/>
           <a:p>
-            <a:pPr indent="0" marL="0">
+            <a:pPr marL="0" indent="0">
               <a:buNone/>
             </a:pPr>
             <a:r>
@@ -5588,7 +6954,7 @@
           </a:bodyPr>
           <a:lstStyle/>
           <a:p>
-            <a:pPr algn="r" indent="0" marL="0">
+            <a:pPr marL="0" indent="0" algn="r">
               <a:buNone/>
             </a:pPr>
             <a:r>
@@ -5629,7 +6995,7 @@
           </a:bodyPr>
           <a:lstStyle/>
           <a:p>
-            <a:pPr indent="0" marL="0">
+            <a:pPr marL="0" indent="0">
               <a:buNone/>
             </a:pPr>
             <a:r>
@@ -5673,6 +7039,13 @@
             <a:prstDash val="solid"/>
           </a:ln>
         </p:spPr>
+        <p:txBody>
+          <a:bodyPr/>
+          <a:lstStyle/>
+          <a:p>
+            <a:endParaRPr lang="sv-SE"/>
+          </a:p>
+        </p:txBody>
       </p:sp>
       <p:sp>
         <p:nvSpPr>
@@ -5697,7 +7070,7 @@
           </a:bodyPr>
           <a:lstStyle/>
           <a:p>
-            <a:pPr indent="0" marL="0">
+            <a:pPr marL="0" indent="0">
               <a:buNone/>
             </a:pPr>
             <a:r>
@@ -5741,6 +7114,13 @@
             <a:prstDash val="solid"/>
           </a:ln>
         </p:spPr>
+        <p:txBody>
+          <a:bodyPr/>
+          <a:lstStyle/>
+          <a:p>
+            <a:endParaRPr lang="sv-SE"/>
+          </a:p>
+        </p:txBody>
       </p:sp>
       <p:sp>
         <p:nvSpPr>
@@ -5765,7 +7145,7 @@
           </a:bodyPr>
           <a:lstStyle/>
           <a:p>
-            <a:pPr indent="0" marL="0">
+            <a:pPr marL="0" indent="0">
               <a:buNone/>
             </a:pPr>
             <a:r>
@@ -5806,7 +7186,7 @@
           </a:bodyPr>
           <a:lstStyle/>
           <a:p>
-            <a:pPr indent="0" marL="0">
+            <a:pPr marL="0" indent="0">
               <a:buNone/>
             </a:pPr>
             <a:r>
@@ -5850,6 +7230,13 @@
             <a:prstDash val="solid"/>
           </a:ln>
         </p:spPr>
+        <p:txBody>
+          <a:bodyPr/>
+          <a:lstStyle/>
+          <a:p>
+            <a:endParaRPr lang="sv-SE"/>
+          </a:p>
+        </p:txBody>
       </p:sp>
       <p:sp>
         <p:nvSpPr>
@@ -5874,7 +7261,7 @@
           </a:bodyPr>
           <a:lstStyle/>
           <a:p>
-            <a:pPr indent="0" marL="0">
+            <a:pPr marL="0" indent="0">
               <a:buNone/>
             </a:pPr>
             <a:r>
@@ -5915,7 +7302,7 @@
           </a:bodyPr>
           <a:lstStyle/>
           <a:p>
-            <a:pPr indent="0" marL="0">
+            <a:pPr marL="0" indent="0">
               <a:buNone/>
             </a:pPr>
             <a:r>
@@ -5956,7 +7343,7 @@
           </a:bodyPr>
           <a:lstStyle/>
           <a:p>
-            <a:pPr indent="0" marL="0">
+            <a:pPr marL="0" indent="0">
               <a:buNone/>
             </a:pPr>
             <a:r>
@@ -6000,6 +7387,13 @@
             <a:prstDash val="solid"/>
           </a:ln>
         </p:spPr>
+        <p:txBody>
+          <a:bodyPr/>
+          <a:lstStyle/>
+          <a:p>
+            <a:endParaRPr lang="sv-SE"/>
+          </a:p>
+        </p:txBody>
       </p:sp>
       <p:sp>
         <p:nvSpPr>
@@ -6020,11 +7414,11 @@
         </p:spPr>
         <p:txBody>
           <a:bodyPr wrap="square" lIns="0" tIns="0" rIns="0" bIns="0" rtlCol="0" anchor="ctr">
-            <a:normAutofit/>
-          </a:bodyPr>
-          <a:lstStyle/>
-          <a:p>
-            <a:pPr indent="0" marL="0">
+            <a:normAutofit fontScale="92500" lnSpcReduction="10000"/>
+          </a:bodyPr>
+          <a:lstStyle/>
+          <a:p>
+            <a:pPr marL="0" indent="0">
               <a:buNone/>
             </a:pPr>
             <a:r>
@@ -6052,12 +7446,401 @@
 
 <file path=ppt/slides/slide6.xml><?xml version="1.0" encoding="utf-8"?>
 <p:sld xmlns:a="http://schemas.openxmlformats.org/drawingml/2006/main" xmlns:r="http://schemas.openxmlformats.org/officeDocument/2006/relationships" xmlns:p="http://schemas.openxmlformats.org/presentationml/2006/main">
+  <p:cSld>
+    <p:bg>
+      <p:bgPr>
+        <a:solidFill>
+          <a:srgbClr val="F6F9F9"/>
+        </a:solidFill>
+        <a:effectLst/>
+      </p:bgPr>
+    </p:bg>
+    <p:spTree>
+      <p:nvGrpSpPr>
+        <p:cNvPr id="1" name="">
+          <a:extLst>
+            <a:ext uri="{FF2B5EF4-FFF2-40B4-BE49-F238E27FC236}">
+              <a16:creationId xmlns:a16="http://schemas.microsoft.com/office/drawing/2014/main" id="{0076D6C1-5DAD-339F-42FE-06A2B177EA53}"/>
+            </a:ext>
+          </a:extLst>
+        </p:cNvPr>
+        <p:cNvGrpSpPr/>
+        <p:nvPr/>
+      </p:nvGrpSpPr>
+      <p:grpSpPr>
+        <a:xfrm>
+          <a:off x="0" y="0"/>
+          <a:ext cx="0" cy="0"/>
+          <a:chOff x="0" y="0"/>
+          <a:chExt cx="0" cy="0"/>
+        </a:xfrm>
+      </p:grpSpPr>
+      <p:sp>
+        <p:nvSpPr>
+          <p:cNvPr id="2" name="Shape 0">
+            <a:extLst>
+              <a:ext uri="{FF2B5EF4-FFF2-40B4-BE49-F238E27FC236}">
+                <a16:creationId xmlns:a16="http://schemas.microsoft.com/office/drawing/2014/main" id="{494A9D76-2696-8B11-78DF-B45691C39F16}"/>
+              </a:ext>
+            </a:extLst>
+          </p:cNvPr>
+          <p:cNvSpPr/>
+          <p:nvPr/>
+        </p:nvSpPr>
+        <p:spPr>
+          <a:xfrm>
+            <a:off x="0" y="0"/>
+            <a:ext cx="137160" cy="6858000"/>
+          </a:xfrm>
+          <a:prstGeom prst="rect">
+            <a:avLst/>
+          </a:prstGeom>
+          <a:solidFill>
+            <a:srgbClr val="177C78"/>
+          </a:solidFill>
+          <a:ln w="12700">
+            <a:solidFill>
+              <a:srgbClr val="177C78"/>
+            </a:solidFill>
+            <a:prstDash val="solid"/>
+          </a:ln>
+        </p:spPr>
+        <p:txBody>
+          <a:bodyPr/>
+          <a:lstStyle/>
+          <a:p>
+            <a:endParaRPr lang="sv-SE"/>
+          </a:p>
+        </p:txBody>
+      </p:sp>
+      <p:sp>
+        <p:nvSpPr>
+          <p:cNvPr id="3" name="Text 1">
+            <a:extLst>
+              <a:ext uri="{FF2B5EF4-FFF2-40B4-BE49-F238E27FC236}">
+                <a16:creationId xmlns:a16="http://schemas.microsoft.com/office/drawing/2014/main" id="{486E13F4-04B6-AF62-6CA3-328765227029}"/>
+              </a:ext>
+            </a:extLst>
+          </p:cNvPr>
+          <p:cNvSpPr/>
+          <p:nvPr/>
+        </p:nvSpPr>
+        <p:spPr>
+          <a:xfrm>
+            <a:off x="530352" y="310896"/>
+            <a:ext cx="8229600" cy="219456"/>
+          </a:xfrm>
+          <a:prstGeom prst="rect">
+            <a:avLst/>
+          </a:prstGeom>
+          <a:noFill/>
+          <a:ln/>
+        </p:spPr>
+        <p:txBody>
+          <a:bodyPr wrap="square" lIns="0" tIns="0" rIns="0" bIns="0" rtlCol="0" anchor="ctr">
+            <a:normAutofit/>
+          </a:bodyPr>
+          <a:lstStyle/>
+          <a:p>
+            <a:r>
+              <a:rPr lang="en-US" sz="1000" b="1" kern="0" spc="210" dirty="0">
+                <a:solidFill>
+                  <a:srgbClr val="177C78"/>
+                </a:solidFill>
+                <a:latin typeface="Aptos" pitchFamily="34" charset="0"/>
+                <a:ea typeface="Aptos" pitchFamily="34" charset="-122"/>
+                <a:cs typeface="Aptos" pitchFamily="34" charset="-120"/>
+              </a:rPr>
+              <a:t>RANDOM FOREST · FÖRBÄTTRINGAR</a:t>
+            </a:r>
+            <a:endParaRPr lang="en-US" sz="1000" dirty="0"/>
+          </a:p>
+        </p:txBody>
+      </p:sp>
+      <p:sp>
+        <p:nvSpPr>
+          <p:cNvPr id="4" name="Text 2">
+            <a:extLst>
+              <a:ext uri="{FF2B5EF4-FFF2-40B4-BE49-F238E27FC236}">
+                <a16:creationId xmlns:a16="http://schemas.microsoft.com/office/drawing/2014/main" id="{02C9368C-6C7F-89AA-0293-3058DC68DF6F}"/>
+              </a:ext>
+            </a:extLst>
+          </p:cNvPr>
+          <p:cNvSpPr/>
+          <p:nvPr/>
+        </p:nvSpPr>
+        <p:spPr>
+          <a:xfrm>
+            <a:off x="530352" y="685800"/>
+            <a:ext cx="11064240" cy="548640"/>
+          </a:xfrm>
+          <a:prstGeom prst="rect">
+            <a:avLst/>
+          </a:prstGeom>
+          <a:noFill/>
+          <a:ln/>
+        </p:spPr>
+        <p:txBody>
+          <a:bodyPr wrap="square" lIns="0" tIns="0" rIns="0" bIns="0" rtlCol="0" anchor="ctr">
+            <a:normAutofit/>
+          </a:bodyPr>
+          <a:lstStyle/>
+          <a:p>
+            <a:pPr marL="0" indent="0">
+              <a:buNone/>
+            </a:pPr>
+            <a:r>
+              <a:rPr lang="en-US" sz="3000" b="1" dirty="0">
+                <a:solidFill>
+                  <a:srgbClr val="173647"/>
+                </a:solidFill>
+                <a:latin typeface="Aptos" pitchFamily="34" charset="0"/>
+                <a:ea typeface="Aptos" pitchFamily="34" charset="-122"/>
+                <a:cs typeface="Aptos" pitchFamily="34" charset="-120"/>
+              </a:rPr>
+              <a:t>Random Forest Threshold</a:t>
+            </a:r>
+            <a:endParaRPr lang="en-US" sz="3000" dirty="0"/>
+          </a:p>
+        </p:txBody>
+      </p:sp>
+      <p:sp>
+        <p:nvSpPr>
+          <p:cNvPr id="5" name="Text 3">
+            <a:extLst>
+              <a:ext uri="{FF2B5EF4-FFF2-40B4-BE49-F238E27FC236}">
+                <a16:creationId xmlns:a16="http://schemas.microsoft.com/office/drawing/2014/main" id="{A90D91C2-6E08-B4BF-431A-683FFF4841EC}"/>
+              </a:ext>
+            </a:extLst>
+          </p:cNvPr>
+          <p:cNvSpPr/>
+          <p:nvPr/>
+        </p:nvSpPr>
+        <p:spPr>
+          <a:xfrm>
+            <a:off x="557784" y="1307592"/>
+            <a:ext cx="10972800" cy="393192"/>
+          </a:xfrm>
+          <a:prstGeom prst="rect">
+            <a:avLst/>
+          </a:prstGeom>
+          <a:noFill/>
+          <a:ln/>
+        </p:spPr>
+        <p:txBody>
+          <a:bodyPr wrap="square" lIns="0" tIns="0" rIns="0" bIns="0" rtlCol="0" anchor="ctr">
+            <a:normAutofit/>
+          </a:bodyPr>
+          <a:lstStyle/>
+          <a:p>
+            <a:r>
+              <a:rPr lang="en-US" sz="1400" dirty="0">
+                <a:solidFill>
+                  <a:srgbClr val="657985"/>
+                </a:solidFill>
+                <a:latin typeface="Aptos" pitchFamily="34" charset="0"/>
+                <a:ea typeface="Aptos" pitchFamily="34" charset="-122"/>
+                <a:cs typeface="Aptos" pitchFamily="34" charset="-120"/>
+              </a:rPr>
+              <a:t>Val av </a:t>
+            </a:r>
+            <a:r>
+              <a:rPr lang="en-US" sz="1400" dirty="0" err="1">
+                <a:solidFill>
+                  <a:srgbClr val="657985"/>
+                </a:solidFill>
+                <a:latin typeface="Aptos" pitchFamily="34" charset="0"/>
+                <a:ea typeface="Aptos" pitchFamily="34" charset="-122"/>
+                <a:cs typeface="Aptos" pitchFamily="34" charset="-120"/>
+              </a:rPr>
+              <a:t>Treshold</a:t>
+            </a:r>
+            <a:endParaRPr lang="en-US" sz="1400" dirty="0"/>
+          </a:p>
+        </p:txBody>
+      </p:sp>
+      <p:sp>
+        <p:nvSpPr>
+          <p:cNvPr id="6" name="Shape 4">
+            <a:extLst>
+              <a:ext uri="{FF2B5EF4-FFF2-40B4-BE49-F238E27FC236}">
+                <a16:creationId xmlns:a16="http://schemas.microsoft.com/office/drawing/2014/main" id="{92BAEF20-7305-95E7-AB96-4693459B592B}"/>
+              </a:ext>
+            </a:extLst>
+          </p:cNvPr>
+          <p:cNvSpPr/>
+          <p:nvPr/>
+        </p:nvSpPr>
+        <p:spPr>
+          <a:xfrm>
+            <a:off x="548640" y="6382512"/>
+            <a:ext cx="11594592" cy="0"/>
+          </a:xfrm>
+          <a:prstGeom prst="line">
+            <a:avLst/>
+          </a:prstGeom>
+          <a:noFill/>
+          <a:ln w="12700">
+            <a:solidFill>
+              <a:srgbClr val="DDE8E7"/>
+            </a:solidFill>
+            <a:prstDash val="solid"/>
+          </a:ln>
+        </p:spPr>
+        <p:txBody>
+          <a:bodyPr/>
+          <a:lstStyle/>
+          <a:p>
+            <a:endParaRPr lang="sv-SE"/>
+          </a:p>
+        </p:txBody>
+      </p:sp>
+      <p:sp>
+        <p:nvSpPr>
+          <p:cNvPr id="7" name="Text 5">
+            <a:extLst>
+              <a:ext uri="{FF2B5EF4-FFF2-40B4-BE49-F238E27FC236}">
+                <a16:creationId xmlns:a16="http://schemas.microsoft.com/office/drawing/2014/main" id="{F6CCF58C-1173-3E94-002E-B497F559BF9D}"/>
+              </a:ext>
+            </a:extLst>
+          </p:cNvPr>
+          <p:cNvSpPr/>
+          <p:nvPr/>
+        </p:nvSpPr>
+        <p:spPr>
+          <a:xfrm>
+            <a:off x="566928" y="6501384"/>
+            <a:ext cx="7315200" cy="146304"/>
+          </a:xfrm>
+          <a:prstGeom prst="rect">
+            <a:avLst/>
+          </a:prstGeom>
+          <a:noFill/>
+          <a:ln/>
+        </p:spPr>
+        <p:txBody>
+          <a:bodyPr wrap="square" lIns="0" tIns="0" rIns="0" bIns="0" rtlCol="0" anchor="ctr">
+            <a:normAutofit/>
+          </a:bodyPr>
+          <a:lstStyle/>
+          <a:p>
+            <a:pPr marL="0" indent="0">
+              <a:buNone/>
+            </a:pPr>
+            <a:r>
+              <a:rPr lang="en-US" sz="850" kern="0" spc="100" dirty="0">
+                <a:solidFill>
+                  <a:srgbClr val="657985"/>
+                </a:solidFill>
+                <a:latin typeface="Aptos" pitchFamily="34" charset="0"/>
+                <a:ea typeface="Aptos" pitchFamily="34" charset="-122"/>
+                <a:cs typeface="Aptos" pitchFamily="34" charset="-120"/>
+              </a:rPr>
+              <a:t>SCANIA APS  ·  PROJEKT I DATA SCIENCE</a:t>
+            </a:r>
+            <a:endParaRPr lang="en-US" sz="850" dirty="0"/>
+          </a:p>
+        </p:txBody>
+      </p:sp>
+      <p:sp>
+        <p:nvSpPr>
+          <p:cNvPr id="8" name="Text 6">
+            <a:extLst>
+              <a:ext uri="{FF2B5EF4-FFF2-40B4-BE49-F238E27FC236}">
+                <a16:creationId xmlns:a16="http://schemas.microsoft.com/office/drawing/2014/main" id="{5CE3BE23-2179-C260-E427-0FE9E33EB376}"/>
+              </a:ext>
+            </a:extLst>
+          </p:cNvPr>
+          <p:cNvSpPr/>
+          <p:nvPr/>
+        </p:nvSpPr>
+        <p:spPr>
+          <a:xfrm>
+            <a:off x="10789920" y="6473952"/>
+            <a:ext cx="777240" cy="182880"/>
+          </a:xfrm>
+          <a:prstGeom prst="rect">
+            <a:avLst/>
+          </a:prstGeom>
+          <a:noFill/>
+          <a:ln/>
+        </p:spPr>
+        <p:txBody>
+          <a:bodyPr wrap="square" lIns="0" tIns="0" rIns="0" bIns="0" rtlCol="0" anchor="ctr">
+            <a:normAutofit/>
+          </a:bodyPr>
+          <a:lstStyle/>
+          <a:p>
+            <a:pPr marL="0" indent="0" algn="r">
+              <a:buNone/>
+            </a:pPr>
+            <a:r>
+              <a:rPr lang="en-US" sz="1000" b="1" dirty="0">
+                <a:solidFill>
+                  <a:srgbClr val="177C78"/>
+                </a:solidFill>
+                <a:latin typeface="Aptos" pitchFamily="34" charset="0"/>
+                <a:ea typeface="Aptos" pitchFamily="34" charset="-122"/>
+                <a:cs typeface="Aptos" pitchFamily="34" charset="-120"/>
+              </a:rPr>
+              <a:t>06 / 08</a:t>
+            </a:r>
+            <a:endParaRPr lang="en-US" sz="1000" dirty="0"/>
+          </a:p>
+        </p:txBody>
+      </p:sp>
+      <p:pic>
+        <p:nvPicPr>
+          <p:cNvPr id="30" name="Picture 29">
+            <a:extLst>
+              <a:ext uri="{FF2B5EF4-FFF2-40B4-BE49-F238E27FC236}">
+                <a16:creationId xmlns:a16="http://schemas.microsoft.com/office/drawing/2014/main" id="{569B81D0-BD54-4816-589C-99B27BE878CF}"/>
+              </a:ext>
+            </a:extLst>
+          </p:cNvPr>
+          <p:cNvPicPr>
+            <a:picLocks noChangeAspect="1"/>
+          </p:cNvPicPr>
+          <p:nvPr/>
+        </p:nvPicPr>
+        <p:blipFill>
+          <a:blip r:embed="rId3"/>
+          <a:stretch>
+            <a:fillRect/>
+          </a:stretch>
+        </p:blipFill>
+        <p:spPr>
+          <a:xfrm>
+            <a:off x="1136272" y="1819654"/>
+            <a:ext cx="10222992" cy="4429217"/>
+          </a:xfrm>
+          <a:prstGeom prst="rect">
+            <a:avLst/>
+          </a:prstGeom>
+        </p:spPr>
+      </p:pic>
+    </p:spTree>
+    <p:extLst>
+      <p:ext uri="{BB962C8B-B14F-4D97-AF65-F5344CB8AC3E}">
+        <p14:creationId xmlns:p14="http://schemas.microsoft.com/office/powerpoint/2010/main" val="2269438798"/>
+      </p:ext>
+    </p:extLst>
+  </p:cSld>
+  <p:clrMapOvr>
+    <a:masterClrMapping/>
+  </p:clrMapOvr>
+</p:sld>
+</file>
+
+<file path=ppt/slides/slide7.xml><?xml version="1.0" encoding="utf-8"?>
+<p:sld xmlns:a="http://schemas.openxmlformats.org/drawingml/2006/main" xmlns:r="http://schemas.openxmlformats.org/officeDocument/2006/relationships" xmlns:p="http://schemas.openxmlformats.org/presentationml/2006/main">
   <p:cSld name="Slide 6">
     <p:bg>
       <p:bgPr>
         <a:solidFill>
           <a:srgbClr val="F6F9F9"/>
         </a:solidFill>
+        <a:effectLst/>
       </p:bgPr>
     </p:bg>
     <p:spTree>
@@ -6098,6 +7881,13 @@
             <a:prstDash val="solid"/>
           </a:ln>
         </p:spPr>
+        <p:txBody>
+          <a:bodyPr/>
+          <a:lstStyle/>
+          <a:p>
+            <a:endParaRPr lang="sv-SE"/>
+          </a:p>
+        </p:txBody>
       </p:sp>
       <p:sp>
         <p:nvSpPr>
@@ -6122,11 +7912,11 @@
           </a:bodyPr>
           <a:lstStyle/>
           <a:p>
-            <a:pPr indent="0" marL="0">
-              <a:buNone/>
-            </a:pPr>
-            <a:r>
-              <a:rPr lang="en-US" sz="1000" b="1" spc="210" kern="0" dirty="0">
+            <a:pPr marL="0" indent="0">
+              <a:buNone/>
+            </a:pPr>
+            <a:r>
+              <a:rPr lang="en-US" sz="1000" b="1" kern="0" spc="210" dirty="0">
                 <a:solidFill>
                   <a:srgbClr val="177C78"/>
                 </a:solidFill>
@@ -6163,7 +7953,7 @@
           </a:bodyPr>
           <a:lstStyle/>
           <a:p>
-            <a:pPr indent="0" marL="0">
+            <a:pPr marL="0" indent="0">
               <a:buNone/>
             </a:pPr>
             <a:r>
@@ -6204,7 +7994,7 @@
           </a:bodyPr>
           <a:lstStyle/>
           <a:p>
-            <a:pPr indent="0" marL="0">
+            <a:pPr marL="0" indent="0">
               <a:buNone/>
             </a:pPr>
             <a:r>
@@ -6244,6 +8034,13 @@
             <a:prstDash val="solid"/>
           </a:ln>
         </p:spPr>
+        <p:txBody>
+          <a:bodyPr/>
+          <a:lstStyle/>
+          <a:p>
+            <a:endParaRPr lang="sv-SE"/>
+          </a:p>
+        </p:txBody>
       </p:sp>
       <p:sp>
         <p:nvSpPr>
@@ -6268,11 +8065,11 @@
           </a:bodyPr>
           <a:lstStyle/>
           <a:p>
-            <a:pPr indent="0" marL="0">
-              <a:buNone/>
-            </a:pPr>
-            <a:r>
-              <a:rPr lang="en-US" sz="850" spc="100" kern="0" dirty="0">
+            <a:pPr marL="0" indent="0">
+              <a:buNone/>
+            </a:pPr>
+            <a:r>
+              <a:rPr lang="en-US" sz="850" kern="0" spc="100" dirty="0">
                 <a:solidFill>
                   <a:srgbClr val="657985"/>
                 </a:solidFill>
@@ -6309,7 +8106,7 @@
           </a:bodyPr>
           <a:lstStyle/>
           <a:p>
-            <a:pPr algn="r" indent="0" marL="0">
+            <a:pPr marL="0" indent="0" algn="r">
               <a:buNone/>
             </a:pPr>
             <a:r>
@@ -6353,6 +8150,13 @@
             <a:prstDash val="solid"/>
           </a:ln>
         </p:spPr>
+        <p:txBody>
+          <a:bodyPr/>
+          <a:lstStyle/>
+          <a:p>
+            <a:endParaRPr lang="sv-SE"/>
+          </a:p>
+        </p:txBody>
       </p:sp>
       <p:sp>
         <p:nvSpPr>
@@ -6377,7 +8181,7 @@
           </a:bodyPr>
           <a:lstStyle/>
           <a:p>
-            <a:pPr indent="0" marL="0">
+            <a:pPr marL="0" indent="0">
               <a:buNone/>
             </a:pPr>
             <a:r>
@@ -6418,7 +8222,7 @@
           </a:bodyPr>
           <a:lstStyle/>
           <a:p>
-            <a:pPr indent="0" marL="0">
+            <a:pPr marL="0" indent="0">
               <a:buNone/>
             </a:pPr>
             <a:r>
@@ -6462,6 +8266,13 @@
             <a:prstDash val="solid"/>
           </a:ln>
         </p:spPr>
+        <p:txBody>
+          <a:bodyPr/>
+          <a:lstStyle/>
+          <a:p>
+            <a:endParaRPr lang="sv-SE"/>
+          </a:p>
+        </p:txBody>
       </p:sp>
       <p:sp>
         <p:nvSpPr>
@@ -6489,6 +8300,13 @@
             <a:prstDash val="solid"/>
           </a:ln>
         </p:spPr>
+        <p:txBody>
+          <a:bodyPr/>
+          <a:lstStyle/>
+          <a:p>
+            <a:endParaRPr lang="sv-SE"/>
+          </a:p>
+        </p:txBody>
       </p:sp>
       <p:sp>
         <p:nvSpPr>
@@ -6513,7 +8331,7 @@
           </a:bodyPr>
           <a:lstStyle/>
           <a:p>
-            <a:pPr indent="0" marL="0">
+            <a:pPr marL="0" indent="0">
               <a:buNone/>
             </a:pPr>
             <a:r>
@@ -6554,7 +8372,7 @@
           </a:bodyPr>
           <a:lstStyle/>
           <a:p>
-            <a:pPr indent="0" marL="0">
+            <a:pPr marL="0" indent="0">
               <a:buNone/>
             </a:pPr>
             <a:r>
@@ -6598,6 +8416,13 @@
             <a:prstDash val="solid"/>
           </a:ln>
         </p:spPr>
+        <p:txBody>
+          <a:bodyPr/>
+          <a:lstStyle/>
+          <a:p>
+            <a:endParaRPr lang="sv-SE"/>
+          </a:p>
+        </p:txBody>
       </p:sp>
       <p:sp>
         <p:nvSpPr>
@@ -6625,6 +8450,13 @@
             <a:prstDash val="solid"/>
           </a:ln>
         </p:spPr>
+        <p:txBody>
+          <a:bodyPr/>
+          <a:lstStyle/>
+          <a:p>
+            <a:endParaRPr lang="sv-SE"/>
+          </a:p>
+        </p:txBody>
       </p:sp>
       <p:sp>
         <p:nvSpPr>
@@ -6649,7 +8481,7 @@
           </a:bodyPr>
           <a:lstStyle/>
           <a:p>
-            <a:pPr indent="0" marL="0">
+            <a:pPr marL="0" indent="0">
               <a:buNone/>
             </a:pPr>
             <a:r>
@@ -6690,7 +8522,7 @@
           </a:bodyPr>
           <a:lstStyle/>
           <a:p>
-            <a:pPr indent="0" marL="0">
+            <a:pPr marL="0" indent="0">
               <a:buNone/>
             </a:pPr>
             <a:r>
@@ -6734,6 +8566,13 @@
             <a:prstDash val="solid"/>
           </a:ln>
         </p:spPr>
+        <p:txBody>
+          <a:bodyPr/>
+          <a:lstStyle/>
+          <a:p>
+            <a:endParaRPr lang="sv-SE"/>
+          </a:p>
+        </p:txBody>
       </p:sp>
       <p:sp>
         <p:nvSpPr>
@@ -6761,6 +8600,13 @@
             <a:prstDash val="solid"/>
           </a:ln>
         </p:spPr>
+        <p:txBody>
+          <a:bodyPr/>
+          <a:lstStyle/>
+          <a:p>
+            <a:endParaRPr lang="sv-SE"/>
+          </a:p>
+        </p:txBody>
       </p:sp>
       <p:sp>
         <p:nvSpPr>
@@ -6785,7 +8631,7 @@
           </a:bodyPr>
           <a:lstStyle/>
           <a:p>
-            <a:pPr indent="0" marL="0">
+            <a:pPr marL="0" indent="0">
               <a:buNone/>
             </a:pPr>
             <a:r>
@@ -6829,6 +8675,13 @@
             <a:prstDash val="solid"/>
           </a:ln>
         </p:spPr>
+        <p:txBody>
+          <a:bodyPr/>
+          <a:lstStyle/>
+          <a:p>
+            <a:endParaRPr lang="sv-SE"/>
+          </a:p>
+        </p:txBody>
       </p:sp>
       <p:sp>
         <p:nvSpPr>
@@ -6853,7 +8706,7 @@
           </a:bodyPr>
           <a:lstStyle/>
           <a:p>
-            <a:pPr indent="0" marL="0">
+            <a:pPr marL="0" indent="0">
               <a:buNone/>
             </a:pPr>
             <a:r>
@@ -6894,7 +8747,7 @@
           </a:bodyPr>
           <a:lstStyle/>
           <a:p>
-            <a:pPr indent="0" marL="0">
+            <a:pPr marL="0" indent="0">
               <a:buNone/>
             </a:pPr>
             <a:r>
@@ -6934,6 +8787,13 @@
             <a:prstDash val="solid"/>
           </a:ln>
         </p:spPr>
+        <p:txBody>
+          <a:bodyPr/>
+          <a:lstStyle/>
+          <a:p>
+            <a:endParaRPr lang="sv-SE"/>
+          </a:p>
+        </p:txBody>
       </p:sp>
       <p:sp>
         <p:nvSpPr>
@@ -6958,7 +8818,7 @@
           </a:bodyPr>
           <a:lstStyle/>
           <a:p>
-            <a:pPr indent="0" marL="0">
+            <a:pPr marL="0" indent="0">
               <a:buNone/>
             </a:pPr>
             <a:r>
@@ -6975,7 +8835,7 @@
             <a:endParaRPr lang="en-US" sz="1500" dirty="0"/>
           </a:p>
           <a:p>
-            <a:pPr indent="0" marL="0">
+            <a:pPr marL="0" indent="0">
               <a:buNone/>
             </a:pPr>
             <a:r>
@@ -7016,7 +8876,7 @@
           </a:bodyPr>
           <a:lstStyle/>
           <a:p>
-            <a:pPr indent="0" marL="0">
+            <a:pPr marL="0" indent="0">
               <a:buNone/>
             </a:pPr>
             <a:r>
@@ -7042,7 +8902,400 @@
 </p:sld>
 </file>
 
-<file path=ppt/slides/slide7.xml><?xml version="1.0" encoding="utf-8"?>
+<file path=ppt/slides/slide8.xml><?xml version="1.0" encoding="utf-8"?>
+<p:sld xmlns:a="http://schemas.openxmlformats.org/drawingml/2006/main" xmlns:r="http://schemas.openxmlformats.org/officeDocument/2006/relationships" xmlns:p="http://schemas.openxmlformats.org/presentationml/2006/main">
+  <p:cSld>
+    <p:bg>
+      <p:bgPr>
+        <a:solidFill>
+          <a:srgbClr val="F6F9F9"/>
+        </a:solidFill>
+        <a:effectLst/>
+      </p:bgPr>
+    </p:bg>
+    <p:spTree>
+      <p:nvGrpSpPr>
+        <p:cNvPr id="1" name="">
+          <a:extLst>
+            <a:ext uri="{FF2B5EF4-FFF2-40B4-BE49-F238E27FC236}">
+              <a16:creationId xmlns:a16="http://schemas.microsoft.com/office/drawing/2014/main" id="{2F1111EF-A5C2-9A52-30BD-C9FCBDC24C00}"/>
+            </a:ext>
+          </a:extLst>
+        </p:cNvPr>
+        <p:cNvGrpSpPr/>
+        <p:nvPr/>
+      </p:nvGrpSpPr>
+      <p:grpSpPr>
+        <a:xfrm>
+          <a:off x="0" y="0"/>
+          <a:ext cx="0" cy="0"/>
+          <a:chOff x="0" y="0"/>
+          <a:chExt cx="0" cy="0"/>
+        </a:xfrm>
+      </p:grpSpPr>
+      <p:sp>
+        <p:nvSpPr>
+          <p:cNvPr id="2" name="Shape 0">
+            <a:extLst>
+              <a:ext uri="{FF2B5EF4-FFF2-40B4-BE49-F238E27FC236}">
+                <a16:creationId xmlns:a16="http://schemas.microsoft.com/office/drawing/2014/main" id="{C5627C6C-18BA-1297-DEE3-8ECC776D990E}"/>
+              </a:ext>
+            </a:extLst>
+          </p:cNvPr>
+          <p:cNvSpPr/>
+          <p:nvPr/>
+        </p:nvSpPr>
+        <p:spPr>
+          <a:xfrm>
+            <a:off x="0" y="0"/>
+            <a:ext cx="137160" cy="6858000"/>
+          </a:xfrm>
+          <a:prstGeom prst="rect">
+            <a:avLst/>
+          </a:prstGeom>
+          <a:solidFill>
+            <a:srgbClr val="177C78"/>
+          </a:solidFill>
+          <a:ln w="12700">
+            <a:solidFill>
+              <a:srgbClr val="177C78"/>
+            </a:solidFill>
+            <a:prstDash val="solid"/>
+          </a:ln>
+        </p:spPr>
+        <p:txBody>
+          <a:bodyPr/>
+          <a:lstStyle/>
+          <a:p>
+            <a:endParaRPr lang="sv-SE"/>
+          </a:p>
+        </p:txBody>
+      </p:sp>
+      <p:sp>
+        <p:nvSpPr>
+          <p:cNvPr id="3" name="Text 1">
+            <a:extLst>
+              <a:ext uri="{FF2B5EF4-FFF2-40B4-BE49-F238E27FC236}">
+                <a16:creationId xmlns:a16="http://schemas.microsoft.com/office/drawing/2014/main" id="{0F68B79C-B303-6538-0FC7-04373DD2E486}"/>
+              </a:ext>
+            </a:extLst>
+          </p:cNvPr>
+          <p:cNvSpPr/>
+          <p:nvPr/>
+        </p:nvSpPr>
+        <p:spPr>
+          <a:xfrm>
+            <a:off x="530352" y="310896"/>
+            <a:ext cx="8229600" cy="219456"/>
+          </a:xfrm>
+          <a:prstGeom prst="rect">
+            <a:avLst/>
+          </a:prstGeom>
+          <a:noFill/>
+          <a:ln/>
+        </p:spPr>
+        <p:txBody>
+          <a:bodyPr wrap="square" lIns="0" tIns="0" rIns="0" bIns="0" rtlCol="0" anchor="ctr">
+            <a:normAutofit/>
+          </a:bodyPr>
+          <a:lstStyle/>
+          <a:p>
+            <a:r>
+              <a:rPr lang="en-US" sz="1000" b="1" kern="0" spc="210" dirty="0">
+                <a:solidFill>
+                  <a:srgbClr val="177C78"/>
+                </a:solidFill>
+                <a:latin typeface="Aptos" pitchFamily="34" charset="0"/>
+                <a:ea typeface="Aptos" pitchFamily="34" charset="-122"/>
+                <a:cs typeface="Aptos" pitchFamily="34" charset="-120"/>
+              </a:rPr>
+              <a:t>INTERN VALIDERING · 12 000 FALL</a:t>
+            </a:r>
+            <a:endParaRPr lang="en-US" sz="1000" dirty="0"/>
+          </a:p>
+        </p:txBody>
+      </p:sp>
+      <p:sp>
+        <p:nvSpPr>
+          <p:cNvPr id="4" name="Text 2">
+            <a:extLst>
+              <a:ext uri="{FF2B5EF4-FFF2-40B4-BE49-F238E27FC236}">
+                <a16:creationId xmlns:a16="http://schemas.microsoft.com/office/drawing/2014/main" id="{00CD7EA3-49F3-A57D-A0E2-DE4B979BC2F2}"/>
+              </a:ext>
+            </a:extLst>
+          </p:cNvPr>
+          <p:cNvSpPr/>
+          <p:nvPr/>
+        </p:nvSpPr>
+        <p:spPr>
+          <a:xfrm>
+            <a:off x="530352" y="685800"/>
+            <a:ext cx="11064240" cy="548640"/>
+          </a:xfrm>
+          <a:prstGeom prst="rect">
+            <a:avLst/>
+          </a:prstGeom>
+          <a:noFill/>
+          <a:ln/>
+        </p:spPr>
+        <p:txBody>
+          <a:bodyPr wrap="square" lIns="0" tIns="0" rIns="0" bIns="0" rtlCol="0" anchor="ctr">
+            <a:normAutofit/>
+          </a:bodyPr>
+          <a:lstStyle/>
+          <a:p>
+            <a:pPr marL="0" indent="0">
+              <a:buNone/>
+            </a:pPr>
+            <a:r>
+              <a:rPr lang="en-US" sz="3000" b="1" dirty="0">
+                <a:solidFill>
+                  <a:srgbClr val="173647"/>
+                </a:solidFill>
+                <a:latin typeface="Aptos" pitchFamily="34" charset="0"/>
+                <a:ea typeface="Aptos" pitchFamily="34" charset="-122"/>
+                <a:cs typeface="Aptos" pitchFamily="34" charset="-120"/>
+              </a:rPr>
+              <a:t>Random Forest vs Logistic Regression</a:t>
+            </a:r>
+            <a:endParaRPr lang="en-US" sz="3000" dirty="0"/>
+          </a:p>
+        </p:txBody>
+      </p:sp>
+      <p:sp>
+        <p:nvSpPr>
+          <p:cNvPr id="6" name="Shape 4">
+            <a:extLst>
+              <a:ext uri="{FF2B5EF4-FFF2-40B4-BE49-F238E27FC236}">
+                <a16:creationId xmlns:a16="http://schemas.microsoft.com/office/drawing/2014/main" id="{19460ECD-3475-2239-5934-C14C4884A710}"/>
+              </a:ext>
+            </a:extLst>
+          </p:cNvPr>
+          <p:cNvSpPr/>
+          <p:nvPr/>
+        </p:nvSpPr>
+        <p:spPr>
+          <a:xfrm>
+            <a:off x="548640" y="6382512"/>
+            <a:ext cx="11594592" cy="0"/>
+          </a:xfrm>
+          <a:prstGeom prst="line">
+            <a:avLst/>
+          </a:prstGeom>
+          <a:noFill/>
+          <a:ln w="12700">
+            <a:solidFill>
+              <a:srgbClr val="DDE8E7"/>
+            </a:solidFill>
+            <a:prstDash val="solid"/>
+          </a:ln>
+        </p:spPr>
+        <p:txBody>
+          <a:bodyPr/>
+          <a:lstStyle/>
+          <a:p>
+            <a:endParaRPr lang="sv-SE"/>
+          </a:p>
+        </p:txBody>
+      </p:sp>
+      <p:sp>
+        <p:nvSpPr>
+          <p:cNvPr id="7" name="Text 5">
+            <a:extLst>
+              <a:ext uri="{FF2B5EF4-FFF2-40B4-BE49-F238E27FC236}">
+                <a16:creationId xmlns:a16="http://schemas.microsoft.com/office/drawing/2014/main" id="{B715EC28-39D9-B73F-88FC-95983FCC274D}"/>
+              </a:ext>
+            </a:extLst>
+          </p:cNvPr>
+          <p:cNvSpPr/>
+          <p:nvPr/>
+        </p:nvSpPr>
+        <p:spPr>
+          <a:xfrm>
+            <a:off x="566928" y="6501384"/>
+            <a:ext cx="7315200" cy="146304"/>
+          </a:xfrm>
+          <a:prstGeom prst="rect">
+            <a:avLst/>
+          </a:prstGeom>
+          <a:noFill/>
+          <a:ln/>
+        </p:spPr>
+        <p:txBody>
+          <a:bodyPr wrap="square" lIns="0" tIns="0" rIns="0" bIns="0" rtlCol="0" anchor="ctr">
+            <a:normAutofit/>
+          </a:bodyPr>
+          <a:lstStyle/>
+          <a:p>
+            <a:pPr marL="0" indent="0">
+              <a:buNone/>
+            </a:pPr>
+            <a:r>
+              <a:rPr lang="en-US" sz="850" kern="0" spc="100" dirty="0">
+                <a:solidFill>
+                  <a:srgbClr val="657985"/>
+                </a:solidFill>
+                <a:latin typeface="Aptos" pitchFamily="34" charset="0"/>
+                <a:ea typeface="Aptos" pitchFamily="34" charset="-122"/>
+                <a:cs typeface="Aptos" pitchFamily="34" charset="-120"/>
+              </a:rPr>
+              <a:t>SCANIA APS  ·  PROJEKT I DATA SCIENCE</a:t>
+            </a:r>
+            <a:endParaRPr lang="en-US" sz="850" dirty="0"/>
+          </a:p>
+        </p:txBody>
+      </p:sp>
+      <p:sp>
+        <p:nvSpPr>
+          <p:cNvPr id="8" name="Text 6">
+            <a:extLst>
+              <a:ext uri="{FF2B5EF4-FFF2-40B4-BE49-F238E27FC236}">
+                <a16:creationId xmlns:a16="http://schemas.microsoft.com/office/drawing/2014/main" id="{C5709CF8-39C7-6E0B-5718-36B14C2F498B}"/>
+              </a:ext>
+            </a:extLst>
+          </p:cNvPr>
+          <p:cNvSpPr/>
+          <p:nvPr/>
+        </p:nvSpPr>
+        <p:spPr>
+          <a:xfrm>
+            <a:off x="10789920" y="6473952"/>
+            <a:ext cx="777240" cy="182880"/>
+          </a:xfrm>
+          <a:prstGeom prst="rect">
+            <a:avLst/>
+          </a:prstGeom>
+          <a:noFill/>
+          <a:ln/>
+        </p:spPr>
+        <p:txBody>
+          <a:bodyPr wrap="square" lIns="0" tIns="0" rIns="0" bIns="0" rtlCol="0" anchor="ctr">
+            <a:normAutofit/>
+          </a:bodyPr>
+          <a:lstStyle/>
+          <a:p>
+            <a:pPr marL="0" indent="0" algn="r">
+              <a:buNone/>
+            </a:pPr>
+            <a:r>
+              <a:rPr lang="en-US" sz="1000" b="1" dirty="0">
+                <a:solidFill>
+                  <a:srgbClr val="177C78"/>
+                </a:solidFill>
+                <a:latin typeface="Aptos" pitchFamily="34" charset="0"/>
+                <a:ea typeface="Aptos" pitchFamily="34" charset="-122"/>
+                <a:cs typeface="Aptos" pitchFamily="34" charset="-120"/>
+              </a:rPr>
+              <a:t>06 / 08</a:t>
+            </a:r>
+            <a:endParaRPr lang="en-US" sz="1000" dirty="0"/>
+          </a:p>
+        </p:txBody>
+      </p:sp>
+      <p:pic>
+        <p:nvPicPr>
+          <p:cNvPr id="10" name="Picture 9">
+            <a:extLst>
+              <a:ext uri="{FF2B5EF4-FFF2-40B4-BE49-F238E27FC236}">
+                <a16:creationId xmlns:a16="http://schemas.microsoft.com/office/drawing/2014/main" id="{467F3FB2-D764-9A1B-281D-00801E1EA245}"/>
+              </a:ext>
+            </a:extLst>
+          </p:cNvPr>
+          <p:cNvPicPr>
+            <a:picLocks noChangeAspect="1"/>
+          </p:cNvPicPr>
+          <p:nvPr/>
+        </p:nvPicPr>
+        <p:blipFill>
+          <a:blip r:embed="rId3"/>
+          <a:stretch>
+            <a:fillRect/>
+          </a:stretch>
+        </p:blipFill>
+        <p:spPr>
+          <a:xfrm>
+            <a:off x="3550787" y="1234440"/>
+            <a:ext cx="2401957" cy="2332335"/>
+          </a:xfrm>
+          <a:prstGeom prst="rect">
+            <a:avLst/>
+          </a:prstGeom>
+        </p:spPr>
+      </p:pic>
+      <p:pic>
+        <p:nvPicPr>
+          <p:cNvPr id="12" name="Picture 11">
+            <a:extLst>
+              <a:ext uri="{FF2B5EF4-FFF2-40B4-BE49-F238E27FC236}">
+                <a16:creationId xmlns:a16="http://schemas.microsoft.com/office/drawing/2014/main" id="{3CFA8DCF-46BA-2BC1-20FF-5A87C437F328}"/>
+              </a:ext>
+            </a:extLst>
+          </p:cNvPr>
+          <p:cNvPicPr>
+            <a:picLocks noChangeAspect="1"/>
+          </p:cNvPicPr>
+          <p:nvPr/>
+        </p:nvPicPr>
+        <p:blipFill>
+          <a:blip r:embed="rId4"/>
+          <a:stretch>
+            <a:fillRect/>
+          </a:stretch>
+        </p:blipFill>
+        <p:spPr>
+          <a:xfrm>
+            <a:off x="5952744" y="1234438"/>
+            <a:ext cx="2549564" cy="2332336"/>
+          </a:xfrm>
+          <a:prstGeom prst="rect">
+            <a:avLst/>
+          </a:prstGeom>
+        </p:spPr>
+      </p:pic>
+      <p:pic>
+        <p:nvPicPr>
+          <p:cNvPr id="14" name="Picture 13">
+            <a:extLst>
+              <a:ext uri="{FF2B5EF4-FFF2-40B4-BE49-F238E27FC236}">
+                <a16:creationId xmlns:a16="http://schemas.microsoft.com/office/drawing/2014/main" id="{F60D82DC-3F8D-88A8-AE58-CBF176D18EDB}"/>
+              </a:ext>
+            </a:extLst>
+          </p:cNvPr>
+          <p:cNvPicPr>
+            <a:picLocks noChangeAspect="1"/>
+          </p:cNvPicPr>
+          <p:nvPr/>
+        </p:nvPicPr>
+        <p:blipFill>
+          <a:blip r:embed="rId5"/>
+          <a:stretch>
+            <a:fillRect/>
+          </a:stretch>
+        </p:blipFill>
+        <p:spPr>
+          <a:xfrm>
+            <a:off x="2144616" y="3566774"/>
+            <a:ext cx="7902768" cy="2645008"/>
+          </a:xfrm>
+          <a:prstGeom prst="rect">
+            <a:avLst/>
+          </a:prstGeom>
+        </p:spPr>
+      </p:pic>
+    </p:spTree>
+    <p:extLst>
+      <p:ext uri="{BB962C8B-B14F-4D97-AF65-F5344CB8AC3E}">
+        <p14:creationId xmlns:p14="http://schemas.microsoft.com/office/powerpoint/2010/main" val="226891537"/>
+      </p:ext>
+    </p:extLst>
+  </p:cSld>
+  <p:clrMapOvr>
+    <a:masterClrMapping/>
+  </p:clrMapOvr>
+</p:sld>
+</file>
+
+<file path=ppt/slides/slide9.xml><?xml version="1.0" encoding="utf-8"?>
 <p:sld xmlns:a="http://schemas.openxmlformats.org/drawingml/2006/main" xmlns:r="http://schemas.openxmlformats.org/officeDocument/2006/relationships" xmlns:p="http://schemas.openxmlformats.org/presentationml/2006/main">
   <p:cSld name="Slide 7">
     <p:bg>
@@ -7050,6 +9303,7 @@
         <a:solidFill>
           <a:srgbClr val="F6F9F9"/>
         </a:solidFill>
+        <a:effectLst/>
       </p:bgPr>
     </p:bg>
     <p:spTree>
@@ -7090,6 +9344,13 @@
             <a:prstDash val="solid"/>
           </a:ln>
         </p:spPr>
+        <p:txBody>
+          <a:bodyPr/>
+          <a:lstStyle/>
+          <a:p>
+            <a:endParaRPr lang="sv-SE"/>
+          </a:p>
+        </p:txBody>
       </p:sp>
       <p:sp>
         <p:nvSpPr>
@@ -7114,11 +9375,11 @@
           </a:bodyPr>
           <a:lstStyle/>
           <a:p>
-            <a:pPr indent="0" marL="0">
-              <a:buNone/>
-            </a:pPr>
-            <a:r>
-              <a:rPr lang="en-US" sz="1000" b="1" spc="210" kern="0" dirty="0">
+            <a:pPr marL="0" indent="0">
+              <a:buNone/>
+            </a:pPr>
+            <a:r>
+              <a:rPr lang="en-US" sz="1000" b="1" kern="0" spc="210" dirty="0">
                 <a:solidFill>
                   <a:srgbClr val="177C78"/>
                 </a:solidFill>
@@ -7155,7 +9416,7 @@
           </a:bodyPr>
           <a:lstStyle/>
           <a:p>
-            <a:pPr indent="0" marL="0">
+            <a:pPr marL="0" indent="0">
               <a:buNone/>
             </a:pPr>
             <a:r>
@@ -7196,7 +9457,7 @@
           </a:bodyPr>
           <a:lstStyle/>
           <a:p>
-            <a:pPr indent="0" marL="0">
+            <a:pPr marL="0" indent="0">
               <a:buNone/>
             </a:pPr>
             <a:r>
@@ -7236,6 +9497,13 @@
             <a:prstDash val="solid"/>
           </a:ln>
         </p:spPr>
+        <p:txBody>
+          <a:bodyPr/>
+          <a:lstStyle/>
+          <a:p>
+            <a:endParaRPr lang="sv-SE"/>
+          </a:p>
+        </p:txBody>
       </p:sp>
       <p:sp>
         <p:nvSpPr>
@@ -7260,11 +9528,11 @@
           </a:bodyPr>
           <a:lstStyle/>
           <a:p>
-            <a:pPr indent="0" marL="0">
-              <a:buNone/>
-            </a:pPr>
-            <a:r>
-              <a:rPr lang="en-US" sz="850" spc="100" kern="0" dirty="0">
+            <a:pPr marL="0" indent="0">
+              <a:buNone/>
+            </a:pPr>
+            <a:r>
+              <a:rPr lang="en-US" sz="850" kern="0" spc="100" dirty="0">
                 <a:solidFill>
                   <a:srgbClr val="657985"/>
                 </a:solidFill>
@@ -7301,7 +9569,7 @@
           </a:bodyPr>
           <a:lstStyle/>
           <a:p>
-            <a:pPr algn="r" indent="0" marL="0">
+            <a:pPr marL="0" indent="0" algn="r">
               <a:buNone/>
             </a:pPr>
             <a:r>
@@ -7345,6 +9613,13 @@
             <a:prstDash val="solid"/>
           </a:ln>
         </p:spPr>
+        <p:txBody>
+          <a:bodyPr/>
+          <a:lstStyle/>
+          <a:p>
+            <a:endParaRPr lang="sv-SE"/>
+          </a:p>
+        </p:txBody>
       </p:sp>
       <p:sp>
         <p:nvSpPr>
@@ -7369,7 +9644,7 @@
           </a:bodyPr>
           <a:lstStyle/>
           <a:p>
-            <a:pPr indent="0" marL="0">
+            <a:pPr marL="0" indent="0">
               <a:buNone/>
             </a:pPr>
             <a:r>
@@ -7410,7 +9685,7 @@
           </a:bodyPr>
           <a:lstStyle/>
           <a:p>
-            <a:pPr indent="0" marL="0">
+            <a:pPr marL="0" indent="0">
               <a:buNone/>
             </a:pPr>
             <a:r>
@@ -7454,6 +9729,13 @@
             <a:prstDash val="solid"/>
           </a:ln>
         </p:spPr>
+        <p:txBody>
+          <a:bodyPr/>
+          <a:lstStyle/>
+          <a:p>
+            <a:endParaRPr lang="sv-SE"/>
+          </a:p>
+        </p:txBody>
       </p:sp>
       <p:sp>
         <p:nvSpPr>
@@ -7478,7 +9760,7 @@
           </a:bodyPr>
           <a:lstStyle/>
           <a:p>
-            <a:pPr indent="0" marL="0">
+            <a:pPr marL="0" indent="0">
               <a:buNone/>
             </a:pPr>
             <a:r>
@@ -7519,7 +9801,7 @@
           </a:bodyPr>
           <a:lstStyle/>
           <a:p>
-            <a:pPr indent="0" marL="0">
+            <a:pPr marL="0" indent="0">
               <a:buNone/>
             </a:pPr>
             <a:r>
@@ -7563,6 +9845,13 @@
             <a:prstDash val="solid"/>
           </a:ln>
         </p:spPr>
+        <p:txBody>
+          <a:bodyPr/>
+          <a:lstStyle/>
+          <a:p>
+            <a:endParaRPr lang="sv-SE"/>
+          </a:p>
+        </p:txBody>
       </p:sp>
       <p:sp>
         <p:nvSpPr>
@@ -7587,7 +9876,7 @@
           </a:bodyPr>
           <a:lstStyle/>
           <a:p>
-            <a:pPr indent="0" marL="0">
+            <a:pPr marL="0" indent="0">
               <a:buNone/>
             </a:pPr>
             <a:r>
@@ -7628,7 +9917,7 @@
           </a:bodyPr>
           <a:lstStyle/>
           <a:p>
-            <a:pPr indent="0" marL="0">
+            <a:pPr marL="0" indent="0">
               <a:buNone/>
             </a:pPr>
             <a:r>
@@ -7672,6 +9961,13 @@
             <a:prstDash val="solid"/>
           </a:ln>
         </p:spPr>
+        <p:txBody>
+          <a:bodyPr/>
+          <a:lstStyle/>
+          <a:p>
+            <a:endParaRPr lang="sv-SE"/>
+          </a:p>
+        </p:txBody>
       </p:sp>
       <p:sp>
         <p:nvSpPr>
@@ -7696,7 +9992,7 @@
           </a:bodyPr>
           <a:lstStyle/>
           <a:p>
-            <a:pPr indent="0" marL="0">
+            <a:pPr marL="0" indent="0">
               <a:buNone/>
             </a:pPr>
             <a:r>
@@ -7737,7 +10033,7 @@
           </a:bodyPr>
           <a:lstStyle/>
           <a:p>
-            <a:pPr indent="0" marL="0">
+            <a:pPr marL="0" indent="0">
               <a:buNone/>
             </a:pPr>
             <a:r>
@@ -7781,6 +10077,13 @@
             <a:prstDash val="solid"/>
           </a:ln>
         </p:spPr>
+        <p:txBody>
+          <a:bodyPr/>
+          <a:lstStyle/>
+          <a:p>
+            <a:endParaRPr lang="sv-SE"/>
+          </a:p>
+        </p:txBody>
       </p:sp>
       <p:sp>
         <p:nvSpPr>
@@ -7808,6 +10111,13 @@
             <a:prstDash val="solid"/>
           </a:ln>
         </p:spPr>
+        <p:txBody>
+          <a:bodyPr/>
+          <a:lstStyle/>
+          <a:p>
+            <a:endParaRPr lang="sv-SE"/>
+          </a:p>
+        </p:txBody>
       </p:sp>
       <p:sp>
         <p:nvSpPr>
@@ -7832,7 +10142,7 @@
           </a:bodyPr>
           <a:lstStyle/>
           <a:p>
-            <a:pPr indent="0" marL="0">
+            <a:pPr marL="0" indent="0">
               <a:buNone/>
             </a:pPr>
             <a:r>
@@ -7873,7 +10183,7 @@
           </a:bodyPr>
           <a:lstStyle/>
           <a:p>
-            <a:pPr indent="0" marL="0">
+            <a:pPr marL="0" indent="0">
               <a:buNone/>
             </a:pPr>
             <a:r>
@@ -7917,6 +10227,13 @@
             <a:prstDash val="solid"/>
           </a:ln>
         </p:spPr>
+        <p:txBody>
+          <a:bodyPr/>
+          <a:lstStyle/>
+          <a:p>
+            <a:endParaRPr lang="sv-SE"/>
+          </a:p>
+        </p:txBody>
       </p:sp>
       <p:sp>
         <p:nvSpPr>
@@ -7944,6 +10261,13 @@
             <a:prstDash val="solid"/>
           </a:ln>
         </p:spPr>
+        <p:txBody>
+          <a:bodyPr/>
+          <a:lstStyle/>
+          <a:p>
+            <a:endParaRPr lang="sv-SE"/>
+          </a:p>
+        </p:txBody>
       </p:sp>
       <p:sp>
         <p:nvSpPr>
@@ -7968,7 +10292,7 @@
           </a:bodyPr>
           <a:lstStyle/>
           <a:p>
-            <a:pPr indent="0" marL="0">
+            <a:pPr marL="0" indent="0">
               <a:buNone/>
             </a:pPr>
             <a:r>
@@ -8012,6 +10336,13 @@
             <a:prstDash val="solid"/>
           </a:ln>
         </p:spPr>
+        <p:txBody>
+          <a:bodyPr/>
+          <a:lstStyle/>
+          <a:p>
+            <a:endParaRPr lang="sv-SE"/>
+          </a:p>
+        </p:txBody>
       </p:sp>
       <p:sp>
         <p:nvSpPr>
@@ -8036,7 +10367,7 @@
           </a:bodyPr>
           <a:lstStyle/>
           <a:p>
-            <a:pPr indent="0" marL="0">
+            <a:pPr marL="0" indent="0">
               <a:buNone/>
             </a:pPr>
             <a:r>
@@ -8077,7 +10408,7 @@
           </a:bodyPr>
           <a:lstStyle/>
           <a:p>
-            <a:pPr indent="0" marL="0">
+            <a:pPr marL="0" indent="0">
               <a:buNone/>
             </a:pPr>
             <a:r>
@@ -8118,7 +10449,7 @@
           </a:bodyPr>
           <a:lstStyle/>
           <a:p>
-            <a:pPr indent="0" marL="0">
+            <a:pPr marL="0" indent="0">
               <a:buNone/>
             </a:pPr>
             <a:r>
@@ -8159,7 +10490,7 @@
           </a:bodyPr>
           <a:lstStyle/>
           <a:p>
-            <a:pPr indent="0" marL="0">
+            <a:pPr marL="0" indent="0">
               <a:buNone/>
             </a:pPr>
             <a:r>
@@ -8199,6 +10530,13 @@
             <a:prstDash val="solid"/>
           </a:ln>
         </p:spPr>
+        <p:txBody>
+          <a:bodyPr/>
+          <a:lstStyle/>
+          <a:p>
+            <a:endParaRPr lang="sv-SE"/>
+          </a:p>
+        </p:txBody>
       </p:sp>
       <p:sp>
         <p:nvSpPr>
@@ -8223,7 +10561,7 @@
           </a:bodyPr>
           <a:lstStyle/>
           <a:p>
-            <a:pPr indent="0" marL="0">
+            <a:pPr marL="0" indent="0">
               <a:buNone/>
             </a:pPr>
             <a:r>
@@ -8264,7 +10602,7 @@
           </a:bodyPr>
           <a:lstStyle/>
           <a:p>
-            <a:pPr indent="0" marL="0">
+            <a:pPr marL="0" indent="0">
               <a:buNone/>
             </a:pPr>
             <a:r>
@@ -8305,7 +10643,7 @@
           </a:bodyPr>
           <a:lstStyle/>
           <a:p>
-            <a:pPr indent="0" marL="0">
+            <a:pPr marL="0" indent="0">
               <a:buNone/>
             </a:pPr>
             <a:r>
@@ -8346,7 +10684,7 @@
           </a:bodyPr>
           <a:lstStyle/>
           <a:p>
-            <a:pPr indent="0" marL="0">
+            <a:pPr marL="0" indent="0">
               <a:buNone/>
             </a:pPr>
             <a:r>
@@ -8387,7 +10725,7 @@
           </a:bodyPr>
           <a:lstStyle/>
           <a:p>
-            <a:pPr indent="0" marL="0">
+            <a:pPr marL="0" indent="0">
               <a:buNone/>
             </a:pPr>
             <a:r>
@@ -8428,7 +10766,7 @@
           </a:bodyPr>
           <a:lstStyle/>
           <a:p>
-            <a:pPr indent="0" marL="0">
+            <a:pPr marL="0" indent="0">
               <a:buNone/>
             </a:pPr>
             <a:r>
@@ -8469,7 +10807,7 @@
           </a:bodyPr>
           <a:lstStyle/>
           <a:p>
-            <a:pPr indent="0" marL="0">
+            <a:pPr marL="0" indent="0">
               <a:buNone/>
             </a:pPr>
             <a:r>
@@ -8510,7 +10848,7 @@
           </a:bodyPr>
           <a:lstStyle/>
           <a:p>
-            <a:pPr indent="0" marL="0">
+            <a:pPr marL="0" indent="0">
               <a:buNone/>
             </a:pPr>
             <a:r>
@@ -8551,7 +10889,7 @@
           </a:bodyPr>
           <a:lstStyle/>
           <a:p>
-            <a:pPr indent="0" marL="0">
+            <a:pPr marL="0" indent="0">
               <a:buNone/>
             </a:pPr>
             <a:r>
@@ -8566,1023 +10904,6 @@
               <a:t>Dummy-modellen missade alla 375 APS-fel trots 97,66 % accuracy.</a:t>
             </a:r>
             <a:endParaRPr lang="en-US" sz="1300" dirty="0"/>
-          </a:p>
-        </p:txBody>
-      </p:sp>
-    </p:spTree>
-  </p:cSld>
-  <p:clrMapOvr>
-    <a:masterClrMapping/>
-  </p:clrMapOvr>
-</p:sld>
-</file>
-
-<file path=ppt/slides/slide8.xml><?xml version="1.0" encoding="utf-8"?>
-<p:sld xmlns:a="http://schemas.openxmlformats.org/drawingml/2006/main" xmlns:r="http://schemas.openxmlformats.org/officeDocument/2006/relationships" xmlns:p="http://schemas.openxmlformats.org/presentationml/2006/main">
-  <p:cSld name="Slide 8">
-    <p:bg>
-      <p:bgPr>
-        <a:solidFill>
-          <a:srgbClr val="F6F9F9"/>
-        </a:solidFill>
-      </p:bgPr>
-    </p:bg>
-    <p:spTree>
-      <p:nvGrpSpPr>
-        <p:cNvPr id="1" name=""/>
-        <p:cNvGrpSpPr/>
-        <p:nvPr/>
-      </p:nvGrpSpPr>
-      <p:grpSpPr>
-        <a:xfrm>
-          <a:off x="0" y="0"/>
-          <a:ext cx="0" cy="0"/>
-          <a:chOff x="0" y="0"/>
-          <a:chExt cx="0" cy="0"/>
-        </a:xfrm>
-      </p:grpSpPr>
-      <p:sp>
-        <p:nvSpPr>
-          <p:cNvPr id="2" name="Shape 0"/>
-          <p:cNvSpPr/>
-          <p:nvPr/>
-        </p:nvSpPr>
-        <p:spPr>
-          <a:xfrm>
-            <a:off x="0" y="0"/>
-            <a:ext cx="137160" cy="6858000"/>
-          </a:xfrm>
-          <a:prstGeom prst="rect">
-            <a:avLst/>
-          </a:prstGeom>
-          <a:solidFill>
-            <a:srgbClr val="177C78"/>
-          </a:solidFill>
-          <a:ln w="12700">
-            <a:solidFill>
-              <a:srgbClr val="177C78"/>
-            </a:solidFill>
-            <a:prstDash val="solid"/>
-          </a:ln>
-        </p:spPr>
-      </p:sp>
-      <p:sp>
-        <p:nvSpPr>
-          <p:cNvPr id="3" name="Text 1"/>
-          <p:cNvSpPr/>
-          <p:nvPr/>
-        </p:nvSpPr>
-        <p:spPr>
-          <a:xfrm>
-            <a:off x="530352" y="310896"/>
-            <a:ext cx="8229600" cy="219456"/>
-          </a:xfrm>
-          <a:prstGeom prst="rect">
-            <a:avLst/>
-          </a:prstGeom>
-          <a:noFill/>
-          <a:ln/>
-        </p:spPr>
-        <p:txBody>
-          <a:bodyPr wrap="square" lIns="0" tIns="0" rIns="0" bIns="0" rtlCol="0" anchor="ctr">
-            <a:normAutofit/>
-          </a:bodyPr>
-          <a:lstStyle/>
-          <a:p>
-            <a:pPr indent="0" marL="0">
-              <a:buNone/>
-            </a:pPr>
-            <a:r>
-              <a:rPr lang="en-US" sz="1000" b="1" spc="210" kern="0" dirty="0">
-                <a:solidFill>
-                  <a:srgbClr val="177C78"/>
-                </a:solidFill>
-                <a:latin typeface="Aptos" pitchFamily="34" charset="0"/>
-                <a:ea typeface="Aptos" pitchFamily="34" charset="-122"/>
-                <a:cs typeface="Aptos" pitchFamily="34" charset="-120"/>
-              </a:rPr>
-              <a:t>BEGRÄNSNINGAR · SLUTSATS</a:t>
-            </a:r>
-            <a:endParaRPr lang="en-US" sz="1000" dirty="0"/>
-          </a:p>
-        </p:txBody>
-      </p:sp>
-      <p:sp>
-        <p:nvSpPr>
-          <p:cNvPr id="4" name="Text 2"/>
-          <p:cNvSpPr/>
-          <p:nvPr/>
-        </p:nvSpPr>
-        <p:spPr>
-          <a:xfrm>
-            <a:off x="530352" y="685800"/>
-            <a:ext cx="11064240" cy="548640"/>
-          </a:xfrm>
-          <a:prstGeom prst="rect">
-            <a:avLst/>
-          </a:prstGeom>
-          <a:noFill/>
-          <a:ln/>
-        </p:spPr>
-        <p:txBody>
-          <a:bodyPr wrap="square" lIns="0" tIns="0" rIns="0" bIns="0" rtlCol="0" anchor="ctr">
-            <a:normAutofit/>
-          </a:bodyPr>
-          <a:lstStyle/>
-          <a:p>
-            <a:pPr indent="0" marL="0">
-              <a:buNone/>
-            </a:pPr>
-            <a:r>
-              <a:rPr lang="en-US" sz="3000" b="1" dirty="0">
-                <a:solidFill>
-                  <a:srgbClr val="173647"/>
-                </a:solidFill>
-                <a:latin typeface="Aptos" pitchFamily="34" charset="0"/>
-                <a:ea typeface="Aptos" pitchFamily="34" charset="-122"/>
-                <a:cs typeface="Aptos" pitchFamily="34" charset="-120"/>
-              </a:rPr>
-              <a:t>Lovande som beslutsstöd – inte redo för drift</a:t>
-            </a:r>
-            <a:endParaRPr lang="en-US" sz="3000" dirty="0"/>
-          </a:p>
-        </p:txBody>
-      </p:sp>
-      <p:sp>
-        <p:nvSpPr>
-          <p:cNvPr id="5" name="Text 3"/>
-          <p:cNvSpPr/>
-          <p:nvPr/>
-        </p:nvSpPr>
-        <p:spPr>
-          <a:xfrm>
-            <a:off x="557784" y="1307592"/>
-            <a:ext cx="10972800" cy="393192"/>
-          </a:xfrm>
-          <a:prstGeom prst="rect">
-            <a:avLst/>
-          </a:prstGeom>
-          <a:noFill/>
-          <a:ln/>
-        </p:spPr>
-        <p:txBody>
-          <a:bodyPr wrap="square" lIns="0" tIns="0" rIns="0" bIns="0" rtlCol="0" anchor="ctr">
-            <a:normAutofit/>
-          </a:bodyPr>
-          <a:lstStyle/>
-          <a:p>
-            <a:pPr indent="0" marL="0">
-              <a:buNone/>
-            </a:pPr>
-            <a:r>
-              <a:rPr lang="en-US" sz="1400" dirty="0">
-                <a:solidFill>
-                  <a:srgbClr val="657985"/>
-                </a:solidFill>
-                <a:latin typeface="Aptos" pitchFamily="34" charset="0"/>
-                <a:ea typeface="Aptos" pitchFamily="34" charset="-122"/>
-                <a:cs typeface="Aptos" pitchFamily="34" charset="-120"/>
-              </a:rPr>
-              <a:t>Random Forest är bäst av de undersökta modellerna enligt projektets kostnadsantaganden</a:t>
-            </a:r>
-            <a:endParaRPr lang="en-US" sz="1400" dirty="0"/>
-          </a:p>
-        </p:txBody>
-      </p:sp>
-      <p:sp>
-        <p:nvSpPr>
-          <p:cNvPr id="6" name="Shape 4"/>
-          <p:cNvSpPr/>
-          <p:nvPr/>
-        </p:nvSpPr>
-        <p:spPr>
-          <a:xfrm>
-            <a:off x="548640" y="6382512"/>
-            <a:ext cx="11594592" cy="0"/>
-          </a:xfrm>
-          <a:prstGeom prst="line">
-            <a:avLst/>
-          </a:prstGeom>
-          <a:noFill/>
-          <a:ln w="12700">
-            <a:solidFill>
-              <a:srgbClr val="DDE8E7"/>
-            </a:solidFill>
-            <a:prstDash val="solid"/>
-          </a:ln>
-        </p:spPr>
-      </p:sp>
-      <p:sp>
-        <p:nvSpPr>
-          <p:cNvPr id="7" name="Text 5"/>
-          <p:cNvSpPr/>
-          <p:nvPr/>
-        </p:nvSpPr>
-        <p:spPr>
-          <a:xfrm>
-            <a:off x="566928" y="6501384"/>
-            <a:ext cx="7315200" cy="146304"/>
-          </a:xfrm>
-          <a:prstGeom prst="rect">
-            <a:avLst/>
-          </a:prstGeom>
-          <a:noFill/>
-          <a:ln/>
-        </p:spPr>
-        <p:txBody>
-          <a:bodyPr wrap="square" lIns="0" tIns="0" rIns="0" bIns="0" rtlCol="0" anchor="ctr">
-            <a:normAutofit/>
-          </a:bodyPr>
-          <a:lstStyle/>
-          <a:p>
-            <a:pPr indent="0" marL="0">
-              <a:buNone/>
-            </a:pPr>
-            <a:r>
-              <a:rPr lang="en-US" sz="850" spc="100" kern="0" dirty="0">
-                <a:solidFill>
-                  <a:srgbClr val="657985"/>
-                </a:solidFill>
-                <a:latin typeface="Aptos" pitchFamily="34" charset="0"/>
-                <a:ea typeface="Aptos" pitchFamily="34" charset="-122"/>
-                <a:cs typeface="Aptos" pitchFamily="34" charset="-120"/>
-              </a:rPr>
-              <a:t>SCANIA APS  ·  PROJEKT I DATA SCIENCE</a:t>
-            </a:r>
-            <a:endParaRPr lang="en-US" sz="850" dirty="0"/>
-          </a:p>
-        </p:txBody>
-      </p:sp>
-      <p:sp>
-        <p:nvSpPr>
-          <p:cNvPr id="8" name="Text 6"/>
-          <p:cNvSpPr/>
-          <p:nvPr/>
-        </p:nvSpPr>
-        <p:spPr>
-          <a:xfrm>
-            <a:off x="10789920" y="6473952"/>
-            <a:ext cx="777240" cy="182880"/>
-          </a:xfrm>
-          <a:prstGeom prst="rect">
-            <a:avLst/>
-          </a:prstGeom>
-          <a:noFill/>
-          <a:ln/>
-        </p:spPr>
-        <p:txBody>
-          <a:bodyPr wrap="square" lIns="0" tIns="0" rIns="0" bIns="0" rtlCol="0" anchor="ctr">
-            <a:normAutofit/>
-          </a:bodyPr>
-          <a:lstStyle/>
-          <a:p>
-            <a:pPr algn="r" indent="0" marL="0">
-              <a:buNone/>
-            </a:pPr>
-            <a:r>
-              <a:rPr lang="en-US" sz="1000" b="1" dirty="0">
-                <a:solidFill>
-                  <a:srgbClr val="177C78"/>
-                </a:solidFill>
-                <a:latin typeface="Aptos" pitchFamily="34" charset="0"/>
-                <a:ea typeface="Aptos" pitchFamily="34" charset="-122"/>
-                <a:cs typeface="Aptos" pitchFamily="34" charset="-120"/>
-              </a:rPr>
-              <a:t>08 / 08</a:t>
-            </a:r>
-            <a:endParaRPr lang="en-US" sz="1000" dirty="0"/>
-          </a:p>
-        </p:txBody>
-      </p:sp>
-      <p:sp>
-        <p:nvSpPr>
-          <p:cNvPr id="9" name="Shape 7"/>
-          <p:cNvSpPr/>
-          <p:nvPr/>
-        </p:nvSpPr>
-        <p:spPr>
-          <a:xfrm>
-            <a:off x="566928" y="1920240"/>
-            <a:ext cx="5285232" cy="3648456"/>
-          </a:xfrm>
-          <a:prstGeom prst="roundRect">
-            <a:avLst>
-              <a:gd name="adj" fmla="val 3008"/>
-            </a:avLst>
-          </a:prstGeom>
-          <a:solidFill>
-            <a:srgbClr val="FFFFFF"/>
-          </a:solidFill>
-          <a:ln w="8890">
-            <a:solidFill>
-              <a:srgbClr val="DDE8E7"/>
-            </a:solidFill>
-            <a:prstDash val="solid"/>
-          </a:ln>
-        </p:spPr>
-      </p:sp>
-      <p:sp>
-        <p:nvSpPr>
-          <p:cNvPr id="10" name="Text 8"/>
-          <p:cNvSpPr/>
-          <p:nvPr/>
-        </p:nvSpPr>
-        <p:spPr>
-          <a:xfrm>
-            <a:off x="868680" y="2258568"/>
-            <a:ext cx="4480560" cy="246888"/>
-          </a:xfrm>
-          <a:prstGeom prst="rect">
-            <a:avLst/>
-          </a:prstGeom>
-          <a:noFill/>
-          <a:ln/>
-        </p:spPr>
-        <p:txBody>
-          <a:bodyPr wrap="square" lIns="0" tIns="0" rIns="0" bIns="0" rtlCol="0" anchor="ctr">
-            <a:normAutofit/>
-          </a:bodyPr>
-          <a:lstStyle/>
-          <a:p>
-            <a:pPr indent="0" marL="0">
-              <a:buNone/>
-            </a:pPr>
-            <a:r>
-              <a:rPr lang="en-US" sz="1300" b="1" dirty="0">
-                <a:solidFill>
-                  <a:srgbClr val="177C78"/>
-                </a:solidFill>
-                <a:latin typeface="Aptos" pitchFamily="34" charset="0"/>
-                <a:ea typeface="Aptos" pitchFamily="34" charset="-122"/>
-                <a:cs typeface="Aptos" pitchFamily="34" charset="-120"/>
-              </a:rPr>
-              <a:t>VAD RESULTATEN STÖDJER</a:t>
-            </a:r>
-            <a:endParaRPr lang="en-US" sz="1300" dirty="0"/>
-          </a:p>
-        </p:txBody>
-      </p:sp>
-      <p:sp>
-        <p:nvSpPr>
-          <p:cNvPr id="11" name="Shape 9"/>
-          <p:cNvSpPr/>
-          <p:nvPr/>
-        </p:nvSpPr>
-        <p:spPr>
-          <a:xfrm>
-            <a:off x="905256" y="2912364"/>
-            <a:ext cx="82296" cy="82296"/>
-          </a:xfrm>
-          <a:prstGeom prst="ellipse">
-            <a:avLst/>
-          </a:prstGeom>
-          <a:solidFill>
-            <a:srgbClr val="177C78"/>
-          </a:solidFill>
-          <a:ln w="12700">
-            <a:solidFill>
-              <a:srgbClr val="177C78"/>
-            </a:solidFill>
-            <a:prstDash val="solid"/>
-          </a:ln>
-        </p:spPr>
-      </p:sp>
-      <p:sp>
-        <p:nvSpPr>
-          <p:cNvPr id="12" name="Text 10"/>
-          <p:cNvSpPr/>
-          <p:nvPr/>
-        </p:nvSpPr>
-        <p:spPr>
-          <a:xfrm>
-            <a:off x="1115568" y="2816352"/>
-            <a:ext cx="4416552" cy="493776"/>
-          </a:xfrm>
-          <a:prstGeom prst="rect">
-            <a:avLst/>
-          </a:prstGeom>
-          <a:noFill/>
-          <a:ln/>
-        </p:spPr>
-        <p:txBody>
-          <a:bodyPr wrap="square" lIns="0" tIns="0" rIns="0" bIns="0" rtlCol="0" anchor="ctr">
-            <a:normAutofit/>
-          </a:bodyPr>
-          <a:lstStyle/>
-          <a:p>
-            <a:pPr indent="0" marL="0">
-              <a:buNone/>
-            </a:pPr>
-            <a:r>
-              <a:rPr lang="en-US" sz="1600" dirty="0">
-                <a:solidFill>
-                  <a:srgbClr val="213746"/>
-                </a:solidFill>
-                <a:latin typeface="Aptos" pitchFamily="34" charset="0"/>
-                <a:ea typeface="Aptos" pitchFamily="34" charset="-122"/>
-                <a:cs typeface="Aptos" pitchFamily="34" charset="-120"/>
-              </a:rPr>
-              <a:t>Fler APS-fel hittas (360 av 375)</a:t>
-            </a:r>
-            <a:endParaRPr lang="en-US" sz="1600" dirty="0"/>
-          </a:p>
-        </p:txBody>
-      </p:sp>
-      <p:sp>
-        <p:nvSpPr>
-          <p:cNvPr id="13" name="Shape 11"/>
-          <p:cNvSpPr/>
-          <p:nvPr/>
-        </p:nvSpPr>
-        <p:spPr>
-          <a:xfrm>
-            <a:off x="905256" y="3479292"/>
-            <a:ext cx="82296" cy="82296"/>
-          </a:xfrm>
-          <a:prstGeom prst="ellipse">
-            <a:avLst/>
-          </a:prstGeom>
-          <a:solidFill>
-            <a:srgbClr val="177C78"/>
-          </a:solidFill>
-          <a:ln w="12700">
-            <a:solidFill>
-              <a:srgbClr val="177C78"/>
-            </a:solidFill>
-            <a:prstDash val="solid"/>
-          </a:ln>
-        </p:spPr>
-      </p:sp>
-      <p:sp>
-        <p:nvSpPr>
-          <p:cNvPr id="14" name="Text 12"/>
-          <p:cNvSpPr/>
-          <p:nvPr/>
-        </p:nvSpPr>
-        <p:spPr>
-          <a:xfrm>
-            <a:off x="1115568" y="3383280"/>
-            <a:ext cx="4416552" cy="493776"/>
-          </a:xfrm>
-          <a:prstGeom prst="rect">
-            <a:avLst/>
-          </a:prstGeom>
-          <a:noFill/>
-          <a:ln/>
-        </p:spPr>
-        <p:txBody>
-          <a:bodyPr wrap="square" lIns="0" tIns="0" rIns="0" bIns="0" rtlCol="0" anchor="ctr">
-            <a:normAutofit/>
-          </a:bodyPr>
-          <a:lstStyle/>
-          <a:p>
-            <a:pPr indent="0" marL="0">
-              <a:buNone/>
-            </a:pPr>
-            <a:r>
-              <a:rPr lang="en-US" sz="1600" dirty="0">
-                <a:solidFill>
-                  <a:srgbClr val="213746"/>
-                </a:solidFill>
-                <a:latin typeface="Aptos" pitchFamily="34" charset="0"/>
-                <a:ea typeface="Aptos" pitchFamily="34" charset="-122"/>
-                <a:cs typeface="Aptos" pitchFamily="34" charset="-120"/>
-              </a:rPr>
-              <a:t>Färre falsklarm än Logistic Regression</a:t>
-            </a:r>
-            <a:endParaRPr lang="en-US" sz="1600" dirty="0"/>
-          </a:p>
-        </p:txBody>
-      </p:sp>
-      <p:sp>
-        <p:nvSpPr>
-          <p:cNvPr id="15" name="Shape 13"/>
-          <p:cNvSpPr/>
-          <p:nvPr/>
-        </p:nvSpPr>
-        <p:spPr>
-          <a:xfrm>
-            <a:off x="905256" y="4046220"/>
-            <a:ext cx="82296" cy="82296"/>
-          </a:xfrm>
-          <a:prstGeom prst="ellipse">
-            <a:avLst/>
-          </a:prstGeom>
-          <a:solidFill>
-            <a:srgbClr val="177C78"/>
-          </a:solidFill>
-          <a:ln w="12700">
-            <a:solidFill>
-              <a:srgbClr val="177C78"/>
-            </a:solidFill>
-            <a:prstDash val="solid"/>
-          </a:ln>
-        </p:spPr>
-      </p:sp>
-      <p:sp>
-        <p:nvSpPr>
-          <p:cNvPr id="16" name="Text 14"/>
-          <p:cNvSpPr/>
-          <p:nvPr/>
-        </p:nvSpPr>
-        <p:spPr>
-          <a:xfrm>
-            <a:off x="1115568" y="3950208"/>
-            <a:ext cx="4416552" cy="493776"/>
-          </a:xfrm>
-          <a:prstGeom prst="rect">
-            <a:avLst/>
-          </a:prstGeom>
-          <a:noFill/>
-          <a:ln/>
-        </p:spPr>
-        <p:txBody>
-          <a:bodyPr wrap="square" lIns="0" tIns="0" rIns="0" bIns="0" rtlCol="0" anchor="ctr">
-            <a:normAutofit/>
-          </a:bodyPr>
-          <a:lstStyle/>
-          <a:p>
-            <a:pPr indent="0" marL="0">
-              <a:buNone/>
-            </a:pPr>
-            <a:r>
-              <a:rPr lang="en-US" sz="1600" dirty="0">
-                <a:solidFill>
-                  <a:srgbClr val="213746"/>
-                </a:solidFill>
-                <a:latin typeface="Aptos" pitchFamily="34" charset="0"/>
-                <a:ea typeface="Aptos" pitchFamily="34" charset="-122"/>
-                <a:cs typeface="Aptos" pitchFamily="34" charset="-120"/>
-              </a:rPr>
-              <a:t>27,6 % lägre beräknad felkostnad</a:t>
-            </a:r>
-            <a:endParaRPr lang="en-US" sz="1600" dirty="0"/>
-          </a:p>
-        </p:txBody>
-      </p:sp>
-      <p:sp>
-        <p:nvSpPr>
-          <p:cNvPr id="17" name="Shape 15"/>
-          <p:cNvSpPr/>
-          <p:nvPr/>
-        </p:nvSpPr>
-        <p:spPr>
-          <a:xfrm>
-            <a:off x="905256" y="4613148"/>
-            <a:ext cx="82296" cy="82296"/>
-          </a:xfrm>
-          <a:prstGeom prst="ellipse">
-            <a:avLst/>
-          </a:prstGeom>
-          <a:solidFill>
-            <a:srgbClr val="177C78"/>
-          </a:solidFill>
-          <a:ln w="12700">
-            <a:solidFill>
-              <a:srgbClr val="177C78"/>
-            </a:solidFill>
-            <a:prstDash val="solid"/>
-          </a:ln>
-        </p:spPr>
-      </p:sp>
-      <p:sp>
-        <p:nvSpPr>
-          <p:cNvPr id="18" name="Text 16"/>
-          <p:cNvSpPr/>
-          <p:nvPr/>
-        </p:nvSpPr>
-        <p:spPr>
-          <a:xfrm>
-            <a:off x="1115568" y="4517136"/>
-            <a:ext cx="4416552" cy="493776"/>
-          </a:xfrm>
-          <a:prstGeom prst="rect">
-            <a:avLst/>
-          </a:prstGeom>
-          <a:noFill/>
-          <a:ln/>
-        </p:spPr>
-        <p:txBody>
-          <a:bodyPr wrap="square" lIns="0" tIns="0" rIns="0" bIns="0" rtlCol="0" anchor="ctr">
-            <a:normAutofit/>
-          </a:bodyPr>
-          <a:lstStyle/>
-          <a:p>
-            <a:pPr indent="0" marL="0">
-              <a:buNone/>
-            </a:pPr>
-            <a:r>
-              <a:rPr lang="en-US" sz="1600" dirty="0">
-                <a:solidFill>
-                  <a:srgbClr val="213746"/>
-                </a:solidFill>
-                <a:latin typeface="Aptos" pitchFamily="34" charset="0"/>
-                <a:ea typeface="Aptos" pitchFamily="34" charset="-122"/>
-                <a:cs typeface="Aptos" pitchFamily="34" charset="-120"/>
-              </a:rPr>
-              <a:t>Prioritering av fordon för kontroll</a:t>
-            </a:r>
-            <a:endParaRPr lang="en-US" sz="1600" dirty="0"/>
-          </a:p>
-        </p:txBody>
-      </p:sp>
-      <p:sp>
-        <p:nvSpPr>
-          <p:cNvPr id="19" name="Shape 17"/>
-          <p:cNvSpPr/>
-          <p:nvPr/>
-        </p:nvSpPr>
-        <p:spPr>
-          <a:xfrm>
-            <a:off x="6108192" y="1920240"/>
-            <a:ext cx="5477256" cy="3648456"/>
-          </a:xfrm>
-          <a:prstGeom prst="roundRect">
-            <a:avLst>
-              <a:gd name="adj" fmla="val 3008"/>
-            </a:avLst>
-          </a:prstGeom>
-          <a:solidFill>
-            <a:srgbClr val="FFFFFF"/>
-          </a:solidFill>
-          <a:ln w="8890">
-            <a:solidFill>
-              <a:srgbClr val="DDE8E7"/>
-            </a:solidFill>
-            <a:prstDash val="solid"/>
-          </a:ln>
-        </p:spPr>
-      </p:sp>
-      <p:sp>
-        <p:nvSpPr>
-          <p:cNvPr id="20" name="Text 18"/>
-          <p:cNvSpPr/>
-          <p:nvPr/>
-        </p:nvSpPr>
-        <p:spPr>
-          <a:xfrm>
-            <a:off x="6409944" y="2258568"/>
-            <a:ext cx="4663440" cy="246888"/>
-          </a:xfrm>
-          <a:prstGeom prst="rect">
-            <a:avLst/>
-          </a:prstGeom>
-          <a:noFill/>
-          <a:ln/>
-        </p:spPr>
-        <p:txBody>
-          <a:bodyPr wrap="square" lIns="0" tIns="0" rIns="0" bIns="0" rtlCol="0" anchor="ctr">
-            <a:normAutofit/>
-          </a:bodyPr>
-          <a:lstStyle/>
-          <a:p>
-            <a:pPr indent="0" marL="0">
-              <a:buNone/>
-            </a:pPr>
-            <a:r>
-              <a:rPr lang="en-US" sz="1300" b="1" dirty="0">
-                <a:solidFill>
-                  <a:srgbClr val="BB685E"/>
-                </a:solidFill>
-                <a:latin typeface="Aptos" pitchFamily="34" charset="0"/>
-                <a:ea typeface="Aptos" pitchFamily="34" charset="-122"/>
-                <a:cs typeface="Aptos" pitchFamily="34" charset="-120"/>
-              </a:rPr>
-              <a:t>DET VI INTE VET ÄN</a:t>
-            </a:r>
-            <a:endParaRPr lang="en-US" sz="1300" dirty="0"/>
-          </a:p>
-        </p:txBody>
-      </p:sp>
-      <p:sp>
-        <p:nvSpPr>
-          <p:cNvPr id="21" name="Shape 19"/>
-          <p:cNvSpPr/>
-          <p:nvPr/>
-        </p:nvSpPr>
-        <p:spPr>
-          <a:xfrm>
-            <a:off x="6428232" y="2912364"/>
-            <a:ext cx="82296" cy="82296"/>
-          </a:xfrm>
-          <a:prstGeom prst="ellipse">
-            <a:avLst/>
-          </a:prstGeom>
-          <a:solidFill>
-            <a:srgbClr val="177C78"/>
-          </a:solidFill>
-          <a:ln w="12700">
-            <a:solidFill>
-              <a:srgbClr val="177C78"/>
-            </a:solidFill>
-            <a:prstDash val="solid"/>
-          </a:ln>
-        </p:spPr>
-      </p:sp>
-      <p:sp>
-        <p:nvSpPr>
-          <p:cNvPr id="22" name="Text 20"/>
-          <p:cNvSpPr/>
-          <p:nvPr/>
-        </p:nvSpPr>
-        <p:spPr>
-          <a:xfrm>
-            <a:off x="6638544" y="2816352"/>
-            <a:ext cx="4498848" cy="493776"/>
-          </a:xfrm>
-          <a:prstGeom prst="rect">
-            <a:avLst/>
-          </a:prstGeom>
-          <a:noFill/>
-          <a:ln/>
-        </p:spPr>
-        <p:txBody>
-          <a:bodyPr wrap="square" lIns="0" tIns="0" rIns="0" bIns="0" rtlCol="0" anchor="ctr">
-            <a:normAutofit/>
-          </a:bodyPr>
-          <a:lstStyle/>
-          <a:p>
-            <a:pPr indent="0" marL="0">
-              <a:buNone/>
-            </a:pPr>
-            <a:r>
-              <a:rPr lang="en-US" sz="1550" dirty="0">
-                <a:solidFill>
-                  <a:srgbClr val="213746"/>
-                </a:solidFill>
-                <a:latin typeface="Aptos" pitchFamily="34" charset="0"/>
-                <a:ea typeface="Aptos" pitchFamily="34" charset="-122"/>
-                <a:cs typeface="Aptos" pitchFamily="34" charset="-120"/>
-              </a:rPr>
-              <a:t>15 APS-fel missas fortfarande</a:t>
-            </a:r>
-            <a:endParaRPr lang="en-US" sz="1550" dirty="0"/>
-          </a:p>
-        </p:txBody>
-      </p:sp>
-      <p:sp>
-        <p:nvSpPr>
-          <p:cNvPr id="23" name="Shape 21"/>
-          <p:cNvSpPr/>
-          <p:nvPr/>
-        </p:nvSpPr>
-        <p:spPr>
-          <a:xfrm>
-            <a:off x="6428232" y="3479292"/>
-            <a:ext cx="82296" cy="82296"/>
-          </a:xfrm>
-          <a:prstGeom prst="ellipse">
-            <a:avLst/>
-          </a:prstGeom>
-          <a:solidFill>
-            <a:srgbClr val="177C78"/>
-          </a:solidFill>
-          <a:ln w="12700">
-            <a:solidFill>
-              <a:srgbClr val="177C78"/>
-            </a:solidFill>
-            <a:prstDash val="solid"/>
-          </a:ln>
-        </p:spPr>
-      </p:sp>
-      <p:sp>
-        <p:nvSpPr>
-          <p:cNvPr id="24" name="Text 22"/>
-          <p:cNvSpPr/>
-          <p:nvPr/>
-        </p:nvSpPr>
-        <p:spPr>
-          <a:xfrm>
-            <a:off x="6638544" y="3383280"/>
-            <a:ext cx="4498848" cy="493776"/>
-          </a:xfrm>
-          <a:prstGeom prst="rect">
-            <a:avLst/>
-          </a:prstGeom>
-          <a:noFill/>
-          <a:ln/>
-        </p:spPr>
-        <p:txBody>
-          <a:bodyPr wrap="square" lIns="0" tIns="0" rIns="0" bIns="0" rtlCol="0" anchor="ctr">
-            <a:normAutofit/>
-          </a:bodyPr>
-          <a:lstStyle/>
-          <a:p>
-            <a:pPr indent="0" marL="0">
-              <a:buNone/>
-            </a:pPr>
-            <a:r>
-              <a:rPr lang="en-US" sz="1550" dirty="0">
-                <a:solidFill>
-                  <a:srgbClr val="213746"/>
-                </a:solidFill>
-                <a:latin typeface="Aptos" pitchFamily="34" charset="0"/>
-                <a:ea typeface="Aptos" pitchFamily="34" charset="-122"/>
-                <a:cs typeface="Aptos" pitchFamily="34" charset="-120"/>
-              </a:rPr>
-              <a:t>335 falsklarm kräver hantering</a:t>
-            </a:r>
-            <a:endParaRPr lang="en-US" sz="1550" dirty="0"/>
-          </a:p>
-        </p:txBody>
-      </p:sp>
-      <p:sp>
-        <p:nvSpPr>
-          <p:cNvPr id="25" name="Shape 23"/>
-          <p:cNvSpPr/>
-          <p:nvPr/>
-        </p:nvSpPr>
-        <p:spPr>
-          <a:xfrm>
-            <a:off x="6428232" y="4046220"/>
-            <a:ext cx="82296" cy="82296"/>
-          </a:xfrm>
-          <a:prstGeom prst="ellipse">
-            <a:avLst/>
-          </a:prstGeom>
-          <a:solidFill>
-            <a:srgbClr val="177C78"/>
-          </a:solidFill>
-          <a:ln w="12700">
-            <a:solidFill>
-              <a:srgbClr val="177C78"/>
-            </a:solidFill>
-            <a:prstDash val="solid"/>
-          </a:ln>
-        </p:spPr>
-      </p:sp>
-      <p:sp>
-        <p:nvSpPr>
-          <p:cNvPr id="26" name="Text 24"/>
-          <p:cNvSpPr/>
-          <p:nvPr/>
-        </p:nvSpPr>
-        <p:spPr>
-          <a:xfrm>
-            <a:off x="6638544" y="3950208"/>
-            <a:ext cx="4498848" cy="493776"/>
-          </a:xfrm>
-          <a:prstGeom prst="rect">
-            <a:avLst/>
-          </a:prstGeom>
-          <a:noFill/>
-          <a:ln/>
-        </p:spPr>
-        <p:txBody>
-          <a:bodyPr wrap="square" lIns="0" tIns="0" rIns="0" bIns="0" rtlCol="0" anchor="ctr">
-            <a:normAutofit/>
-          </a:bodyPr>
-          <a:lstStyle/>
-          <a:p>
-            <a:pPr indent="0" marL="0">
-              <a:buNone/>
-            </a:pPr>
-            <a:r>
-              <a:rPr lang="en-US" sz="1550" dirty="0">
-                <a:solidFill>
-                  <a:srgbClr val="213746"/>
-                </a:solidFill>
-                <a:latin typeface="Aptos" pitchFamily="34" charset="0"/>
-                <a:ea typeface="Aptos" pitchFamily="34" charset="-122"/>
-                <a:cs typeface="Aptos" pitchFamily="34" charset="-120"/>
-              </a:rPr>
-              <a:t>Anonymiserade variabler försvårar tolkning</a:t>
-            </a:r>
-            <a:endParaRPr lang="en-US" sz="1550" dirty="0"/>
-          </a:p>
-        </p:txBody>
-      </p:sp>
-      <p:sp>
-        <p:nvSpPr>
-          <p:cNvPr id="27" name="Shape 25"/>
-          <p:cNvSpPr/>
-          <p:nvPr/>
-        </p:nvSpPr>
-        <p:spPr>
-          <a:xfrm>
-            <a:off x="6428232" y="4613148"/>
-            <a:ext cx="82296" cy="82296"/>
-          </a:xfrm>
-          <a:prstGeom prst="ellipse">
-            <a:avLst/>
-          </a:prstGeom>
-          <a:solidFill>
-            <a:srgbClr val="177C78"/>
-          </a:solidFill>
-          <a:ln w="12700">
-            <a:solidFill>
-              <a:srgbClr val="177C78"/>
-            </a:solidFill>
-            <a:prstDash val="solid"/>
-          </a:ln>
-        </p:spPr>
-      </p:sp>
-      <p:sp>
-        <p:nvSpPr>
-          <p:cNvPr id="28" name="Text 26"/>
-          <p:cNvSpPr/>
-          <p:nvPr/>
-        </p:nvSpPr>
-        <p:spPr>
-          <a:xfrm>
-            <a:off x="6638544" y="4517136"/>
-            <a:ext cx="4498848" cy="493776"/>
-          </a:xfrm>
-          <a:prstGeom prst="rect">
-            <a:avLst/>
-          </a:prstGeom>
-          <a:noFill/>
-          <a:ln/>
-        </p:spPr>
-        <p:txBody>
-          <a:bodyPr wrap="square" lIns="0" tIns="0" rIns="0" bIns="0" rtlCol="0" anchor="ctr">
-            <a:normAutofit/>
-          </a:bodyPr>
-          <a:lstStyle/>
-          <a:p>
-            <a:pPr indent="0" marL="0">
-              <a:buNone/>
-            </a:pPr>
-            <a:r>
-              <a:rPr lang="en-US" sz="1550" dirty="0">
-                <a:solidFill>
-                  <a:srgbClr val="213746"/>
-                </a:solidFill>
-                <a:latin typeface="Aptos" pitchFamily="34" charset="0"/>
-                <a:ea typeface="Aptos" pitchFamily="34" charset="-122"/>
-                <a:cs typeface="Aptos" pitchFamily="34" charset="-120"/>
-              </a:rPr>
-              <a:t>Historisk testdata ≠ verklig drift</a:t>
-            </a:r>
-            <a:endParaRPr lang="en-US" sz="1550" dirty="0"/>
-          </a:p>
-        </p:txBody>
-      </p:sp>
-      <p:sp>
-        <p:nvSpPr>
-          <p:cNvPr id="29" name="Shape 27"/>
-          <p:cNvSpPr/>
-          <p:nvPr/>
-        </p:nvSpPr>
-        <p:spPr>
-          <a:xfrm>
-            <a:off x="594360" y="5760720"/>
-            <a:ext cx="10981944" cy="429768"/>
-          </a:xfrm>
-          <a:prstGeom prst="roundRect">
-            <a:avLst>
-              <a:gd name="adj" fmla="val 19149"/>
-            </a:avLst>
-          </a:prstGeom>
-          <a:solidFill>
-            <a:srgbClr val="E7F3F0"/>
-          </a:solidFill>
-          <a:ln w="12700">
-            <a:solidFill>
-              <a:srgbClr val="E7F3F0"/>
-            </a:solidFill>
-            <a:prstDash val="solid"/>
-          </a:ln>
-        </p:spPr>
-      </p:sp>
-      <p:sp>
-        <p:nvSpPr>
-          <p:cNvPr id="30" name="Text 28"/>
-          <p:cNvSpPr/>
-          <p:nvPr/>
-        </p:nvSpPr>
-        <p:spPr>
-          <a:xfrm>
-            <a:off x="850392" y="5852160"/>
-            <a:ext cx="10469880" cy="201168"/>
-          </a:xfrm>
-          <a:prstGeom prst="rect">
-            <a:avLst/>
-          </a:prstGeom>
-          <a:noFill/>
-          <a:ln/>
-        </p:spPr>
-        <p:txBody>
-          <a:bodyPr wrap="square" lIns="0" tIns="0" rIns="0" bIns="0" rtlCol="0" anchor="ctr">
-            <a:normAutofit/>
-          </a:bodyPr>
-          <a:lstStyle/>
-          <a:p>
-            <a:pPr indent="0" marL="0">
-              <a:buNone/>
-            </a:pPr>
-            <a:r>
-              <a:rPr lang="en-US" sz="1340" b="1" dirty="0">
-                <a:solidFill>
-                  <a:srgbClr val="177C78"/>
-                </a:solidFill>
-                <a:latin typeface="Aptos" pitchFamily="34" charset="0"/>
-                <a:ea typeface="Aptos" pitchFamily="34" charset="-122"/>
-                <a:cs typeface="Aptos" pitchFamily="34" charset="-120"/>
-              </a:rPr>
-              <a:t>NÄSTA STEG   ·   Testa på nya fordonsdata och pröva kostnadsantaganden i underhållsverksamheten</a:t>
-            </a:r>
-            <a:endParaRPr lang="en-US" sz="1340" dirty="0"/>
           </a:p>
         </p:txBody>
       </p:sp>
@@ -9887,4 +11208,319 @@
     </a:ext>
   </a:extLst>
 </a:theme>
+</file>
+
+<file path=ppt/theme/theme2.xml><?xml version="1.0" encoding="utf-8"?>
+<a:theme xmlns:a="http://schemas.openxmlformats.org/drawingml/2006/main" name="Office Theme">
+  <a:themeElements>
+    <a:clrScheme name="Office">
+      <a:dk1>
+        <a:sysClr val="windowText" lastClr="000000"/>
+      </a:dk1>
+      <a:lt1>
+        <a:sysClr val="window" lastClr="FFFFFF"/>
+      </a:lt1>
+      <a:dk2>
+        <a:srgbClr val="0E2841"/>
+      </a:dk2>
+      <a:lt2>
+        <a:srgbClr val="E8E8E8"/>
+      </a:lt2>
+      <a:accent1>
+        <a:srgbClr val="156082"/>
+      </a:accent1>
+      <a:accent2>
+        <a:srgbClr val="E97132"/>
+      </a:accent2>
+      <a:accent3>
+        <a:srgbClr val="196B24"/>
+      </a:accent3>
+      <a:accent4>
+        <a:srgbClr val="0F9ED5"/>
+      </a:accent4>
+      <a:accent5>
+        <a:srgbClr val="A02B93"/>
+      </a:accent5>
+      <a:accent6>
+        <a:srgbClr val="4EA72E"/>
+      </a:accent6>
+      <a:hlink>
+        <a:srgbClr val="467886"/>
+      </a:hlink>
+      <a:folHlink>
+        <a:srgbClr val="96607D"/>
+      </a:folHlink>
+    </a:clrScheme>
+    <a:fontScheme name="Office">
+      <a:majorFont>
+        <a:latin typeface="Aptos Display" panose="02110004020202020204"/>
+        <a:ea typeface=""/>
+        <a:cs typeface=""/>
+        <a:font script="Jpan" typeface="游ゴシック Light"/>
+        <a:font script="Hang" typeface="맑은 고딕"/>
+        <a:font script="Hans" typeface="等线 Light"/>
+        <a:font script="Hant" typeface="新細明體"/>
+        <a:font script="Arab" typeface="Times New Roman"/>
+        <a:font script="Hebr" typeface="Times New Roman"/>
+        <a:font script="Thai" typeface="Angsana New"/>
+        <a:font script="Ethi" typeface="Nyala"/>
+        <a:font script="Beng" typeface="Vrinda"/>
+        <a:font script="Gujr" typeface="Shruti"/>
+        <a:font script="Khmr" typeface="MoolBoran"/>
+        <a:font script="Knda" typeface="Tunga"/>
+        <a:font script="Guru" typeface="Raavi"/>
+        <a:font script="Cans" typeface="Euphemia"/>
+        <a:font script="Cher" typeface="Plantagenet Cherokee"/>
+        <a:font script="Yiii" typeface="Microsoft Yi Baiti"/>
+        <a:font script="Tibt" typeface="Microsoft Himalaya"/>
+        <a:font script="Thaa" typeface="MV Boli"/>
+        <a:font script="Deva" typeface="Mangal"/>
+        <a:font script="Telu" typeface="Gautami"/>
+        <a:font script="Taml" typeface="Latha"/>
+        <a:font script="Syrc" typeface="Estrangelo Edessa"/>
+        <a:font script="Orya" typeface="Kalinga"/>
+        <a:font script="Mlym" typeface="Kartika"/>
+        <a:font script="Laoo" typeface="DokChampa"/>
+        <a:font script="Sinh" typeface="Iskoola Pota"/>
+        <a:font script="Mong" typeface="Mongolian Baiti"/>
+        <a:font script="Viet" typeface="Times New Roman"/>
+        <a:font script="Uigh" typeface="Microsoft Uighur"/>
+        <a:font script="Geor" typeface="Sylfaen"/>
+        <a:font script="Armn" typeface="Arial"/>
+        <a:font script="Bugi" typeface="Leelawadee UI"/>
+        <a:font script="Bopo" typeface="Microsoft JhengHei"/>
+        <a:font script="Java" typeface="Javanese Text"/>
+        <a:font script="Lisu" typeface="Segoe UI"/>
+        <a:font script="Mymr" typeface="Myanmar Text"/>
+        <a:font script="Nkoo" typeface="Ebrima"/>
+        <a:font script="Olck" typeface="Nirmala UI"/>
+        <a:font script="Osma" typeface="Ebrima"/>
+        <a:font script="Phag" typeface="Phagspa"/>
+        <a:font script="Syrn" typeface="Estrangelo Edessa"/>
+        <a:font script="Syrj" typeface="Estrangelo Edessa"/>
+        <a:font script="Syre" typeface="Estrangelo Edessa"/>
+        <a:font script="Sora" typeface="Nirmala UI"/>
+        <a:font script="Tale" typeface="Microsoft Tai Le"/>
+        <a:font script="Talu" typeface="Microsoft New Tai Lue"/>
+        <a:font script="Tfng" typeface="Ebrima"/>
+      </a:majorFont>
+      <a:minorFont>
+        <a:latin typeface="Aptos" panose="02110004020202020204"/>
+        <a:ea typeface=""/>
+        <a:cs typeface=""/>
+        <a:font script="Jpan" typeface="游ゴシック"/>
+        <a:font script="Hang" typeface="맑은 고딕"/>
+        <a:font script="Hans" typeface="等线"/>
+        <a:font script="Hant" typeface="新細明體"/>
+        <a:font script="Arab" typeface="Arial"/>
+        <a:font script="Hebr" typeface="Arial"/>
+        <a:font script="Thai" typeface="Cordia New"/>
+        <a:font script="Ethi" typeface="Nyala"/>
+        <a:font script="Beng" typeface="Vrinda"/>
+        <a:font script="Gujr" typeface="Shruti"/>
+        <a:font script="Khmr" typeface="DaunPenh"/>
+        <a:font script="Knda" typeface="Tunga"/>
+        <a:font script="Guru" typeface="Raavi"/>
+        <a:font script="Cans" typeface="Euphemia"/>
+        <a:font script="Cher" typeface="Plantagenet Cherokee"/>
+        <a:font script="Yiii" typeface="Microsoft Yi Baiti"/>
+        <a:font script="Tibt" typeface="Microsoft Himalaya"/>
+        <a:font script="Thaa" typeface="MV Boli"/>
+        <a:font script="Deva" typeface="Mangal"/>
+        <a:font script="Telu" typeface="Gautami"/>
+        <a:font script="Taml" typeface="Latha"/>
+        <a:font script="Syrc" typeface="Estrangelo Edessa"/>
+        <a:font script="Orya" typeface="Kalinga"/>
+        <a:font script="Mlym" typeface="Kartika"/>
+        <a:font script="Laoo" typeface="DokChampa"/>
+        <a:font script="Sinh" typeface="Iskoola Pota"/>
+        <a:font script="Mong" typeface="Mongolian Baiti"/>
+        <a:font script="Viet" typeface="Arial"/>
+        <a:font script="Uigh" typeface="Microsoft Uighur"/>
+        <a:font script="Geor" typeface="Sylfaen"/>
+        <a:font script="Armn" typeface="Arial"/>
+        <a:font script="Bugi" typeface="Leelawadee UI"/>
+        <a:font script="Bopo" typeface="Microsoft JhengHei"/>
+        <a:font script="Java" typeface="Javanese Text"/>
+        <a:font script="Lisu" typeface="Segoe UI"/>
+        <a:font script="Mymr" typeface="Myanmar Text"/>
+        <a:font script="Nkoo" typeface="Ebrima"/>
+        <a:font script="Olck" typeface="Nirmala UI"/>
+        <a:font script="Osma" typeface="Ebrima"/>
+        <a:font script="Phag" typeface="Phagspa"/>
+        <a:font script="Syrn" typeface="Estrangelo Edessa"/>
+        <a:font script="Syrj" typeface="Estrangelo Edessa"/>
+        <a:font script="Syre" typeface="Estrangelo Edessa"/>
+        <a:font script="Sora" typeface="Nirmala UI"/>
+        <a:font script="Tale" typeface="Microsoft Tai Le"/>
+        <a:font script="Talu" typeface="Microsoft New Tai Lue"/>
+        <a:font script="Tfng" typeface="Ebrima"/>
+      </a:minorFont>
+    </a:fontScheme>
+    <a:fmtScheme name="Office">
+      <a:fillStyleLst>
+        <a:solidFill>
+          <a:schemeClr val="phClr"/>
+        </a:solidFill>
+        <a:gradFill rotWithShape="1">
+          <a:gsLst>
+            <a:gs pos="0">
+              <a:schemeClr val="phClr">
+                <a:lumMod val="110000"/>
+                <a:satMod val="105000"/>
+                <a:tint val="67000"/>
+              </a:schemeClr>
+            </a:gs>
+            <a:gs pos="50000">
+              <a:schemeClr val="phClr">
+                <a:lumMod val="105000"/>
+                <a:satMod val="103000"/>
+                <a:tint val="73000"/>
+              </a:schemeClr>
+            </a:gs>
+            <a:gs pos="100000">
+              <a:schemeClr val="phClr">
+                <a:lumMod val="105000"/>
+                <a:satMod val="109000"/>
+                <a:tint val="81000"/>
+              </a:schemeClr>
+            </a:gs>
+          </a:gsLst>
+          <a:lin ang="5400000" scaled="0"/>
+        </a:gradFill>
+        <a:gradFill rotWithShape="1">
+          <a:gsLst>
+            <a:gs pos="0">
+              <a:schemeClr val="phClr">
+                <a:satMod val="103000"/>
+                <a:lumMod val="102000"/>
+                <a:tint val="94000"/>
+              </a:schemeClr>
+            </a:gs>
+            <a:gs pos="50000">
+              <a:schemeClr val="phClr">
+                <a:satMod val="110000"/>
+                <a:lumMod val="100000"/>
+                <a:shade val="100000"/>
+              </a:schemeClr>
+            </a:gs>
+            <a:gs pos="100000">
+              <a:schemeClr val="phClr">
+                <a:lumMod val="99000"/>
+                <a:satMod val="120000"/>
+                <a:shade val="78000"/>
+              </a:schemeClr>
+            </a:gs>
+          </a:gsLst>
+          <a:lin ang="5400000" scaled="0"/>
+        </a:gradFill>
+      </a:fillStyleLst>
+      <a:lnStyleLst>
+        <a:ln w="12700" cap="flat" cmpd="sng" algn="ctr">
+          <a:solidFill>
+            <a:schemeClr val="phClr"/>
+          </a:solidFill>
+          <a:prstDash val="solid"/>
+          <a:miter lim="800000"/>
+        </a:ln>
+        <a:ln w="19050" cap="flat" cmpd="sng" algn="ctr">
+          <a:solidFill>
+            <a:schemeClr val="phClr"/>
+          </a:solidFill>
+          <a:prstDash val="solid"/>
+          <a:miter lim="800000"/>
+        </a:ln>
+        <a:ln w="25400" cap="flat" cmpd="sng" algn="ctr">
+          <a:solidFill>
+            <a:schemeClr val="phClr"/>
+          </a:solidFill>
+          <a:prstDash val="solid"/>
+          <a:miter lim="800000"/>
+        </a:ln>
+      </a:lnStyleLst>
+      <a:effectStyleLst>
+        <a:effectStyle>
+          <a:effectLst/>
+        </a:effectStyle>
+        <a:effectStyle>
+          <a:effectLst/>
+        </a:effectStyle>
+        <a:effectStyle>
+          <a:effectLst>
+            <a:outerShdw blurRad="57150" dist="19050" dir="5400000" algn="ctr" rotWithShape="0">
+              <a:srgbClr val="000000">
+                <a:alpha val="63000"/>
+              </a:srgbClr>
+            </a:outerShdw>
+          </a:effectLst>
+        </a:effectStyle>
+      </a:effectStyleLst>
+      <a:bgFillStyleLst>
+        <a:solidFill>
+          <a:schemeClr val="phClr"/>
+        </a:solidFill>
+        <a:solidFill>
+          <a:schemeClr val="phClr">
+            <a:tint val="95000"/>
+            <a:satMod val="170000"/>
+          </a:schemeClr>
+        </a:solidFill>
+        <a:gradFill rotWithShape="1">
+          <a:gsLst>
+            <a:gs pos="0">
+              <a:schemeClr val="phClr">
+                <a:tint val="93000"/>
+                <a:satMod val="150000"/>
+                <a:shade val="98000"/>
+                <a:lumMod val="102000"/>
+              </a:schemeClr>
+            </a:gs>
+            <a:gs pos="50000">
+              <a:schemeClr val="phClr">
+                <a:tint val="98000"/>
+                <a:satMod val="130000"/>
+                <a:shade val="90000"/>
+                <a:lumMod val="103000"/>
+              </a:schemeClr>
+            </a:gs>
+            <a:gs pos="100000">
+              <a:schemeClr val="phClr">
+                <a:shade val="63000"/>
+                <a:satMod val="120000"/>
+              </a:schemeClr>
+            </a:gs>
+          </a:gsLst>
+          <a:lin ang="5400000" scaled="0"/>
+        </a:gradFill>
+      </a:bgFillStyleLst>
+    </a:fmtScheme>
+  </a:themeElements>
+  <a:objectDefaults>
+    <a:lnDef>
+      <a:spPr/>
+      <a:bodyPr/>
+      <a:lstStyle/>
+      <a:style>
+        <a:lnRef idx="2">
+          <a:schemeClr val="accent1"/>
+        </a:lnRef>
+        <a:fillRef idx="0">
+          <a:schemeClr val="accent1"/>
+        </a:fillRef>
+        <a:effectRef idx="1">
+          <a:schemeClr val="accent1"/>
+        </a:effectRef>
+        <a:fontRef idx="minor">
+          <a:schemeClr val="tx1"/>
+        </a:fontRef>
+      </a:style>
+    </a:lnDef>
+  </a:objectDefaults>
+  <a:extraClrSchemeLst/>
+  <a:extLst>
+    <a:ext uri="{05A4C25C-085E-4340-85A3-A5531E510DB2}">
+      <thm15:themeFamily xmlns:thm15="http://schemas.microsoft.com/office/thememl/2012/main" name="Office Theme" id="{2E142A2C-CD16-42D6-873A-C26D2A0506FA}" vid="{1BDDFF52-6CD6-40A5-AB3C-68EB2F1E4D0A}"/>
+    </a:ext>
+  </a:extLst>
+</a:theme>
 </file>
--- a/presentation/Scania APS Gruppresentation.pptx
+++ b/presentation/Scania APS Gruppresentation.pptx
@@ -5513,8 +5513,8 @@
         </p:nvSpPr>
         <p:spPr>
           <a:xfrm>
-            <a:off x="566928" y="1901952"/>
-            <a:ext cx="5513832" cy="3630168"/>
+            <a:off x="557784" y="2657474"/>
+            <a:ext cx="3990785" cy="2892933"/>
           </a:xfrm>
           <a:prstGeom prst="roundRect">
             <a:avLst>
@@ -5547,8 +5547,8 @@
         </p:nvSpPr>
         <p:spPr>
           <a:xfrm>
-            <a:off x="868680" y="2194560"/>
-            <a:ext cx="4919472" cy="219456"/>
+            <a:off x="816427" y="2282528"/>
+            <a:ext cx="3632129" cy="196933"/>
           </a:xfrm>
           <a:prstGeom prst="rect">
             <a:avLst/>
@@ -5588,8 +5588,8 @@
         </p:nvSpPr>
         <p:spPr>
           <a:xfrm>
-            <a:off x="914400" y="2688336"/>
-            <a:ext cx="4709160" cy="438912"/>
+            <a:off x="741884" y="3126573"/>
+            <a:ext cx="3476852" cy="393866"/>
           </a:xfrm>
           <a:prstGeom prst="roundRect">
             <a:avLst>
@@ -5622,18 +5622,18 @@
         </p:nvSpPr>
         <p:spPr>
           <a:xfrm>
-            <a:off x="1088136" y="2779776"/>
-            <a:ext cx="4389120" cy="210312"/>
-          </a:xfrm>
-          <a:prstGeom prst="rect">
-            <a:avLst/>
-          </a:prstGeom>
-          <a:noFill/>
-          <a:ln/>
-        </p:spPr>
-        <p:txBody>
-          <a:bodyPr wrap="square" lIns="0" tIns="0" rIns="0" bIns="0" rtlCol="0" anchor="ctr">
-            <a:normAutofit lnSpcReduction="10000"/>
+            <a:off x="915620" y="3194551"/>
+            <a:ext cx="3240561" cy="188727"/>
+          </a:xfrm>
+          <a:prstGeom prst="rect">
+            <a:avLst/>
+          </a:prstGeom>
+          <a:noFill/>
+          <a:ln/>
+        </p:spPr>
+        <p:txBody>
+          <a:bodyPr wrap="square" lIns="0" tIns="0" rIns="0" bIns="0" rtlCol="0" anchor="ctr">
+            <a:normAutofit fontScale="92500" lnSpcReduction="20000"/>
           </a:bodyPr>
           <a:lstStyle/>
           <a:p>
@@ -5663,8 +5663,8 @@
         </p:nvSpPr>
         <p:spPr>
           <a:xfrm>
-            <a:off x="914400" y="3264408"/>
-            <a:ext cx="4709160" cy="438912"/>
+            <a:off x="741884" y="3702645"/>
+            <a:ext cx="3476852" cy="393866"/>
           </a:xfrm>
           <a:prstGeom prst="roundRect">
             <a:avLst>
@@ -5697,18 +5697,18 @@
         </p:nvSpPr>
         <p:spPr>
           <a:xfrm>
-            <a:off x="1088136" y="3355848"/>
-            <a:ext cx="4389120" cy="210312"/>
-          </a:xfrm>
-          <a:prstGeom prst="rect">
-            <a:avLst/>
-          </a:prstGeom>
-          <a:noFill/>
-          <a:ln/>
-        </p:spPr>
-        <p:txBody>
-          <a:bodyPr wrap="square" lIns="0" tIns="0" rIns="0" bIns="0" rtlCol="0" anchor="ctr">
-            <a:normAutofit lnSpcReduction="10000"/>
+            <a:off x="915620" y="3770623"/>
+            <a:ext cx="3240561" cy="188727"/>
+          </a:xfrm>
+          <a:prstGeom prst="rect">
+            <a:avLst/>
+          </a:prstGeom>
+          <a:noFill/>
+          <a:ln/>
+        </p:spPr>
+        <p:txBody>
+          <a:bodyPr wrap="square" lIns="0" tIns="0" rIns="0" bIns="0" rtlCol="0" anchor="ctr">
+            <a:normAutofit fontScale="92500" lnSpcReduction="20000"/>
           </a:bodyPr>
           <a:lstStyle/>
           <a:p>
@@ -5738,8 +5738,8 @@
         </p:nvSpPr>
         <p:spPr>
           <a:xfrm>
-            <a:off x="914400" y="3840480"/>
-            <a:ext cx="4709160" cy="438912"/>
+            <a:off x="741884" y="4278717"/>
+            <a:ext cx="3476852" cy="393866"/>
           </a:xfrm>
           <a:prstGeom prst="roundRect">
             <a:avLst>
@@ -5772,18 +5772,18 @@
         </p:nvSpPr>
         <p:spPr>
           <a:xfrm>
-            <a:off x="1088136" y="3931920"/>
-            <a:ext cx="4389120" cy="210312"/>
-          </a:xfrm>
-          <a:prstGeom prst="rect">
-            <a:avLst/>
-          </a:prstGeom>
-          <a:noFill/>
-          <a:ln/>
-        </p:spPr>
-        <p:txBody>
-          <a:bodyPr wrap="square" lIns="0" tIns="0" rIns="0" bIns="0" rtlCol="0" anchor="ctr">
-            <a:normAutofit lnSpcReduction="10000"/>
+            <a:off x="915620" y="4346695"/>
+            <a:ext cx="3240561" cy="188727"/>
+          </a:xfrm>
+          <a:prstGeom prst="rect">
+            <a:avLst/>
+          </a:prstGeom>
+          <a:noFill/>
+          <a:ln/>
+        </p:spPr>
+        <p:txBody>
+          <a:bodyPr wrap="square" lIns="0" tIns="0" rIns="0" bIns="0" rtlCol="0" anchor="ctr">
+            <a:normAutofit fontScale="92500" lnSpcReduction="20000"/>
           </a:bodyPr>
           <a:lstStyle/>
           <a:p>
@@ -5813,8 +5813,8 @@
         </p:nvSpPr>
         <p:spPr>
           <a:xfrm>
-            <a:off x="914400" y="4416552"/>
-            <a:ext cx="4709160" cy="438912"/>
+            <a:off x="741884" y="4854789"/>
+            <a:ext cx="3476852" cy="393866"/>
           </a:xfrm>
           <a:prstGeom prst="roundRect">
             <a:avLst>
@@ -5847,18 +5847,18 @@
         </p:nvSpPr>
         <p:spPr>
           <a:xfrm>
-            <a:off x="1088136" y="4507992"/>
-            <a:ext cx="4389120" cy="210312"/>
-          </a:xfrm>
-          <a:prstGeom prst="rect">
-            <a:avLst/>
-          </a:prstGeom>
-          <a:noFill/>
-          <a:ln/>
-        </p:spPr>
-        <p:txBody>
-          <a:bodyPr wrap="square" lIns="0" tIns="0" rIns="0" bIns="0" rtlCol="0" anchor="ctr">
-            <a:normAutofit lnSpcReduction="10000"/>
+            <a:off x="915620" y="4922767"/>
+            <a:ext cx="3240561" cy="188727"/>
+          </a:xfrm>
+          <a:prstGeom prst="rect">
+            <a:avLst/>
+          </a:prstGeom>
+          <a:noFill/>
+          <a:ln/>
+        </p:spPr>
+        <p:txBody>
+          <a:bodyPr wrap="square" lIns="0" tIns="0" rIns="0" bIns="0" rtlCol="0" anchor="ctr">
+            <a:normAutofit fontScale="92500" lnSpcReduction="20000"/>
           </a:bodyPr>
           <a:lstStyle/>
           <a:p>
@@ -5882,26 +5882,160 @@
       </p:sp>
       <p:sp>
         <p:nvSpPr>
-          <p:cNvPr id="19" name="Shape 17"/>
-          <p:cNvSpPr/>
-          <p:nvPr/>
-        </p:nvSpPr>
-        <p:spPr>
-          <a:xfrm>
-            <a:off x="6309360" y="1901952"/>
-            <a:ext cx="5294376" cy="3630168"/>
+          <p:cNvPr id="30" name="Text 16">
+            <a:extLst>
+              <a:ext uri="{FF2B5EF4-FFF2-40B4-BE49-F238E27FC236}">
+                <a16:creationId xmlns:a16="http://schemas.microsoft.com/office/drawing/2014/main" id="{B93E95E8-D4F5-3C7A-A846-7179A10CCF46}"/>
+              </a:ext>
+            </a:extLst>
+          </p:cNvPr>
+          <p:cNvSpPr/>
+          <p:nvPr/>
+        </p:nvSpPr>
+        <p:spPr>
+          <a:xfrm>
+            <a:off x="5431536" y="2051811"/>
+            <a:ext cx="2148840" cy="329184"/>
+          </a:xfrm>
+          <a:prstGeom prst="rect">
+            <a:avLst/>
+          </a:prstGeom>
+          <a:noFill/>
+          <a:ln/>
+        </p:spPr>
+        <p:txBody>
+          <a:bodyPr wrap="square" lIns="0" tIns="0" rIns="0" bIns="0" rtlCol="0" anchor="ctr"/>
+          <a:lstStyle/>
+          <a:p>
+            <a:pPr marL="0" indent="0">
+              <a:buNone/>
+            </a:pPr>
+            <a:r>
+              <a:rPr lang="en-US" sz="1200" dirty="0">
+                <a:solidFill>
+                  <a:srgbClr val="6E7A80"/>
+                </a:solidFill>
+              </a:rPr>
+              <a:t>recall på intern validering</a:t>
+            </a:r>
+            <a:endParaRPr lang="en-US" sz="1200" dirty="0"/>
+          </a:p>
+        </p:txBody>
+      </p:sp>
+      <p:sp>
+        <p:nvSpPr>
+          <p:cNvPr id="32" name="Text 18">
+            <a:extLst>
+              <a:ext uri="{FF2B5EF4-FFF2-40B4-BE49-F238E27FC236}">
+                <a16:creationId xmlns:a16="http://schemas.microsoft.com/office/drawing/2014/main" id="{8274D94A-81E2-EBF3-B66E-D2ED1143C6CB}"/>
+              </a:ext>
+            </a:extLst>
+          </p:cNvPr>
+          <p:cNvSpPr/>
+          <p:nvPr/>
+        </p:nvSpPr>
+        <p:spPr>
+          <a:xfrm>
+            <a:off x="7703820" y="2026539"/>
+            <a:ext cx="1965960" cy="329184"/>
+          </a:xfrm>
+          <a:prstGeom prst="rect">
+            <a:avLst/>
+          </a:prstGeom>
+          <a:noFill/>
+          <a:ln/>
+        </p:spPr>
+        <p:txBody>
+          <a:bodyPr wrap="square" lIns="0" tIns="0" rIns="0" bIns="0" rtlCol="0" anchor="ctr"/>
+          <a:lstStyle/>
+          <a:p>
+            <a:pPr marL="0" indent="0">
+              <a:buNone/>
+            </a:pPr>
+            <a:r>
+              <a:rPr lang="en-US" sz="1200" dirty="0">
+                <a:solidFill>
+                  <a:srgbClr val="6E7A80"/>
+                </a:solidFill>
+              </a:rPr>
+              <a:t>missade APS-fel (FN)</a:t>
+            </a:r>
+            <a:endParaRPr lang="en-US" sz="1200" dirty="0"/>
+          </a:p>
+        </p:txBody>
+      </p:sp>
+      <p:sp>
+        <p:nvSpPr>
+          <p:cNvPr id="34" name="Text 20">
+            <a:extLst>
+              <a:ext uri="{FF2B5EF4-FFF2-40B4-BE49-F238E27FC236}">
+                <a16:creationId xmlns:a16="http://schemas.microsoft.com/office/drawing/2014/main" id="{A467D61D-C2E0-A220-F7EA-9206785E6DCE}"/>
+              </a:ext>
+            </a:extLst>
+          </p:cNvPr>
+          <p:cNvSpPr/>
+          <p:nvPr/>
+        </p:nvSpPr>
+        <p:spPr>
+          <a:xfrm>
+            <a:off x="9669780" y="2026539"/>
+            <a:ext cx="2240280" cy="329184"/>
+          </a:xfrm>
+          <a:prstGeom prst="rect">
+            <a:avLst/>
+          </a:prstGeom>
+          <a:noFill/>
+          <a:ln/>
+        </p:spPr>
+        <p:txBody>
+          <a:bodyPr wrap="square" lIns="0" tIns="0" rIns="0" bIns="0" rtlCol="0" anchor="ctr"/>
+          <a:lstStyle/>
+          <a:p>
+            <a:pPr marL="0" indent="0">
+              <a:buNone/>
+            </a:pPr>
+            <a:r>
+              <a:rPr lang="en-US" sz="1200" dirty="0">
+                <a:solidFill>
+                  <a:srgbClr val="6E7A80"/>
+                </a:solidFill>
+              </a:rPr>
+              <a:t>felkostnad · FP 364 / FN 16</a:t>
+            </a:r>
+            <a:endParaRPr lang="en-US" sz="1200" dirty="0"/>
+          </a:p>
+        </p:txBody>
+      </p:sp>
+      <p:sp>
+        <p:nvSpPr>
+          <p:cNvPr id="36" name="Shape 21">
+            <a:extLst>
+              <a:ext uri="{FF2B5EF4-FFF2-40B4-BE49-F238E27FC236}">
+                <a16:creationId xmlns:a16="http://schemas.microsoft.com/office/drawing/2014/main" id="{FD08CD52-7A96-5470-597F-EB05BE9A111B}"/>
+              </a:ext>
+            </a:extLst>
+          </p:cNvPr>
+          <p:cNvSpPr/>
+          <p:nvPr/>
+        </p:nvSpPr>
+        <p:spPr>
+          <a:xfrm>
+            <a:off x="4736592" y="2651760"/>
+            <a:ext cx="6888480" cy="2880357"/>
           </a:xfrm>
           <a:prstGeom prst="roundRect">
             <a:avLst>
-              <a:gd name="adj" fmla="val 3023"/>
+              <a:gd name="adj" fmla="val 3404"/>
             </a:avLst>
           </a:prstGeom>
           <a:solidFill>
-            <a:srgbClr val="FFFFFF"/>
+            <a:srgbClr val="FFFFFF">
+              <a:alpha val="92000"/>
+            </a:srgbClr>
           </a:solidFill>
-          <a:ln w="8890">
+          <a:ln w="12700">
             <a:solidFill>
-              <a:srgbClr val="DDE8E7"/>
+              <a:srgbClr val="DDE5E6"/>
             </a:solidFill>
             <a:prstDash val="solid"/>
           </a:ln>
@@ -5910,32 +6044,164 @@
           <a:bodyPr/>
           <a:lstStyle/>
           <a:p>
-            <a:endParaRPr lang="sv-SE"/>
-          </a:p>
-        </p:txBody>
-      </p:sp>
-      <p:sp>
-        <p:nvSpPr>
-          <p:cNvPr id="20" name="Shape 18"/>
-          <p:cNvSpPr/>
-          <p:nvPr/>
-        </p:nvSpPr>
-        <p:spPr>
-          <a:xfrm>
-            <a:off x="6601968" y="2313432"/>
-            <a:ext cx="2221992" cy="1216152"/>
-          </a:xfrm>
-          <a:prstGeom prst="roundRect">
-            <a:avLst>
-              <a:gd name="adj" fmla="val 9023"/>
-            </a:avLst>
+            <a:endParaRPr lang="en-SE" dirty="0"/>
+          </a:p>
+        </p:txBody>
+      </p:sp>
+      <p:sp>
+        <p:nvSpPr>
+          <p:cNvPr id="38" name="Text 22">
+            <a:extLst>
+              <a:ext uri="{FF2B5EF4-FFF2-40B4-BE49-F238E27FC236}">
+                <a16:creationId xmlns:a16="http://schemas.microsoft.com/office/drawing/2014/main" id="{88DC7868-8819-CF19-978C-9F08A5CC5923}"/>
+              </a:ext>
+            </a:extLst>
+          </p:cNvPr>
+          <p:cNvSpPr/>
+          <p:nvPr/>
+        </p:nvSpPr>
+        <p:spPr>
+          <a:xfrm>
+            <a:off x="5010912" y="2953510"/>
+            <a:ext cx="5120640" cy="237744"/>
+          </a:xfrm>
+          <a:prstGeom prst="rect">
+            <a:avLst/>
+          </a:prstGeom>
+          <a:noFill/>
+          <a:ln/>
+        </p:spPr>
+        <p:txBody>
+          <a:bodyPr wrap="square" lIns="0" tIns="0" rIns="0" bIns="0" rtlCol="0" anchor="ctr"/>
+          <a:lstStyle/>
+          <a:p>
+            <a:pPr marL="0" indent="0">
+              <a:buNone/>
+            </a:pPr>
+            <a:r>
+              <a:rPr lang="en-US" sz="1400" b="1" kern="0" spc="100" dirty="0">
+                <a:solidFill>
+                  <a:srgbClr val="18394A"/>
+                </a:solidFill>
+              </a:rPr>
+              <a:t>VARFÖR DUMMY-MODELLEN INTE RÄCKER</a:t>
+            </a:r>
+            <a:endParaRPr lang="en-US" sz="1400" dirty="0"/>
+          </a:p>
+        </p:txBody>
+      </p:sp>
+      <p:sp>
+        <p:nvSpPr>
+          <p:cNvPr id="40" name="Text 23">
+            <a:extLst>
+              <a:ext uri="{FF2B5EF4-FFF2-40B4-BE49-F238E27FC236}">
+                <a16:creationId xmlns:a16="http://schemas.microsoft.com/office/drawing/2014/main" id="{E668D744-5F4A-DB9A-D715-522078942DFE}"/>
+              </a:ext>
+            </a:extLst>
+          </p:cNvPr>
+          <p:cNvSpPr/>
+          <p:nvPr/>
+        </p:nvSpPr>
+        <p:spPr>
+          <a:xfrm>
+            <a:off x="5010912" y="3264408"/>
+            <a:ext cx="5303520" cy="365760"/>
+          </a:xfrm>
+          <a:prstGeom prst="rect">
+            <a:avLst/>
+          </a:prstGeom>
+          <a:noFill/>
+          <a:ln/>
+        </p:spPr>
+        <p:txBody>
+          <a:bodyPr wrap="square" lIns="0" tIns="0" rIns="0" bIns="0" rtlCol="0" anchor="ctr"/>
+          <a:lstStyle/>
+          <a:p>
+            <a:pPr marL="0" indent="0">
+              <a:buNone/>
+            </a:pPr>
+            <a:r>
+              <a:rPr lang="en-US" sz="1200" dirty="0">
+                <a:solidFill>
+                  <a:srgbClr val="6E7A80"/>
+                </a:solidFill>
+              </a:rPr>
+              <a:t>Felkostnad på samma validation – lägre är bättre</a:t>
+            </a:r>
+            <a:endParaRPr lang="en-US" sz="1200" dirty="0"/>
+          </a:p>
+        </p:txBody>
+      </p:sp>
+      <p:sp>
+        <p:nvSpPr>
+          <p:cNvPr id="42" name="Text 24">
+            <a:extLst>
+              <a:ext uri="{FF2B5EF4-FFF2-40B4-BE49-F238E27FC236}">
+                <a16:creationId xmlns:a16="http://schemas.microsoft.com/office/drawing/2014/main" id="{FC8760EF-77CC-9AD3-F9A4-57B47227E705}"/>
+              </a:ext>
+            </a:extLst>
+          </p:cNvPr>
+          <p:cNvSpPr/>
+          <p:nvPr/>
+        </p:nvSpPr>
+        <p:spPr>
+          <a:xfrm>
+            <a:off x="5074920" y="3831336"/>
+            <a:ext cx="713232" cy="201168"/>
+          </a:xfrm>
+          <a:prstGeom prst="rect">
+            <a:avLst/>
+          </a:prstGeom>
+          <a:noFill/>
+          <a:ln/>
+        </p:spPr>
+        <p:txBody>
+          <a:bodyPr wrap="square" lIns="0" tIns="0" rIns="0" bIns="0" rtlCol="0" anchor="ctr"/>
+          <a:lstStyle/>
+          <a:p>
+            <a:pPr marL="0" indent="0">
+              <a:buNone/>
+            </a:pPr>
+            <a:r>
+              <a:rPr lang="en-US" sz="1100" dirty="0">
+                <a:solidFill>
+                  <a:srgbClr val="6E7A80"/>
+                </a:solidFill>
+              </a:rPr>
+              <a:t>Dummy</a:t>
+            </a:r>
+            <a:endParaRPr lang="en-US" sz="1050" dirty="0"/>
+          </a:p>
+        </p:txBody>
+      </p:sp>
+      <p:sp>
+        <p:nvSpPr>
+          <p:cNvPr id="44" name="Shape 25">
+            <a:extLst>
+              <a:ext uri="{FF2B5EF4-FFF2-40B4-BE49-F238E27FC236}">
+                <a16:creationId xmlns:a16="http://schemas.microsoft.com/office/drawing/2014/main" id="{096484CC-94B3-1B56-6CF1-505BB75EBDBE}"/>
+              </a:ext>
+            </a:extLst>
+          </p:cNvPr>
+          <p:cNvSpPr/>
+          <p:nvPr/>
+        </p:nvSpPr>
+        <p:spPr>
+          <a:xfrm>
+            <a:off x="5833872" y="3840480"/>
+            <a:ext cx="5120640" cy="228600"/>
+          </a:xfrm>
+          <a:prstGeom prst="rect">
+            <a:avLst/>
           </a:prstGeom>
           <a:solidFill>
-            <a:srgbClr val="FFFFFF"/>
+            <a:srgbClr val="AAB8BC"/>
           </a:solidFill>
-          <a:ln w="8890">
+          <a:ln w="12700">
             <a:solidFill>
-              <a:srgbClr val="DDE8E7"/>
+              <a:srgbClr val="AAB8BC">
+                <a:alpha val="0"/>
+              </a:srgbClr>
             </a:solidFill>
             <a:prstDash val="solid"/>
           </a:ln>
@@ -5944,114 +6210,122 @@
           <a:bodyPr/>
           <a:lstStyle/>
           <a:p>
-            <a:endParaRPr lang="sv-SE"/>
-          </a:p>
-        </p:txBody>
-      </p:sp>
-      <p:sp>
-        <p:nvSpPr>
-          <p:cNvPr id="21" name="Text 19"/>
-          <p:cNvSpPr/>
-          <p:nvPr/>
-        </p:nvSpPr>
-        <p:spPr>
-          <a:xfrm>
-            <a:off x="6775704" y="2459736"/>
-            <a:ext cx="1892808" cy="484632"/>
-          </a:xfrm>
-          <a:prstGeom prst="rect">
-            <a:avLst/>
-          </a:prstGeom>
-          <a:noFill/>
-          <a:ln/>
-        </p:spPr>
-        <p:txBody>
-          <a:bodyPr wrap="square" lIns="0" tIns="0" rIns="0" bIns="0" rtlCol="0" anchor="ctr">
-            <a:normAutofit/>
-          </a:bodyPr>
-          <a:lstStyle/>
-          <a:p>
-            <a:pPr marL="0" indent="0">
-              <a:buNone/>
-            </a:pPr>
-            <a:r>
-              <a:rPr lang="en-US" sz="2900" b="1" dirty="0">
-                <a:solidFill>
-                  <a:srgbClr val="177C78"/>
-                </a:solidFill>
-                <a:latin typeface="Aptos" pitchFamily="34" charset="0"/>
-                <a:ea typeface="Aptos" pitchFamily="34" charset="-122"/>
-                <a:cs typeface="Aptos" pitchFamily="34" charset="-120"/>
-              </a:rPr>
-              <a:t>92 %</a:t>
-            </a:r>
-            <a:endParaRPr lang="en-US" sz="2900" dirty="0"/>
-          </a:p>
-        </p:txBody>
-      </p:sp>
-      <p:sp>
-        <p:nvSpPr>
-          <p:cNvPr id="22" name="Text 20"/>
-          <p:cNvSpPr/>
-          <p:nvPr/>
-        </p:nvSpPr>
-        <p:spPr>
-          <a:xfrm>
-            <a:off x="6775704" y="3090672"/>
-            <a:ext cx="1901952" cy="237744"/>
-          </a:xfrm>
-          <a:prstGeom prst="rect">
-            <a:avLst/>
-          </a:prstGeom>
-          <a:noFill/>
-          <a:ln/>
-        </p:spPr>
-        <p:txBody>
-          <a:bodyPr wrap="square" lIns="0" tIns="0" rIns="0" bIns="0" rtlCol="0" anchor="ctr">
-            <a:normAutofit/>
-          </a:bodyPr>
-          <a:lstStyle/>
-          <a:p>
-            <a:pPr marL="0" indent="0">
-              <a:buNone/>
-            </a:pPr>
-            <a:r>
-              <a:rPr lang="en-US" sz="1230" dirty="0">
-                <a:solidFill>
-                  <a:srgbClr val="657985"/>
-                </a:solidFill>
-                <a:latin typeface="Aptos" pitchFamily="34" charset="0"/>
-                <a:ea typeface="Aptos" pitchFamily="34" charset="-122"/>
-                <a:cs typeface="Aptos" pitchFamily="34" charset="-120"/>
-              </a:rPr>
-              <a:t>recall på intern validering</a:t>
-            </a:r>
-            <a:endParaRPr lang="en-US" sz="1230" dirty="0"/>
-          </a:p>
-        </p:txBody>
-      </p:sp>
-      <p:sp>
-        <p:nvSpPr>
-          <p:cNvPr id="23" name="Shape 21"/>
-          <p:cNvSpPr/>
-          <p:nvPr/>
-        </p:nvSpPr>
-        <p:spPr>
-          <a:xfrm>
-            <a:off x="8979408" y="2313432"/>
-            <a:ext cx="2267712" cy="1216152"/>
-          </a:xfrm>
-          <a:prstGeom prst="roundRect">
-            <a:avLst>
-              <a:gd name="adj" fmla="val 9023"/>
-            </a:avLst>
+            <a:endParaRPr lang="en-SE"/>
+          </a:p>
+        </p:txBody>
+      </p:sp>
+      <p:sp>
+        <p:nvSpPr>
+          <p:cNvPr id="46" name="Text 26">
+            <a:extLst>
+              <a:ext uri="{FF2B5EF4-FFF2-40B4-BE49-F238E27FC236}">
+                <a16:creationId xmlns:a16="http://schemas.microsoft.com/office/drawing/2014/main" id="{8237236A-ADFA-4BA7-4A9D-10FF3694C854}"/>
+              </a:ext>
+            </a:extLst>
+          </p:cNvPr>
+          <p:cNvSpPr/>
+          <p:nvPr/>
+        </p:nvSpPr>
+        <p:spPr>
+          <a:xfrm>
+            <a:off x="10259568" y="3843776"/>
+            <a:ext cx="658368" cy="219456"/>
+          </a:xfrm>
+          <a:prstGeom prst="rect">
+            <a:avLst/>
+          </a:prstGeom>
+          <a:noFill/>
+          <a:ln/>
+        </p:spPr>
+        <p:txBody>
+          <a:bodyPr wrap="square" lIns="0" tIns="0" rIns="0" bIns="0" rtlCol="0" anchor="ctr"/>
+          <a:lstStyle/>
+          <a:p>
+            <a:pPr marL="0" indent="0" algn="r">
+              <a:buNone/>
+            </a:pPr>
+            <a:r>
+              <a:rPr lang="en-US" sz="900" b="1" dirty="0">
+                <a:solidFill>
+                  <a:srgbClr val="18394A"/>
+                </a:solidFill>
+              </a:rPr>
+              <a:t>100 000</a:t>
+            </a:r>
+            <a:endParaRPr lang="en-US" sz="900" dirty="0"/>
+          </a:p>
+        </p:txBody>
+      </p:sp>
+      <p:sp>
+        <p:nvSpPr>
+          <p:cNvPr id="48" name="Text 27">
+            <a:extLst>
+              <a:ext uri="{FF2B5EF4-FFF2-40B4-BE49-F238E27FC236}">
+                <a16:creationId xmlns:a16="http://schemas.microsoft.com/office/drawing/2014/main" id="{9AB39548-0ADD-009A-6CAD-C487ED3F03F5}"/>
+              </a:ext>
+            </a:extLst>
+          </p:cNvPr>
+          <p:cNvSpPr/>
+          <p:nvPr/>
+        </p:nvSpPr>
+        <p:spPr>
+          <a:xfrm>
+            <a:off x="5074920" y="4325112"/>
+            <a:ext cx="713232" cy="201168"/>
+          </a:xfrm>
+          <a:prstGeom prst="rect">
+            <a:avLst/>
+          </a:prstGeom>
+          <a:noFill/>
+          <a:ln/>
+        </p:spPr>
+        <p:txBody>
+          <a:bodyPr wrap="square" lIns="0" tIns="0" rIns="0" bIns="0" rtlCol="0" anchor="ctr"/>
+          <a:lstStyle/>
+          <a:p>
+            <a:pPr marL="0" indent="0">
+              <a:buNone/>
+            </a:pPr>
+            <a:r>
+              <a:rPr lang="en-US" sz="1100" dirty="0">
+                <a:solidFill>
+                  <a:srgbClr val="6E7A80"/>
+                </a:solidFill>
+              </a:rPr>
+              <a:t>LogReg</a:t>
+            </a:r>
+            <a:endParaRPr lang="en-US" sz="1100" dirty="0"/>
+          </a:p>
+        </p:txBody>
+      </p:sp>
+      <p:sp>
+        <p:nvSpPr>
+          <p:cNvPr id="50" name="Shape 28">
+            <a:extLst>
+              <a:ext uri="{FF2B5EF4-FFF2-40B4-BE49-F238E27FC236}">
+                <a16:creationId xmlns:a16="http://schemas.microsoft.com/office/drawing/2014/main" id="{A41F694E-D5F0-AA2D-9197-95939AE23C0E}"/>
+              </a:ext>
+            </a:extLst>
+          </p:cNvPr>
+          <p:cNvSpPr/>
+          <p:nvPr/>
+        </p:nvSpPr>
+        <p:spPr>
+          <a:xfrm>
+            <a:off x="5833872" y="4334256"/>
+            <a:ext cx="596042" cy="228600"/>
+          </a:xfrm>
+          <a:prstGeom prst="rect">
+            <a:avLst/>
           </a:prstGeom>
           <a:solidFill>
-            <a:srgbClr val="FFFFFF"/>
+            <a:srgbClr val="278C88"/>
           </a:solidFill>
-          <a:ln w="8890">
+          <a:ln w="12700">
             <a:solidFill>
-              <a:srgbClr val="DDE8E7"/>
+              <a:srgbClr val="278C88">
+                <a:alpha val="0"/>
+              </a:srgbClr>
             </a:solidFill>
             <a:prstDash val="solid"/>
           </a:ln>
@@ -6060,212 +6334,259 @@
           <a:bodyPr/>
           <a:lstStyle/>
           <a:p>
-            <a:endParaRPr lang="sv-SE"/>
-          </a:p>
-        </p:txBody>
-      </p:sp>
-      <p:sp>
-        <p:nvSpPr>
-          <p:cNvPr id="24" name="Text 22"/>
-          <p:cNvSpPr/>
-          <p:nvPr/>
-        </p:nvSpPr>
-        <p:spPr>
-          <a:xfrm>
-            <a:off x="9153144" y="2459736"/>
-            <a:ext cx="1938528" cy="484632"/>
-          </a:xfrm>
-          <a:prstGeom prst="rect">
-            <a:avLst/>
-          </a:prstGeom>
-          <a:noFill/>
-          <a:ln/>
-        </p:spPr>
-        <p:txBody>
-          <a:bodyPr wrap="square" lIns="0" tIns="0" rIns="0" bIns="0" rtlCol="0" anchor="ctr">
-            <a:normAutofit/>
-          </a:bodyPr>
-          <a:lstStyle/>
-          <a:p>
-            <a:pPr marL="0" indent="0">
-              <a:buNone/>
-            </a:pPr>
-            <a:r>
-              <a:rPr lang="en-US" sz="2900" b="1" dirty="0">
-                <a:solidFill>
-                  <a:srgbClr val="177C78"/>
-                </a:solidFill>
-                <a:latin typeface="Aptos" pitchFamily="34" charset="0"/>
-                <a:ea typeface="Aptos" pitchFamily="34" charset="-122"/>
-                <a:cs typeface="Aptos" pitchFamily="34" charset="-120"/>
+            <a:endParaRPr lang="en-SE"/>
+          </a:p>
+        </p:txBody>
+      </p:sp>
+      <p:sp>
+        <p:nvSpPr>
+          <p:cNvPr id="52" name="Text 29">
+            <a:extLst>
+              <a:ext uri="{FF2B5EF4-FFF2-40B4-BE49-F238E27FC236}">
+                <a16:creationId xmlns:a16="http://schemas.microsoft.com/office/drawing/2014/main" id="{9EA6B5F3-7256-90B4-BA45-DFAB86DA9B89}"/>
+              </a:ext>
+            </a:extLst>
+          </p:cNvPr>
+          <p:cNvSpPr/>
+          <p:nvPr/>
+        </p:nvSpPr>
+        <p:spPr>
+          <a:xfrm>
+            <a:off x="6537960" y="4370832"/>
+            <a:ext cx="713232" cy="219456"/>
+          </a:xfrm>
+          <a:prstGeom prst="rect">
+            <a:avLst/>
+          </a:prstGeom>
+          <a:noFill/>
+          <a:ln/>
+        </p:spPr>
+        <p:txBody>
+          <a:bodyPr wrap="square" lIns="0" tIns="0" rIns="0" bIns="0" rtlCol="0" anchor="ctr"/>
+          <a:lstStyle/>
+          <a:p>
+            <a:pPr marL="0" indent="0">
+              <a:buNone/>
+            </a:pPr>
+            <a:r>
+              <a:rPr lang="en-US" sz="900" b="1" dirty="0">
+                <a:solidFill>
+                  <a:srgbClr val="1C7774"/>
+                </a:solidFill>
+              </a:rPr>
+              <a:t>11 640</a:t>
+            </a:r>
+            <a:endParaRPr lang="en-US" sz="900" dirty="0"/>
+          </a:p>
+        </p:txBody>
+      </p:sp>
+      <p:sp>
+        <p:nvSpPr>
+          <p:cNvPr id="54" name="Text 30">
+            <a:extLst>
+              <a:ext uri="{FF2B5EF4-FFF2-40B4-BE49-F238E27FC236}">
+                <a16:creationId xmlns:a16="http://schemas.microsoft.com/office/drawing/2014/main" id="{A49138B1-9697-9E4E-09CA-D4EE5CA28353}"/>
+              </a:ext>
+            </a:extLst>
+          </p:cNvPr>
+          <p:cNvSpPr/>
+          <p:nvPr/>
+        </p:nvSpPr>
+        <p:spPr>
+          <a:xfrm>
+            <a:off x="5010912" y="4690871"/>
+            <a:ext cx="5303520" cy="246888"/>
+          </a:xfrm>
+          <a:prstGeom prst="rect">
+            <a:avLst/>
+          </a:prstGeom>
+          <a:noFill/>
+          <a:ln/>
+        </p:spPr>
+        <p:txBody>
+          <a:bodyPr wrap="square" lIns="0" tIns="0" rIns="0" bIns="0" rtlCol="0" anchor="ctr"/>
+          <a:lstStyle/>
+          <a:p>
+            <a:pPr marL="0" indent="0">
+              <a:buNone/>
+            </a:pPr>
+            <a:r>
+              <a:rPr lang="en-US" sz="1100" b="1" dirty="0">
+                <a:solidFill>
+                  <a:srgbClr val="1C7774"/>
+                </a:solidFill>
+              </a:rPr>
+              <a:t>Dummy: 98,33 % accuracy men 0 % recall</a:t>
+            </a:r>
+            <a:endParaRPr lang="en-US" sz="1100" dirty="0"/>
+          </a:p>
+        </p:txBody>
+      </p:sp>
+      <p:sp>
+        <p:nvSpPr>
+          <p:cNvPr id="56" name="Text 31">
+            <a:extLst>
+              <a:ext uri="{FF2B5EF4-FFF2-40B4-BE49-F238E27FC236}">
+                <a16:creationId xmlns:a16="http://schemas.microsoft.com/office/drawing/2014/main" id="{768CC4DE-C522-EA21-7B1E-B29CD2963BD9}"/>
+              </a:ext>
+            </a:extLst>
+          </p:cNvPr>
+          <p:cNvSpPr/>
+          <p:nvPr/>
+        </p:nvSpPr>
+        <p:spPr>
+          <a:xfrm>
+            <a:off x="5010912" y="5001768"/>
+            <a:ext cx="5715000" cy="256032"/>
+          </a:xfrm>
+          <a:prstGeom prst="rect">
+            <a:avLst/>
+          </a:prstGeom>
+          <a:noFill/>
+          <a:ln/>
+        </p:spPr>
+        <p:txBody>
+          <a:bodyPr wrap="square" lIns="0" tIns="0" rIns="0" bIns="0" rtlCol="0" anchor="ctr"/>
+          <a:lstStyle/>
+          <a:p>
+            <a:pPr marL="0" indent="0">
+              <a:buNone/>
+            </a:pPr>
+            <a:r>
+              <a:rPr lang="en-US" sz="1050" dirty="0">
+                <a:solidFill>
+                  <a:srgbClr val="6E7A80"/>
+                </a:solidFill>
+              </a:rPr>
+              <a:t>Hög accuracy såg bra ut – men modellen hittade inget APS-fel.</a:t>
+            </a:r>
+            <a:endParaRPr lang="en-US" sz="1050" dirty="0"/>
+          </a:p>
+        </p:txBody>
+      </p:sp>
+      <p:sp>
+        <p:nvSpPr>
+          <p:cNvPr id="58" name="Text 15">
+            <a:extLst>
+              <a:ext uri="{FF2B5EF4-FFF2-40B4-BE49-F238E27FC236}">
+                <a16:creationId xmlns:a16="http://schemas.microsoft.com/office/drawing/2014/main" id="{77047815-F819-62C9-AC9C-8549D5377217}"/>
+              </a:ext>
+            </a:extLst>
+          </p:cNvPr>
+          <p:cNvSpPr/>
+          <p:nvPr/>
+        </p:nvSpPr>
+        <p:spPr>
+          <a:xfrm>
+            <a:off x="5907024" y="1750058"/>
+            <a:ext cx="1417320" cy="279909"/>
+          </a:xfrm>
+          <a:prstGeom prst="rect">
+            <a:avLst/>
+          </a:prstGeom>
+          <a:noFill/>
+          <a:ln/>
+        </p:spPr>
+        <p:txBody>
+          <a:bodyPr wrap="square" lIns="0" tIns="0" rIns="0" bIns="0" rtlCol="0" anchor="ctr"/>
+          <a:lstStyle/>
+          <a:p>
+            <a:pPr marL="0" indent="0">
+              <a:buNone/>
+            </a:pPr>
+            <a:r>
+              <a:rPr lang="en-US" sz="2800" b="1" dirty="0">
+                <a:solidFill>
+                  <a:srgbClr val="18394A"/>
+                </a:solidFill>
+              </a:rPr>
+              <a:t>92 %</a:t>
+            </a:r>
+            <a:endParaRPr lang="en-US" sz="2800" dirty="0"/>
+          </a:p>
+        </p:txBody>
+      </p:sp>
+      <p:sp>
+        <p:nvSpPr>
+          <p:cNvPr id="60" name="Text 17">
+            <a:extLst>
+              <a:ext uri="{FF2B5EF4-FFF2-40B4-BE49-F238E27FC236}">
+                <a16:creationId xmlns:a16="http://schemas.microsoft.com/office/drawing/2014/main" id="{1CF69832-88D1-0FAB-A8A0-B899D66889B9}"/>
+              </a:ext>
+            </a:extLst>
+          </p:cNvPr>
+          <p:cNvSpPr/>
+          <p:nvPr/>
+        </p:nvSpPr>
+        <p:spPr>
+          <a:xfrm>
+            <a:off x="8106156" y="1648777"/>
+            <a:ext cx="1353312" cy="393192"/>
+          </a:xfrm>
+          <a:prstGeom prst="rect">
+            <a:avLst/>
+          </a:prstGeom>
+          <a:noFill/>
+          <a:ln/>
+        </p:spPr>
+        <p:txBody>
+          <a:bodyPr wrap="square" lIns="0" tIns="0" rIns="0" bIns="0" rtlCol="0" anchor="ctr"/>
+          <a:lstStyle/>
+          <a:p>
+            <a:pPr marL="0" indent="0">
+              <a:buNone/>
+            </a:pPr>
+            <a:r>
+              <a:rPr lang="en-US" sz="2800" b="1" dirty="0">
+                <a:solidFill>
+                  <a:srgbClr val="18394A"/>
+                </a:solidFill>
               </a:rPr>
               <a:t>16</a:t>
             </a:r>
-            <a:endParaRPr lang="en-US" sz="2900" dirty="0"/>
-          </a:p>
-        </p:txBody>
-      </p:sp>
-      <p:sp>
-        <p:nvSpPr>
-          <p:cNvPr id="25" name="Text 23"/>
-          <p:cNvSpPr/>
-          <p:nvPr/>
-        </p:nvSpPr>
-        <p:spPr>
-          <a:xfrm>
-            <a:off x="9153144" y="3090672"/>
-            <a:ext cx="1947672" cy="237744"/>
-          </a:xfrm>
-          <a:prstGeom prst="rect">
-            <a:avLst/>
-          </a:prstGeom>
-          <a:noFill/>
-          <a:ln/>
-        </p:spPr>
-        <p:txBody>
-          <a:bodyPr wrap="square" lIns="0" tIns="0" rIns="0" bIns="0" rtlCol="0" anchor="ctr">
-            <a:normAutofit/>
-          </a:bodyPr>
-          <a:lstStyle/>
-          <a:p>
-            <a:pPr marL="0" indent="0">
-              <a:buNone/>
-            </a:pPr>
-            <a:r>
-              <a:rPr lang="en-US" sz="1230" dirty="0">
-                <a:solidFill>
-                  <a:srgbClr val="657985"/>
-                </a:solidFill>
-                <a:latin typeface="Aptos" pitchFamily="34" charset="0"/>
-                <a:ea typeface="Aptos" pitchFamily="34" charset="-122"/>
-                <a:cs typeface="Aptos" pitchFamily="34" charset="-120"/>
-              </a:rPr>
-              <a:t>missade APS-fel (FN)</a:t>
-            </a:r>
-            <a:endParaRPr lang="en-US" sz="1230" dirty="0"/>
-          </a:p>
-        </p:txBody>
-      </p:sp>
-      <p:sp>
-        <p:nvSpPr>
-          <p:cNvPr id="26" name="Text 24"/>
-          <p:cNvSpPr/>
-          <p:nvPr/>
-        </p:nvSpPr>
-        <p:spPr>
-          <a:xfrm>
-            <a:off x="6647688" y="4023360"/>
-            <a:ext cx="3931920" cy="612648"/>
-          </a:xfrm>
-          <a:prstGeom prst="rect">
-            <a:avLst/>
-          </a:prstGeom>
-          <a:noFill/>
-          <a:ln/>
-        </p:spPr>
-        <p:txBody>
-          <a:bodyPr wrap="square" lIns="0" tIns="0" rIns="0" bIns="0" rtlCol="0" anchor="ctr">
-            <a:normAutofit/>
-          </a:bodyPr>
-          <a:lstStyle/>
-          <a:p>
-            <a:pPr marL="0" indent="0">
-              <a:buNone/>
-            </a:pPr>
-            <a:r>
-              <a:rPr lang="en-US" sz="3800" b="1" dirty="0">
-                <a:solidFill>
-                  <a:srgbClr val="173647"/>
-                </a:solidFill>
-                <a:latin typeface="Aptos" pitchFamily="34" charset="0"/>
-                <a:ea typeface="Aptos" pitchFamily="34" charset="-122"/>
-                <a:cs typeface="Aptos" pitchFamily="34" charset="-120"/>
+            <a:endParaRPr lang="en-US" sz="2100" dirty="0"/>
+          </a:p>
+        </p:txBody>
+      </p:sp>
+      <p:sp>
+        <p:nvSpPr>
+          <p:cNvPr id="62" name="Text 19">
+            <a:extLst>
+              <a:ext uri="{FF2B5EF4-FFF2-40B4-BE49-F238E27FC236}">
+                <a16:creationId xmlns:a16="http://schemas.microsoft.com/office/drawing/2014/main" id="{418AC8B0-C519-E44D-8681-F96D8499B84B}"/>
+              </a:ext>
+            </a:extLst>
+          </p:cNvPr>
+          <p:cNvSpPr/>
+          <p:nvPr/>
+        </p:nvSpPr>
+        <p:spPr>
+          <a:xfrm>
+            <a:off x="10049256" y="1679065"/>
+            <a:ext cx="1353312" cy="329184"/>
+          </a:xfrm>
+          <a:prstGeom prst="rect">
+            <a:avLst/>
+          </a:prstGeom>
+          <a:noFill/>
+          <a:ln/>
+        </p:spPr>
+        <p:txBody>
+          <a:bodyPr wrap="square" lIns="0" tIns="0" rIns="0" bIns="0" rtlCol="0" anchor="ctr"/>
+          <a:lstStyle/>
+          <a:p>
+            <a:pPr marL="0" indent="0">
+              <a:buNone/>
+            </a:pPr>
+            <a:r>
+              <a:rPr lang="en-US" sz="2800" b="1" dirty="0">
+                <a:solidFill>
+                  <a:srgbClr val="18394A"/>
+                </a:solidFill>
               </a:rPr>
               <a:t>11 640</a:t>
             </a:r>
-            <a:endParaRPr lang="en-US" sz="3800" dirty="0"/>
-          </a:p>
-        </p:txBody>
-      </p:sp>
-      <p:sp>
-        <p:nvSpPr>
-          <p:cNvPr id="27" name="Text 25"/>
-          <p:cNvSpPr/>
-          <p:nvPr/>
-        </p:nvSpPr>
-        <p:spPr>
-          <a:xfrm>
-            <a:off x="6665976" y="4764024"/>
-            <a:ext cx="4206240" cy="329184"/>
-          </a:xfrm>
-          <a:prstGeom prst="rect">
-            <a:avLst/>
-          </a:prstGeom>
-          <a:noFill/>
-          <a:ln/>
-        </p:spPr>
-        <p:txBody>
-          <a:bodyPr wrap="square" lIns="0" tIns="0" rIns="0" bIns="0" rtlCol="0" anchor="ctr">
-            <a:normAutofit/>
-          </a:bodyPr>
-          <a:lstStyle/>
-          <a:p>
-            <a:pPr marL="0" indent="0">
-              <a:buNone/>
-            </a:pPr>
-            <a:r>
-              <a:rPr lang="en-US" sz="1400" dirty="0">
-                <a:solidFill>
-                  <a:srgbClr val="657985"/>
-                </a:solidFill>
-                <a:latin typeface="Aptos" pitchFamily="34" charset="0"/>
-                <a:ea typeface="Aptos" pitchFamily="34" charset="-122"/>
-                <a:cs typeface="Aptos" pitchFamily="34" charset="-120"/>
-              </a:rPr>
-              <a:t>felkostnad · FP 364 / FN 16</a:t>
-            </a:r>
-            <a:endParaRPr lang="en-US" sz="1400" dirty="0"/>
-          </a:p>
-        </p:txBody>
-      </p:sp>
-      <p:sp>
-        <p:nvSpPr>
-          <p:cNvPr id="28" name="Text 26"/>
-          <p:cNvSpPr/>
-          <p:nvPr/>
-        </p:nvSpPr>
-        <p:spPr>
-          <a:xfrm>
-            <a:off x="777240" y="5815584"/>
-            <a:ext cx="9966960" cy="265176"/>
-          </a:xfrm>
-          <a:prstGeom prst="rect">
-            <a:avLst/>
-          </a:prstGeom>
-          <a:noFill/>
-          <a:ln/>
-        </p:spPr>
-        <p:txBody>
-          <a:bodyPr wrap="square" lIns="0" tIns="0" rIns="0" bIns="0" rtlCol="0" anchor="ctr">
-            <a:normAutofit/>
-          </a:bodyPr>
-          <a:lstStyle/>
-          <a:p>
-            <a:pPr marL="0" indent="0">
-              <a:buNone/>
-            </a:pPr>
-            <a:r>
-              <a:rPr lang="en-US" sz="1450" i="1" dirty="0">
-                <a:solidFill>
-                  <a:srgbClr val="657985"/>
-                </a:solidFill>
-                <a:latin typeface="Aptos" pitchFamily="34" charset="0"/>
-                <a:ea typeface="Aptos" pitchFamily="34" charset="-122"/>
-                <a:cs typeface="Aptos" pitchFamily="34" charset="-120"/>
-              </a:rPr>
-              <a:t>Dummy: 98,33 % accuracy men 0 % recall</a:t>
-            </a:r>
-            <a:endParaRPr lang="en-US" sz="1450" dirty="0"/>
+            <a:endParaRPr lang="en-US" sz="2800" dirty="0"/>
           </a:p>
         </p:txBody>
       </p:sp>
